--- a/valgroup_ciclone/Valgroup_Selecao_Tecnologia.pptx
+++ b/valgroup_ciclone/Valgroup_Selecao_Tecnologia.pptx
@@ -13,9 +13,10 @@
     <p:sldId id="261" r:id="rId7"/>
     <p:sldId id="262" r:id="rId8"/>
     <p:sldId id="263" r:id="rId9"/>
+    <p:sldId id="264" r:id="rId10"/>
   </p:sldIdLst>
   <p:notesMasterIdLst>
-    <p:notesMasterId r:id="rId10"/>
+    <p:notesMasterId r:id="rId11"/>
   </p:notesMasterIdLst>
   <p:sldSz cx="12191695" cy="6858000"/>
   <p:notesSz cx="6858000" cy="12191695"/>
@@ -1149,6 +1150,94 @@
             <a:fld id="{F7021451-1387-4CA6-816F-3879F97B5CBC}" type="slidenum">
               <a:rPr lang="en-US"/>
               <a:t>8</a:t>
+            </a:fld>
+            <a:endParaRPr lang="en-US"/>
+          </a:p>
+        </p:txBody>
+      </p:sp>
+    </p:spTree>
+    <p:extLst>
+      <p:ext uri="{BB962C8B-B14F-4D97-AF65-F5344CB8AC3E}">
+        <p14:creationId xmlns:p14="http://schemas.microsoft.com/office/powerpoint/2010/main" val="1024086991"/>
+      </p:ext>
+    </p:extLst>
+  </p:cSld>
+  <p:clrMapOvr>
+    <a:masterClrMapping/>
+  </p:clrMapOvr>
+</p:notes>
+</file>
+
+<file path=ppt/notesSlides/notesSlide9.xml><?xml version="1.0" encoding="utf-8"?>
+<p:notes xmlns:a="http://schemas.openxmlformats.org/drawingml/2006/main" xmlns:r="http://schemas.openxmlformats.org/officeDocument/2006/relationships" xmlns:p="http://schemas.openxmlformats.org/presentationml/2006/main">
+  <p:cSld>
+    <p:spTree>
+      <p:nvGrpSpPr>
+        <p:cNvPr id="1" name=""/>
+        <p:cNvGrpSpPr/>
+        <p:nvPr/>
+      </p:nvGrpSpPr>
+      <p:grpSpPr>
+        <a:xfrm>
+          <a:off x="0" y="0"/>
+          <a:ext cx="0" cy="0"/>
+          <a:chOff x="0" y="0"/>
+          <a:chExt cx="0" cy="0"/>
+        </a:xfrm>
+      </p:grpSpPr>
+      <p:sp>
+        <p:nvSpPr>
+          <p:cNvPr id="2" name="Slide Image Placeholder 1"/>
+          <p:cNvSpPr>
+            <a:spLocks noGrp="1" noRot="1" noChangeAspect="1"/>
+          </p:cNvSpPr>
+          <p:nvPr>
+            <p:ph type="sldImg"/>
+          </p:nvPr>
+        </p:nvSpPr>
+        <p:spPr/>
+      </p:sp>
+      <p:sp>
+        <p:nvSpPr>
+          <p:cNvPr id="3" name="Notes Placeholder 2"/>
+          <p:cNvSpPr>
+            <a:spLocks noGrp="1"/>
+          </p:cNvSpPr>
+          <p:nvPr>
+            <p:ph type="body" idx="1"/>
+          </p:nvPr>
+        </p:nvSpPr>
+        <p:spPr/>
+        <p:txBody>
+          <a:bodyPr/>
+          <a:lstStyle/>
+          <a:p>
+            <a:r>
+              <a:rPr lang="en-US" dirty="0"/>
+              <a:t/>
+            </a:r>
+            <a:endParaRPr lang="en-US" dirty="0"/>
+          </a:p>
+        </p:txBody>
+      </p:sp>
+      <p:sp>
+        <p:nvSpPr>
+          <p:cNvPr id="4" name="Slide Number Placeholder 3"/>
+          <p:cNvSpPr>
+            <a:spLocks noGrp="1"/>
+          </p:cNvSpPr>
+          <p:nvPr>
+            <p:ph type="sldNum" sz="quarter" idx="10"/>
+          </p:nvPr>
+        </p:nvSpPr>
+        <p:spPr/>
+        <p:txBody>
+          <a:bodyPr/>
+          <a:lstStyle/>
+          <a:p>
+            <a:fld id="{F7021451-1387-4CA6-816F-3879F97B5CBC}" type="slidenum">
+              <a:rPr lang="en-US"/>
+              <a:t>9</a:t>
             </a:fld>
             <a:endParaRPr lang="en-US"/>
           </a:p>
@@ -3181,7 +3270,7 @@
                 <a:ea typeface="Calibri" pitchFamily="34" charset="-122"/>
                 <a:cs typeface="Calibri" pitchFamily="34" charset="-120"/>
               </a:rPr>
-              <a:t>O MÉTODO</a:t>
+              <a:t>OS CRITÉRIOS</a:t>
             </a:r>
             <a:endParaRPr lang="en-US" sz="1100" dirty="0"/>
           </a:p>
@@ -3220,7 +3309,7 @@
                 <a:ea typeface="Calibri" pitchFamily="34" charset="-122"/>
                 <a:cs typeface="Calibri" pitchFamily="34" charset="-120"/>
               </a:rPr>
-              <a:t>A matriz de decisão</a:t>
+              <a:t>Os critérios de avaliação e seus pesos</a:t>
             </a:r>
             <a:endParaRPr lang="en-US" sz="2600" dirty="0"/>
           </a:p>
@@ -3265,40 +3354,16 @@
           </a:p>
         </p:txBody>
       </p:sp>
-      <p:pic>
-        <p:nvPicPr>
-          <p:cNvPr id="5" name="Image 0" descr="matriz.png">    </p:cNvPr>
-          <p:cNvPicPr>
-            <a:picLocks noChangeAspect="1"/>
-          </p:cNvPicPr>
-          <p:nvPr/>
-        </p:nvPicPr>
-        <p:blipFill>
-          <a:blip r:embed="rId1"/>
-          <a:stretch>
-            <a:fillRect/>
-          </a:stretch>
-        </p:blipFill>
-        <p:spPr>
-          <a:xfrm>
-            <a:off x="566928" y="1463040"/>
-            <a:ext cx="6285653" cy="5120640"/>
-          </a:xfrm>
-          <a:prstGeom prst="rect">
-            <a:avLst/>
-          </a:prstGeom>
-        </p:spPr>
-      </p:pic>
-      <p:sp>
-        <p:nvSpPr>
-          <p:cNvPr id="6" name="Text 3"/>
-          <p:cNvSpPr/>
-          <p:nvPr/>
-        </p:nvSpPr>
-        <p:spPr>
-          <a:xfrm>
-            <a:off x="7406640" y="1737360"/>
-            <a:ext cx="4206240" cy="320040"/>
+      <p:sp>
+        <p:nvSpPr>
+          <p:cNvPr id="5" name="Text 3"/>
+          <p:cNvSpPr/>
+          <p:nvPr/>
+        </p:nvSpPr>
+        <p:spPr>
+          <a:xfrm>
+            <a:off x="566928" y="1371600"/>
+            <a:ext cx="10972800" cy="292608"/>
           </a:xfrm>
           <a:prstGeom prst="rect">
             <a:avLst/>
@@ -3314,7 +3379,35 @@
               <a:buNone/>
             </a:pPr>
             <a:r>
-              <a:rPr lang="en-US" sz="1500" b="1" dirty="0">
+              <a:rPr lang="en-US" sz="1300" b="1" dirty="0">
+                <a:solidFill>
+                  <a:srgbClr val="1C5FA8"/>
+                </a:solidFill>
+                <a:latin typeface="Calibri" pitchFamily="34" charset="0"/>
+                <a:ea typeface="Calibri" pitchFamily="34" charset="-122"/>
+                <a:cs typeface="Calibri" pitchFamily="34" charset="-120"/>
+              </a:rPr>
+              <a:t>Peso 2</a:t>
+            </a:r>
+            <a:pPr indent="0" marL="0">
+              <a:buNone/>
+            </a:pPr>
+            <a:r>
+              <a:rPr lang="en-US" sz="1300" dirty="0">
+                <a:solidFill>
+                  <a:srgbClr val="55677A"/>
+                </a:solidFill>
+                <a:latin typeface="Calibri" pitchFamily="34" charset="0"/>
+                <a:ea typeface="Calibri" pitchFamily="34" charset="-122"/>
+                <a:cs typeface="Calibri" pitchFamily="34" charset="-120"/>
+              </a:rPr>
+              <a:t> = crítico técnico / de processo (define se funciona)      </a:t>
+            </a:r>
+            <a:pPr indent="0" marL="0">
+              <a:buNone/>
+            </a:pPr>
+            <a:r>
+              <a:rPr lang="en-US" sz="1300" b="1" dirty="0">
                 <a:solidFill>
                   <a:srgbClr val="3E7CA8"/>
                 </a:solidFill>
@@ -3322,42 +3415,214 @@
                 <a:ea typeface="Calibri" pitchFamily="34" charset="-122"/>
                 <a:cs typeface="Calibri" pitchFamily="34" charset="-120"/>
               </a:rPr>
-              <a:t>Como funciona</a:t>
-            </a:r>
-            <a:endParaRPr lang="en-US" sz="1500" dirty="0"/>
-          </a:p>
-        </p:txBody>
-      </p:sp>
-      <p:sp>
-        <p:nvSpPr>
-          <p:cNvPr id="7" name="Text 4"/>
-          <p:cNvSpPr/>
-          <p:nvPr/>
-        </p:nvSpPr>
-        <p:spPr>
-          <a:xfrm>
-            <a:off x="7406640" y="2148840"/>
-            <a:ext cx="4251960" cy="3657600"/>
-          </a:xfrm>
-          <a:prstGeom prst="rect">
-            <a:avLst/>
-          </a:prstGeom>
-          <a:noFill/>
-          <a:ln/>
-        </p:spPr>
-        <p:txBody>
-          <a:bodyPr wrap="square" lIns="0" tIns="0" rIns="0" bIns="0" rtlCol="0" anchor="t"/>
-          <a:lstStyle/>
-          <a:p>
-            <a:pPr marL="342900" indent="-342900">
-              <a:spcAft>
-                <a:spcPts val="1000"/>
-              </a:spcAft>
-              <a:buSzPct val="100000"/>
-              <a:buChar char="•"/>
-            </a:pPr>
-            <a:r>
-              <a:rPr lang="en-US" sz="1350" dirty="0">
+              <a:t>Peso 1</a:t>
+            </a:r>
+            <a:pPr indent="0" marL="0">
+              <a:buNone/>
+            </a:pPr>
+            <a:r>
+              <a:rPr lang="en-US" sz="1300" dirty="0">
+                <a:solidFill>
+                  <a:srgbClr val="55677A"/>
+                </a:solidFill>
+                <a:latin typeface="Calibri" pitchFamily="34" charset="0"/>
+                <a:ea typeface="Calibri" pitchFamily="34" charset="-122"/>
+                <a:cs typeface="Calibri" pitchFamily="34" charset="-120"/>
+              </a:rPr>
+              <a:t> = econômico / risco (secundário)</a:t>
+            </a:r>
+            <a:endParaRPr lang="en-US" sz="1300" dirty="0"/>
+          </a:p>
+        </p:txBody>
+      </p:sp>
+      <p:sp>
+        <p:nvSpPr>
+          <p:cNvPr id="6" name="Shape 4"/>
+          <p:cNvSpPr/>
+          <p:nvPr/>
+        </p:nvSpPr>
+        <p:spPr>
+          <a:xfrm>
+            <a:off x="566928" y="1783080"/>
+            <a:ext cx="11064240" cy="365760"/>
+          </a:xfrm>
+          <a:prstGeom prst="rect">
+            <a:avLst/>
+          </a:prstGeom>
+          <a:solidFill>
+            <a:srgbClr val="1C5FA8"/>
+          </a:solidFill>
+          <a:ln/>
+        </p:spPr>
+      </p:sp>
+      <p:sp>
+        <p:nvSpPr>
+          <p:cNvPr id="7" name="Text 5"/>
+          <p:cNvSpPr/>
+          <p:nvPr/>
+        </p:nvSpPr>
+        <p:spPr>
+          <a:xfrm>
+            <a:off x="704088" y="1783080"/>
+            <a:ext cx="3657600" cy="365760"/>
+          </a:xfrm>
+          <a:prstGeom prst="rect">
+            <a:avLst/>
+          </a:prstGeom>
+          <a:noFill/>
+          <a:ln/>
+        </p:spPr>
+        <p:txBody>
+          <a:bodyPr wrap="square" lIns="0" tIns="0" rIns="0" bIns="0" rtlCol="0" anchor="ctr"/>
+          <a:lstStyle/>
+          <a:p>
+            <a:pPr indent="0" marL="0">
+              <a:buNone/>
+            </a:pPr>
+            <a:r>
+              <a:rPr lang="en-US" sz="1100" b="1" dirty="0">
+                <a:solidFill>
+                  <a:srgbClr val="FFFFFF"/>
+                </a:solidFill>
+                <a:latin typeface="Calibri" pitchFamily="34" charset="0"/>
+                <a:ea typeface="Calibri" pitchFamily="34" charset="-122"/>
+                <a:cs typeface="Calibri" pitchFamily="34" charset="-120"/>
+              </a:rPr>
+              <a:t>Critério</a:t>
+            </a:r>
+            <a:endParaRPr lang="en-US" sz="1100" dirty="0"/>
+          </a:p>
+        </p:txBody>
+      </p:sp>
+      <p:sp>
+        <p:nvSpPr>
+          <p:cNvPr id="8" name="Text 6"/>
+          <p:cNvSpPr/>
+          <p:nvPr/>
+        </p:nvSpPr>
+        <p:spPr>
+          <a:xfrm>
+            <a:off x="4544568" y="1783080"/>
+            <a:ext cx="731520" cy="365760"/>
+          </a:xfrm>
+          <a:prstGeom prst="rect">
+            <a:avLst/>
+          </a:prstGeom>
+          <a:noFill/>
+          <a:ln/>
+        </p:spPr>
+        <p:txBody>
+          <a:bodyPr wrap="square" lIns="0" tIns="0" rIns="0" bIns="0" rtlCol="0" anchor="ctr"/>
+          <a:lstStyle/>
+          <a:p>
+            <a:pPr algn="ctr" indent="0" marL="0">
+              <a:buNone/>
+            </a:pPr>
+            <a:r>
+              <a:rPr lang="en-US" sz="1100" b="1" dirty="0">
+                <a:solidFill>
+                  <a:srgbClr val="FFFFFF"/>
+                </a:solidFill>
+                <a:latin typeface="Calibri" pitchFamily="34" charset="0"/>
+                <a:ea typeface="Calibri" pitchFamily="34" charset="-122"/>
+                <a:cs typeface="Calibri" pitchFamily="34" charset="-120"/>
+              </a:rPr>
+              <a:t>Peso</a:t>
+            </a:r>
+            <a:endParaRPr lang="en-US" sz="1100" dirty="0"/>
+          </a:p>
+        </p:txBody>
+      </p:sp>
+      <p:sp>
+        <p:nvSpPr>
+          <p:cNvPr id="9" name="Text 7"/>
+          <p:cNvSpPr/>
+          <p:nvPr/>
+        </p:nvSpPr>
+        <p:spPr>
+          <a:xfrm>
+            <a:off x="5504688" y="1783080"/>
+            <a:ext cx="6035040" cy="365760"/>
+          </a:xfrm>
+          <a:prstGeom prst="rect">
+            <a:avLst/>
+          </a:prstGeom>
+          <a:noFill/>
+          <a:ln/>
+        </p:spPr>
+        <p:txBody>
+          <a:bodyPr wrap="square" lIns="0" tIns="0" rIns="0" bIns="0" rtlCol="0" anchor="ctr"/>
+          <a:lstStyle/>
+          <a:p>
+            <a:pPr indent="0" marL="0">
+              <a:buNone/>
+            </a:pPr>
+            <a:r>
+              <a:rPr lang="en-US" sz="1100" b="1" dirty="0">
+                <a:solidFill>
+                  <a:srgbClr val="FFFFFF"/>
+                </a:solidFill>
+                <a:latin typeface="Calibri" pitchFamily="34" charset="0"/>
+                <a:ea typeface="Calibri" pitchFamily="34" charset="-122"/>
+                <a:cs typeface="Calibri" pitchFamily="34" charset="-120"/>
+              </a:rPr>
+              <a:t>Por que importa</a:t>
+            </a:r>
+            <a:endParaRPr lang="en-US" sz="1100" dirty="0"/>
+          </a:p>
+        </p:txBody>
+      </p:sp>
+      <p:sp>
+        <p:nvSpPr>
+          <p:cNvPr id="10" name="Shape 8"/>
+          <p:cNvSpPr/>
+          <p:nvPr/>
+        </p:nvSpPr>
+        <p:spPr>
+          <a:xfrm>
+            <a:off x="566928" y="2148840"/>
+            <a:ext cx="11064240" cy="402336"/>
+          </a:xfrm>
+          <a:prstGeom prst="rect">
+            <a:avLst/>
+          </a:prstGeom>
+          <a:solidFill>
+            <a:srgbClr val="F1F6FB"/>
+          </a:solidFill>
+          <a:ln w="6350">
+            <a:solidFill>
+              <a:srgbClr val="D7E1EC"/>
+            </a:solidFill>
+            <a:prstDash val="solid"/>
+          </a:ln>
+        </p:spPr>
+      </p:sp>
+      <p:sp>
+        <p:nvSpPr>
+          <p:cNvPr id="11" name="Text 9"/>
+          <p:cNvSpPr/>
+          <p:nvPr/>
+        </p:nvSpPr>
+        <p:spPr>
+          <a:xfrm>
+            <a:off x="704088" y="2148840"/>
+            <a:ext cx="3703320" cy="402336"/>
+          </a:xfrm>
+          <a:prstGeom prst="rect">
+            <a:avLst/>
+          </a:prstGeom>
+          <a:noFill/>
+          <a:ln/>
+        </p:spPr>
+        <p:txBody>
+          <a:bodyPr wrap="square" lIns="0" tIns="0" rIns="0" bIns="0" rtlCol="0" anchor="ctr"/>
+          <a:lstStyle/>
+          <a:p>
+            <a:pPr indent="0" marL="0">
+              <a:buNone/>
+            </a:pPr>
+            <a:r>
+              <a:rPr lang="en-US" sz="1150" b="1" dirty="0">
                 <a:solidFill>
                   <a:srgbClr val="16232E"/>
                 </a:solidFill>
@@ -3365,20 +3630,163 @@
                 <a:ea typeface="Calibri" pitchFamily="34" charset="-122"/>
                 <a:cs typeface="Calibri" pitchFamily="34" charset="-120"/>
               </a:rPr>
-              <a:t>10 critérios técnicos, com PESO 1 ou 2 (os mais críticos pesam 2)</a:t>
-            </a:r>
-            <a:endParaRPr lang="en-US" sz="1350" dirty="0"/>
-          </a:p>
-          <a:p>
-            <a:pPr marL="342900" indent="-342900">
-              <a:spcAft>
-                <a:spcPts val="1000"/>
-              </a:spcAft>
-              <a:buSzPct val="100000"/>
-              <a:buChar char="•"/>
-            </a:pPr>
-            <a:r>
-              <a:rPr lang="en-US" sz="1350" dirty="0">
+              <a:t>Temperatura de operação</a:t>
+            </a:r>
+            <a:endParaRPr lang="en-US" sz="1150" dirty="0"/>
+          </a:p>
+        </p:txBody>
+      </p:sp>
+      <p:sp>
+        <p:nvSpPr>
+          <p:cNvPr id="12" name="Shape 10"/>
+          <p:cNvSpPr/>
+          <p:nvPr/>
+        </p:nvSpPr>
+        <p:spPr>
+          <a:xfrm>
+            <a:off x="4608576" y="2221992"/>
+            <a:ext cx="566928" cy="256032"/>
+          </a:xfrm>
+          <a:prstGeom prst="roundRect">
+            <a:avLst>
+              <a:gd name="adj" fmla="val 14286"/>
+            </a:avLst>
+          </a:prstGeom>
+          <a:solidFill>
+            <a:srgbClr val="1C5FA8"/>
+          </a:solidFill>
+          <a:ln/>
+        </p:spPr>
+      </p:sp>
+      <p:sp>
+        <p:nvSpPr>
+          <p:cNvPr id="13" name="Text 11"/>
+          <p:cNvSpPr/>
+          <p:nvPr/>
+        </p:nvSpPr>
+        <p:spPr>
+          <a:xfrm>
+            <a:off x="4608576" y="2194560"/>
+            <a:ext cx="566928" cy="310896"/>
+          </a:xfrm>
+          <a:prstGeom prst="rect">
+            <a:avLst/>
+          </a:prstGeom>
+          <a:noFill/>
+          <a:ln/>
+        </p:spPr>
+        <p:txBody>
+          <a:bodyPr wrap="square" lIns="0" tIns="0" rIns="0" bIns="0" rtlCol="0" anchor="ctr"/>
+          <a:lstStyle/>
+          <a:p>
+            <a:pPr algn="ctr" indent="0" marL="0">
+              <a:buNone/>
+            </a:pPr>
+            <a:r>
+              <a:rPr lang="en-US" sz="1200" b="1" dirty="0">
+                <a:solidFill>
+                  <a:srgbClr val="FFFFFF"/>
+                </a:solidFill>
+                <a:latin typeface="Calibri" pitchFamily="34" charset="0"/>
+                <a:ea typeface="Calibri" pitchFamily="34" charset="-122"/>
+                <a:cs typeface="Calibri" pitchFamily="34" charset="-120"/>
+              </a:rPr>
+              <a:t>2</a:t>
+            </a:r>
+            <a:endParaRPr lang="en-US" sz="1200" dirty="0"/>
+          </a:p>
+        </p:txBody>
+      </p:sp>
+      <p:sp>
+        <p:nvSpPr>
+          <p:cNvPr id="14" name="Text 12"/>
+          <p:cNvSpPr/>
+          <p:nvPr/>
+        </p:nvSpPr>
+        <p:spPr>
+          <a:xfrm>
+            <a:off x="5504688" y="2148840"/>
+            <a:ext cx="6080760" cy="402336"/>
+          </a:xfrm>
+          <a:prstGeom prst="rect">
+            <a:avLst/>
+          </a:prstGeom>
+          <a:noFill/>
+          <a:ln/>
+        </p:spPr>
+        <p:txBody>
+          <a:bodyPr wrap="square" lIns="0" tIns="0" rIns="0" bIns="0" rtlCol="0" anchor="ctr"/>
+          <a:lstStyle/>
+          <a:p>
+            <a:pPr indent="0" marL="0">
+              <a:buNone/>
+            </a:pPr>
+            <a:r>
+              <a:rPr lang="en-US" sz="1150" dirty="0">
+                <a:solidFill>
+                  <a:srgbClr val="55677A"/>
+                </a:solidFill>
+                <a:latin typeface="Calibri" pitchFamily="34" charset="0"/>
+                <a:ea typeface="Calibri" pitchFamily="34" charset="-122"/>
+                <a:cs typeface="Calibri" pitchFamily="34" charset="-120"/>
+              </a:rPr>
+              <a:t>Gás entra a 400–450 °C — a tecnologia não pode degradar a quente</a:t>
+            </a:r>
+            <a:endParaRPr lang="en-US" sz="1150" dirty="0"/>
+          </a:p>
+        </p:txBody>
+      </p:sp>
+      <p:sp>
+        <p:nvSpPr>
+          <p:cNvPr id="15" name="Shape 13"/>
+          <p:cNvSpPr/>
+          <p:nvPr/>
+        </p:nvSpPr>
+        <p:spPr>
+          <a:xfrm>
+            <a:off x="566928" y="2551176"/>
+            <a:ext cx="11064240" cy="402336"/>
+          </a:xfrm>
+          <a:prstGeom prst="rect">
+            <a:avLst/>
+          </a:prstGeom>
+          <a:solidFill>
+            <a:srgbClr val="FFFFFF"/>
+          </a:solidFill>
+          <a:ln w="6350">
+            <a:solidFill>
+              <a:srgbClr val="D7E1EC"/>
+            </a:solidFill>
+            <a:prstDash val="solid"/>
+          </a:ln>
+        </p:spPr>
+      </p:sp>
+      <p:sp>
+        <p:nvSpPr>
+          <p:cNvPr id="16" name="Text 14"/>
+          <p:cNvSpPr/>
+          <p:nvPr/>
+        </p:nvSpPr>
+        <p:spPr>
+          <a:xfrm>
+            <a:off x="704088" y="2551176"/>
+            <a:ext cx="3703320" cy="402336"/>
+          </a:xfrm>
+          <a:prstGeom prst="rect">
+            <a:avLst/>
+          </a:prstGeom>
+          <a:noFill/>
+          <a:ln/>
+        </p:spPr>
+        <p:txBody>
+          <a:bodyPr wrap="square" lIns="0" tIns="0" rIns="0" bIns="0" rtlCol="0" anchor="ctr"/>
+          <a:lstStyle/>
+          <a:p>
+            <a:pPr indent="0" marL="0">
+              <a:buNone/>
+            </a:pPr>
+            <a:r>
+              <a:rPr lang="en-US" sz="1150" b="1" dirty="0">
                 <a:solidFill>
                   <a:srgbClr val="16232E"/>
                 </a:solidFill>
@@ -3386,20 +3794,163 @@
                 <a:ea typeface="Calibri" pitchFamily="34" charset="-122"/>
                 <a:cs typeface="Calibri" pitchFamily="34" charset="-120"/>
               </a:rPr>
-              <a:t>Cada tecnologia recebe +1 (positivo) · 0 (neutro) · −1 (negativo) por critério</a:t>
-            </a:r>
-            <a:endParaRPr lang="en-US" sz="1350" dirty="0"/>
-          </a:p>
-          <a:p>
-            <a:pPr marL="342900" indent="-342900">
-              <a:spcAft>
-                <a:spcPts val="1000"/>
-              </a:spcAft>
-              <a:buSzPct val="100000"/>
-              <a:buChar char="•"/>
-            </a:pPr>
-            <a:r>
-              <a:rPr lang="en-US" sz="1350" dirty="0">
+              <a:t>Faixa de partículas</a:t>
+            </a:r>
+            <a:endParaRPr lang="en-US" sz="1150" dirty="0"/>
+          </a:p>
+        </p:txBody>
+      </p:sp>
+      <p:sp>
+        <p:nvSpPr>
+          <p:cNvPr id="17" name="Shape 15"/>
+          <p:cNvSpPr/>
+          <p:nvPr/>
+        </p:nvSpPr>
+        <p:spPr>
+          <a:xfrm>
+            <a:off x="4608576" y="2624328"/>
+            <a:ext cx="566928" cy="256032"/>
+          </a:xfrm>
+          <a:prstGeom prst="roundRect">
+            <a:avLst>
+              <a:gd name="adj" fmla="val 14286"/>
+            </a:avLst>
+          </a:prstGeom>
+          <a:solidFill>
+            <a:srgbClr val="1C5FA8"/>
+          </a:solidFill>
+          <a:ln/>
+        </p:spPr>
+      </p:sp>
+      <p:sp>
+        <p:nvSpPr>
+          <p:cNvPr id="18" name="Text 16"/>
+          <p:cNvSpPr/>
+          <p:nvPr/>
+        </p:nvSpPr>
+        <p:spPr>
+          <a:xfrm>
+            <a:off x="4608576" y="2596896"/>
+            <a:ext cx="566928" cy="310896"/>
+          </a:xfrm>
+          <a:prstGeom prst="rect">
+            <a:avLst/>
+          </a:prstGeom>
+          <a:noFill/>
+          <a:ln/>
+        </p:spPr>
+        <p:txBody>
+          <a:bodyPr wrap="square" lIns="0" tIns="0" rIns="0" bIns="0" rtlCol="0" anchor="ctr"/>
+          <a:lstStyle/>
+          <a:p>
+            <a:pPr algn="ctr" indent="0" marL="0">
+              <a:buNone/>
+            </a:pPr>
+            <a:r>
+              <a:rPr lang="en-US" sz="1200" b="1" dirty="0">
+                <a:solidFill>
+                  <a:srgbClr val="FFFFFF"/>
+                </a:solidFill>
+                <a:latin typeface="Calibri" pitchFamily="34" charset="0"/>
+                <a:ea typeface="Calibri" pitchFamily="34" charset="-122"/>
+                <a:cs typeface="Calibri" pitchFamily="34" charset="-120"/>
+              </a:rPr>
+              <a:t>2</a:t>
+            </a:r>
+            <a:endParaRPr lang="en-US" sz="1200" dirty="0"/>
+          </a:p>
+        </p:txBody>
+      </p:sp>
+      <p:sp>
+        <p:nvSpPr>
+          <p:cNvPr id="19" name="Text 17"/>
+          <p:cNvSpPr/>
+          <p:nvPr/>
+        </p:nvSpPr>
+        <p:spPr>
+          <a:xfrm>
+            <a:off x="5504688" y="2551176"/>
+            <a:ext cx="6080760" cy="402336"/>
+          </a:xfrm>
+          <a:prstGeom prst="rect">
+            <a:avLst/>
+          </a:prstGeom>
+          <a:noFill/>
+          <a:ln/>
+        </p:spPr>
+        <p:txBody>
+          <a:bodyPr wrap="square" lIns="0" tIns="0" rIns="0" bIns="0" rtlCol="0" anchor="ctr"/>
+          <a:lstStyle/>
+          <a:p>
+            <a:pPr indent="0" marL="0">
+              <a:buNone/>
+            </a:pPr>
+            <a:r>
+              <a:rPr lang="en-US" sz="1150" dirty="0">
+                <a:solidFill>
+                  <a:srgbClr val="55677A"/>
+                </a:solidFill>
+                <a:latin typeface="Calibri" pitchFamily="34" charset="0"/>
+                <a:ea typeface="Calibri" pitchFamily="34" charset="-122"/>
+                <a:cs typeface="Calibri" pitchFamily="34" charset="-120"/>
+              </a:rPr>
+              <a:t>O char tem finos &lt; 75 µm que precisam ser capturados</a:t>
+            </a:r>
+            <a:endParaRPr lang="en-US" sz="1150" dirty="0"/>
+          </a:p>
+        </p:txBody>
+      </p:sp>
+      <p:sp>
+        <p:nvSpPr>
+          <p:cNvPr id="20" name="Shape 18"/>
+          <p:cNvSpPr/>
+          <p:nvPr/>
+        </p:nvSpPr>
+        <p:spPr>
+          <a:xfrm>
+            <a:off x="566928" y="2953512"/>
+            <a:ext cx="11064240" cy="402336"/>
+          </a:xfrm>
+          <a:prstGeom prst="rect">
+            <a:avLst/>
+          </a:prstGeom>
+          <a:solidFill>
+            <a:srgbClr val="F1F6FB"/>
+          </a:solidFill>
+          <a:ln w="6350">
+            <a:solidFill>
+              <a:srgbClr val="D7E1EC"/>
+            </a:solidFill>
+            <a:prstDash val="solid"/>
+          </a:ln>
+        </p:spPr>
+      </p:sp>
+      <p:sp>
+        <p:nvSpPr>
+          <p:cNvPr id="21" name="Text 19"/>
+          <p:cNvSpPr/>
+          <p:nvPr/>
+        </p:nvSpPr>
+        <p:spPr>
+          <a:xfrm>
+            <a:off x="704088" y="2953512"/>
+            <a:ext cx="3703320" cy="402336"/>
+          </a:xfrm>
+          <a:prstGeom prst="rect">
+            <a:avLst/>
+          </a:prstGeom>
+          <a:noFill/>
+          <a:ln/>
+        </p:spPr>
+        <p:txBody>
+          <a:bodyPr wrap="square" lIns="0" tIns="0" rIns="0" bIns="0" rtlCol="0" anchor="ctr"/>
+          <a:lstStyle/>
+          <a:p>
+            <a:pPr indent="0" marL="0">
+              <a:buNone/>
+            </a:pPr>
+            <a:r>
+              <a:rPr lang="en-US" sz="1150" b="1" dirty="0">
                 <a:solidFill>
                   <a:srgbClr val="16232E"/>
                 </a:solidFill>
@@ -3407,20 +3958,163 @@
                 <a:ea typeface="Calibri" pitchFamily="34" charset="-122"/>
                 <a:cs typeface="Calibri" pitchFamily="34" charset="-120"/>
               </a:rPr>
-              <a:t>Critério do email do cliente incluído: 'evitar filtração de líquido' (peso 2)</a:t>
-            </a:r>
-            <a:endParaRPr lang="en-US" sz="1350" dirty="0"/>
-          </a:p>
-          <a:p>
-            <a:pPr marL="342900" indent="-342900">
-              <a:spcAft>
-                <a:spcPts val="1000"/>
-              </a:spcAft>
-              <a:buSzPct val="100000"/>
-              <a:buChar char="•"/>
-            </a:pPr>
-            <a:r>
-              <a:rPr lang="en-US" sz="1350" dirty="0">
+              <a:t>Eficiência de coleta</a:t>
+            </a:r>
+            <a:endParaRPr lang="en-US" sz="1150" dirty="0"/>
+          </a:p>
+        </p:txBody>
+      </p:sp>
+      <p:sp>
+        <p:nvSpPr>
+          <p:cNvPr id="22" name="Shape 20"/>
+          <p:cNvSpPr/>
+          <p:nvPr/>
+        </p:nvSpPr>
+        <p:spPr>
+          <a:xfrm>
+            <a:off x="4608576" y="3026664"/>
+            <a:ext cx="566928" cy="256032"/>
+          </a:xfrm>
+          <a:prstGeom prst="roundRect">
+            <a:avLst>
+              <a:gd name="adj" fmla="val 14286"/>
+            </a:avLst>
+          </a:prstGeom>
+          <a:solidFill>
+            <a:srgbClr val="1C5FA8"/>
+          </a:solidFill>
+          <a:ln/>
+        </p:spPr>
+      </p:sp>
+      <p:sp>
+        <p:nvSpPr>
+          <p:cNvPr id="23" name="Text 21"/>
+          <p:cNvSpPr/>
+          <p:nvPr/>
+        </p:nvSpPr>
+        <p:spPr>
+          <a:xfrm>
+            <a:off x="4608576" y="2999232"/>
+            <a:ext cx="566928" cy="310896"/>
+          </a:xfrm>
+          <a:prstGeom prst="rect">
+            <a:avLst/>
+          </a:prstGeom>
+          <a:noFill/>
+          <a:ln/>
+        </p:spPr>
+        <p:txBody>
+          <a:bodyPr wrap="square" lIns="0" tIns="0" rIns="0" bIns="0" rtlCol="0" anchor="ctr"/>
+          <a:lstStyle/>
+          <a:p>
+            <a:pPr algn="ctr" indent="0" marL="0">
+              <a:buNone/>
+            </a:pPr>
+            <a:r>
+              <a:rPr lang="en-US" sz="1200" b="1" dirty="0">
+                <a:solidFill>
+                  <a:srgbClr val="FFFFFF"/>
+                </a:solidFill>
+                <a:latin typeface="Calibri" pitchFamily="34" charset="0"/>
+                <a:ea typeface="Calibri" pitchFamily="34" charset="-122"/>
+                <a:cs typeface="Calibri" pitchFamily="34" charset="-120"/>
+              </a:rPr>
+              <a:t>2</a:t>
+            </a:r>
+            <a:endParaRPr lang="en-US" sz="1200" dirty="0"/>
+          </a:p>
+        </p:txBody>
+      </p:sp>
+      <p:sp>
+        <p:nvSpPr>
+          <p:cNvPr id="24" name="Text 22"/>
+          <p:cNvSpPr/>
+          <p:nvPr/>
+        </p:nvSpPr>
+        <p:spPr>
+          <a:xfrm>
+            <a:off x="5504688" y="2953512"/>
+            <a:ext cx="6080760" cy="402336"/>
+          </a:xfrm>
+          <a:prstGeom prst="rect">
+            <a:avLst/>
+          </a:prstGeom>
+          <a:noFill/>
+          <a:ln/>
+        </p:spPr>
+        <p:txBody>
+          <a:bodyPr wrap="square" lIns="0" tIns="0" rIns="0" bIns="0" rtlCol="0" anchor="ctr"/>
+          <a:lstStyle/>
+          <a:p>
+            <a:pPr indent="0" marL="0">
+              <a:buNone/>
+            </a:pPr>
+            <a:r>
+              <a:rPr lang="en-US" sz="1150" dirty="0">
+                <a:solidFill>
+                  <a:srgbClr val="55677A"/>
+                </a:solidFill>
+                <a:latin typeface="Calibri" pitchFamily="34" charset="0"/>
+                <a:ea typeface="Calibri" pitchFamily="34" charset="-122"/>
+                <a:cs typeface="Calibri" pitchFamily="34" charset="-120"/>
+              </a:rPr>
+              <a:t>É o objetivo do projeto: quanto do char realmente separa</a:t>
+            </a:r>
+            <a:endParaRPr lang="en-US" sz="1150" dirty="0"/>
+          </a:p>
+        </p:txBody>
+      </p:sp>
+      <p:sp>
+        <p:nvSpPr>
+          <p:cNvPr id="25" name="Shape 23"/>
+          <p:cNvSpPr/>
+          <p:nvPr/>
+        </p:nvSpPr>
+        <p:spPr>
+          <a:xfrm>
+            <a:off x="566928" y="3355848"/>
+            <a:ext cx="11064240" cy="402336"/>
+          </a:xfrm>
+          <a:prstGeom prst="rect">
+            <a:avLst/>
+          </a:prstGeom>
+          <a:solidFill>
+            <a:srgbClr val="FFFFFF"/>
+          </a:solidFill>
+          <a:ln w="6350">
+            <a:solidFill>
+              <a:srgbClr val="D7E1EC"/>
+            </a:solidFill>
+            <a:prstDash val="solid"/>
+          </a:ln>
+        </p:spPr>
+      </p:sp>
+      <p:sp>
+        <p:nvSpPr>
+          <p:cNvPr id="26" name="Text 24"/>
+          <p:cNvSpPr/>
+          <p:nvPr/>
+        </p:nvSpPr>
+        <p:spPr>
+          <a:xfrm>
+            <a:off x="704088" y="3355848"/>
+            <a:ext cx="3703320" cy="402336"/>
+          </a:xfrm>
+          <a:prstGeom prst="rect">
+            <a:avLst/>
+          </a:prstGeom>
+          <a:noFill/>
+          <a:ln/>
+        </p:spPr>
+        <p:txBody>
+          <a:bodyPr wrap="square" lIns="0" tIns="0" rIns="0" bIns="0" rtlCol="0" anchor="ctr"/>
+          <a:lstStyle/>
+          <a:p>
+            <a:pPr indent="0" marL="0">
+              <a:buNone/>
+            </a:pPr>
+            <a:r>
+              <a:rPr lang="en-US" sz="1150" b="1" dirty="0">
                 <a:solidFill>
                   <a:srgbClr val="16232E"/>
                 </a:solidFill>
@@ -3428,15 +4122,1099 @@
                 <a:ea typeface="Calibri" pitchFamily="34" charset="-122"/>
                 <a:cs typeface="Calibri" pitchFamily="34" charset="-120"/>
               </a:rPr>
-              <a:t>Soma ponderada → ranking objetivo (máx. +17)</a:t>
-            </a:r>
-            <a:endParaRPr lang="en-US" sz="1350" dirty="0"/>
-          </a:p>
-        </p:txBody>
-      </p:sp>
-      <p:sp>
-        <p:nvSpPr>
-          <p:cNvPr id="8" name="Text 5"/>
+              <a:t>Queda de pressão (ΔP)</a:t>
+            </a:r>
+            <a:endParaRPr lang="en-US" sz="1150" dirty="0"/>
+          </a:p>
+        </p:txBody>
+      </p:sp>
+      <p:sp>
+        <p:nvSpPr>
+          <p:cNvPr id="27" name="Shape 25"/>
+          <p:cNvSpPr/>
+          <p:nvPr/>
+        </p:nvSpPr>
+        <p:spPr>
+          <a:xfrm>
+            <a:off x="4608576" y="3429000"/>
+            <a:ext cx="566928" cy="256032"/>
+          </a:xfrm>
+          <a:prstGeom prst="roundRect">
+            <a:avLst>
+              <a:gd name="adj" fmla="val 14286"/>
+            </a:avLst>
+          </a:prstGeom>
+          <a:solidFill>
+            <a:srgbClr val="1C5FA8"/>
+          </a:solidFill>
+          <a:ln/>
+        </p:spPr>
+      </p:sp>
+      <p:sp>
+        <p:nvSpPr>
+          <p:cNvPr id="28" name="Text 26"/>
+          <p:cNvSpPr/>
+          <p:nvPr/>
+        </p:nvSpPr>
+        <p:spPr>
+          <a:xfrm>
+            <a:off x="4608576" y="3401568"/>
+            <a:ext cx="566928" cy="310896"/>
+          </a:xfrm>
+          <a:prstGeom prst="rect">
+            <a:avLst/>
+          </a:prstGeom>
+          <a:noFill/>
+          <a:ln/>
+        </p:spPr>
+        <p:txBody>
+          <a:bodyPr wrap="square" lIns="0" tIns="0" rIns="0" bIns="0" rtlCol="0" anchor="ctr"/>
+          <a:lstStyle/>
+          <a:p>
+            <a:pPr algn="ctr" indent="0" marL="0">
+              <a:buNone/>
+            </a:pPr>
+            <a:r>
+              <a:rPr lang="en-US" sz="1200" b="1" dirty="0">
+                <a:solidFill>
+                  <a:srgbClr val="FFFFFF"/>
+                </a:solidFill>
+                <a:latin typeface="Calibri" pitchFamily="34" charset="0"/>
+                <a:ea typeface="Calibri" pitchFamily="34" charset="-122"/>
+                <a:cs typeface="Calibri" pitchFamily="34" charset="-120"/>
+              </a:rPr>
+              <a:t>2</a:t>
+            </a:r>
+            <a:endParaRPr lang="en-US" sz="1200" dirty="0"/>
+          </a:p>
+        </p:txBody>
+      </p:sp>
+      <p:sp>
+        <p:nvSpPr>
+          <p:cNvPr id="29" name="Text 27"/>
+          <p:cNvSpPr/>
+          <p:nvPr/>
+        </p:nvSpPr>
+        <p:spPr>
+          <a:xfrm>
+            <a:off x="5504688" y="3355848"/>
+            <a:ext cx="6080760" cy="402336"/>
+          </a:xfrm>
+          <a:prstGeom prst="rect">
+            <a:avLst/>
+          </a:prstGeom>
+          <a:noFill/>
+          <a:ln/>
+        </p:spPr>
+        <p:txBody>
+          <a:bodyPr wrap="square" lIns="0" tIns="0" rIns="0" bIns="0" rtlCol="0" anchor="ctr"/>
+          <a:lstStyle/>
+          <a:p>
+            <a:pPr indent="0" marL="0">
+              <a:buNone/>
+            </a:pPr>
+            <a:r>
+              <a:rPr lang="en-US" sz="1150" dirty="0">
+                <a:solidFill>
+                  <a:srgbClr val="55677A"/>
+                </a:solidFill>
+                <a:latin typeface="Calibri" pitchFamily="34" charset="0"/>
+                <a:ea typeface="Calibri" pitchFamily="34" charset="-122"/>
+                <a:cs typeface="Calibri" pitchFamily="34" charset="-120"/>
+              </a:rPr>
+              <a:t>Restrição dura do processo: ΔP &lt; 40 mbar</a:t>
+            </a:r>
+            <a:endParaRPr lang="en-US" sz="1150" dirty="0"/>
+          </a:p>
+        </p:txBody>
+      </p:sp>
+      <p:sp>
+        <p:nvSpPr>
+          <p:cNvPr id="30" name="Shape 28"/>
+          <p:cNvSpPr/>
+          <p:nvPr/>
+        </p:nvSpPr>
+        <p:spPr>
+          <a:xfrm>
+            <a:off x="566928" y="3758184"/>
+            <a:ext cx="11064240" cy="402336"/>
+          </a:xfrm>
+          <a:prstGeom prst="rect">
+            <a:avLst/>
+          </a:prstGeom>
+          <a:solidFill>
+            <a:srgbClr val="F1F6FB"/>
+          </a:solidFill>
+          <a:ln w="6350">
+            <a:solidFill>
+              <a:srgbClr val="D7E1EC"/>
+            </a:solidFill>
+            <a:prstDash val="solid"/>
+          </a:ln>
+        </p:spPr>
+      </p:sp>
+      <p:sp>
+        <p:nvSpPr>
+          <p:cNvPr id="31" name="Text 29"/>
+          <p:cNvSpPr/>
+          <p:nvPr/>
+        </p:nvSpPr>
+        <p:spPr>
+          <a:xfrm>
+            <a:off x="704088" y="3758184"/>
+            <a:ext cx="3703320" cy="402336"/>
+          </a:xfrm>
+          <a:prstGeom prst="rect">
+            <a:avLst/>
+          </a:prstGeom>
+          <a:noFill/>
+          <a:ln/>
+        </p:spPr>
+        <p:txBody>
+          <a:bodyPr wrap="square" lIns="0" tIns="0" rIns="0" bIns="0" rtlCol="0" anchor="ctr"/>
+          <a:lstStyle/>
+          <a:p>
+            <a:pPr indent="0" marL="0">
+              <a:buNone/>
+            </a:pPr>
+            <a:r>
+              <a:rPr lang="en-US" sz="1150" b="1" dirty="0">
+                <a:solidFill>
+                  <a:srgbClr val="16232E"/>
+                </a:solidFill>
+                <a:latin typeface="Calibri" pitchFamily="34" charset="0"/>
+                <a:ea typeface="Calibri" pitchFamily="34" charset="-122"/>
+                <a:cs typeface="Calibri" pitchFamily="34" charset="-120"/>
+              </a:rPr>
+              <a:t>Char pegajoso a 450 °C</a:t>
+            </a:r>
+            <a:endParaRPr lang="en-US" sz="1150" dirty="0"/>
+          </a:p>
+        </p:txBody>
+      </p:sp>
+      <p:sp>
+        <p:nvSpPr>
+          <p:cNvPr id="32" name="Shape 30"/>
+          <p:cNvSpPr/>
+          <p:nvPr/>
+        </p:nvSpPr>
+        <p:spPr>
+          <a:xfrm>
+            <a:off x="4608576" y="3831336"/>
+            <a:ext cx="566928" cy="256032"/>
+          </a:xfrm>
+          <a:prstGeom prst="roundRect">
+            <a:avLst>
+              <a:gd name="adj" fmla="val 14286"/>
+            </a:avLst>
+          </a:prstGeom>
+          <a:solidFill>
+            <a:srgbClr val="1C5FA8"/>
+          </a:solidFill>
+          <a:ln/>
+        </p:spPr>
+      </p:sp>
+      <p:sp>
+        <p:nvSpPr>
+          <p:cNvPr id="33" name="Text 31"/>
+          <p:cNvSpPr/>
+          <p:nvPr/>
+        </p:nvSpPr>
+        <p:spPr>
+          <a:xfrm>
+            <a:off x="4608576" y="3803904"/>
+            <a:ext cx="566928" cy="310896"/>
+          </a:xfrm>
+          <a:prstGeom prst="rect">
+            <a:avLst/>
+          </a:prstGeom>
+          <a:noFill/>
+          <a:ln/>
+        </p:spPr>
+        <p:txBody>
+          <a:bodyPr wrap="square" lIns="0" tIns="0" rIns="0" bIns="0" rtlCol="0" anchor="ctr"/>
+          <a:lstStyle/>
+          <a:p>
+            <a:pPr algn="ctr" indent="0" marL="0">
+              <a:buNone/>
+            </a:pPr>
+            <a:r>
+              <a:rPr lang="en-US" sz="1200" b="1" dirty="0">
+                <a:solidFill>
+                  <a:srgbClr val="FFFFFF"/>
+                </a:solidFill>
+                <a:latin typeface="Calibri" pitchFamily="34" charset="0"/>
+                <a:ea typeface="Calibri" pitchFamily="34" charset="-122"/>
+                <a:cs typeface="Calibri" pitchFamily="34" charset="-120"/>
+              </a:rPr>
+              <a:t>2</a:t>
+            </a:r>
+            <a:endParaRPr lang="en-US" sz="1200" dirty="0"/>
+          </a:p>
+        </p:txBody>
+      </p:sp>
+      <p:sp>
+        <p:nvSpPr>
+          <p:cNvPr id="34" name="Text 32"/>
+          <p:cNvSpPr/>
+          <p:nvPr/>
+        </p:nvSpPr>
+        <p:spPr>
+          <a:xfrm>
+            <a:off x="5504688" y="3758184"/>
+            <a:ext cx="6080760" cy="402336"/>
+          </a:xfrm>
+          <a:prstGeom prst="rect">
+            <a:avLst/>
+          </a:prstGeom>
+          <a:noFill/>
+          <a:ln/>
+        </p:spPr>
+        <p:txBody>
+          <a:bodyPr wrap="square" lIns="0" tIns="0" rIns="0" bIns="0" rtlCol="0" anchor="ctr"/>
+          <a:lstStyle/>
+          <a:p>
+            <a:pPr indent="0" marL="0">
+              <a:buNone/>
+            </a:pPr>
+            <a:r>
+              <a:rPr lang="en-US" sz="1150" dirty="0">
+                <a:solidFill>
+                  <a:srgbClr val="55677A"/>
+                </a:solidFill>
+                <a:latin typeface="Calibri" pitchFamily="34" charset="0"/>
+                <a:ea typeface="Calibri" pitchFamily="34" charset="-122"/>
+                <a:cs typeface="Calibri" pitchFamily="34" charset="-120"/>
+              </a:rPr>
+              <a:t>Risco de aglomerar e entupir o separador</a:t>
+            </a:r>
+            <a:endParaRPr lang="en-US" sz="1150" dirty="0"/>
+          </a:p>
+        </p:txBody>
+      </p:sp>
+      <p:sp>
+        <p:nvSpPr>
+          <p:cNvPr id="35" name="Shape 33"/>
+          <p:cNvSpPr/>
+          <p:nvPr/>
+        </p:nvSpPr>
+        <p:spPr>
+          <a:xfrm>
+            <a:off x="566928" y="4160520"/>
+            <a:ext cx="11064240" cy="402336"/>
+          </a:xfrm>
+          <a:prstGeom prst="rect">
+            <a:avLst/>
+          </a:prstGeom>
+          <a:solidFill>
+            <a:srgbClr val="FFFFFF"/>
+          </a:solidFill>
+          <a:ln w="6350">
+            <a:solidFill>
+              <a:srgbClr val="D7E1EC"/>
+            </a:solidFill>
+            <a:prstDash val="solid"/>
+          </a:ln>
+        </p:spPr>
+      </p:sp>
+      <p:sp>
+        <p:nvSpPr>
+          <p:cNvPr id="36" name="Text 34"/>
+          <p:cNvSpPr/>
+          <p:nvPr/>
+        </p:nvSpPr>
+        <p:spPr>
+          <a:xfrm>
+            <a:off x="704088" y="4160520"/>
+            <a:ext cx="3703320" cy="402336"/>
+          </a:xfrm>
+          <a:prstGeom prst="rect">
+            <a:avLst/>
+          </a:prstGeom>
+          <a:noFill/>
+          <a:ln/>
+        </p:spPr>
+        <p:txBody>
+          <a:bodyPr wrap="square" lIns="0" tIns="0" rIns="0" bIns="0" rtlCol="0" anchor="ctr"/>
+          <a:lstStyle/>
+          <a:p>
+            <a:pPr indent="0" marL="0">
+              <a:buNone/>
+            </a:pPr>
+            <a:r>
+              <a:rPr lang="en-US" sz="1150" b="1" dirty="0">
+                <a:solidFill>
+                  <a:srgbClr val="16232E"/>
+                </a:solidFill>
+                <a:latin typeface="Calibri" pitchFamily="34" charset="0"/>
+                <a:ea typeface="Calibri" pitchFamily="34" charset="-122"/>
+                <a:cs typeface="Calibri" pitchFamily="34" charset="-120"/>
+              </a:rPr>
+              <a:t>Adequação ao downstream</a:t>
+            </a:r>
+            <a:endParaRPr lang="en-US" sz="1150" dirty="0"/>
+          </a:p>
+        </p:txBody>
+      </p:sp>
+      <p:sp>
+        <p:nvSpPr>
+          <p:cNvPr id="37" name="Shape 35"/>
+          <p:cNvSpPr/>
+          <p:nvPr/>
+        </p:nvSpPr>
+        <p:spPr>
+          <a:xfrm>
+            <a:off x="4608576" y="4233672"/>
+            <a:ext cx="566928" cy="256032"/>
+          </a:xfrm>
+          <a:prstGeom prst="roundRect">
+            <a:avLst>
+              <a:gd name="adj" fmla="val 14286"/>
+            </a:avLst>
+          </a:prstGeom>
+          <a:solidFill>
+            <a:srgbClr val="1C5FA8"/>
+          </a:solidFill>
+          <a:ln/>
+        </p:spPr>
+      </p:sp>
+      <p:sp>
+        <p:nvSpPr>
+          <p:cNvPr id="38" name="Text 36"/>
+          <p:cNvSpPr/>
+          <p:nvPr/>
+        </p:nvSpPr>
+        <p:spPr>
+          <a:xfrm>
+            <a:off x="4608576" y="4206240"/>
+            <a:ext cx="566928" cy="310896"/>
+          </a:xfrm>
+          <a:prstGeom prst="rect">
+            <a:avLst/>
+          </a:prstGeom>
+          <a:noFill/>
+          <a:ln/>
+        </p:spPr>
+        <p:txBody>
+          <a:bodyPr wrap="square" lIns="0" tIns="0" rIns="0" bIns="0" rtlCol="0" anchor="ctr"/>
+          <a:lstStyle/>
+          <a:p>
+            <a:pPr algn="ctr" indent="0" marL="0">
+              <a:buNone/>
+            </a:pPr>
+            <a:r>
+              <a:rPr lang="en-US" sz="1200" b="1" dirty="0">
+                <a:solidFill>
+                  <a:srgbClr val="FFFFFF"/>
+                </a:solidFill>
+                <a:latin typeface="Calibri" pitchFamily="34" charset="0"/>
+                <a:ea typeface="Calibri" pitchFamily="34" charset="-122"/>
+                <a:cs typeface="Calibri" pitchFamily="34" charset="-120"/>
+              </a:rPr>
+              <a:t>2</a:t>
+            </a:r>
+            <a:endParaRPr lang="en-US" sz="1200" dirty="0"/>
+          </a:p>
+        </p:txBody>
+      </p:sp>
+      <p:sp>
+        <p:nvSpPr>
+          <p:cNvPr id="39" name="Text 37"/>
+          <p:cNvSpPr/>
+          <p:nvPr/>
+        </p:nvSpPr>
+        <p:spPr>
+          <a:xfrm>
+            <a:off x="5504688" y="4160520"/>
+            <a:ext cx="6080760" cy="402336"/>
+          </a:xfrm>
+          <a:prstGeom prst="rect">
+            <a:avLst/>
+          </a:prstGeom>
+          <a:noFill/>
+          <a:ln/>
+        </p:spPr>
+        <p:txBody>
+          <a:bodyPr wrap="square" lIns="0" tIns="0" rIns="0" bIns="0" rtlCol="0" anchor="ctr"/>
+          <a:lstStyle/>
+          <a:p>
+            <a:pPr indent="0" marL="0">
+              <a:buNone/>
+            </a:pPr>
+            <a:r>
+              <a:rPr lang="en-US" sz="1150" dirty="0">
+                <a:solidFill>
+                  <a:srgbClr val="55677A"/>
+                </a:solidFill>
+                <a:latin typeface="Calibri" pitchFamily="34" charset="0"/>
+                <a:ea typeface="Calibri" pitchFamily="34" charset="-122"/>
+                <a:cs typeface="Calibri" pitchFamily="34" charset="-120"/>
+              </a:rPr>
+              <a:t>O condensador casco-tubo exige gás SECO e quente</a:t>
+            </a:r>
+            <a:endParaRPr lang="en-US" sz="1150" dirty="0"/>
+          </a:p>
+        </p:txBody>
+      </p:sp>
+      <p:sp>
+        <p:nvSpPr>
+          <p:cNvPr id="40" name="Shape 38"/>
+          <p:cNvSpPr/>
+          <p:nvPr/>
+        </p:nvSpPr>
+        <p:spPr>
+          <a:xfrm>
+            <a:off x="566928" y="4562856"/>
+            <a:ext cx="11064240" cy="402336"/>
+          </a:xfrm>
+          <a:prstGeom prst="rect">
+            <a:avLst/>
+          </a:prstGeom>
+          <a:solidFill>
+            <a:srgbClr val="F1F6FB"/>
+          </a:solidFill>
+          <a:ln w="6350">
+            <a:solidFill>
+              <a:srgbClr val="D7E1EC"/>
+            </a:solidFill>
+            <a:prstDash val="solid"/>
+          </a:ln>
+        </p:spPr>
+      </p:sp>
+      <p:sp>
+        <p:nvSpPr>
+          <p:cNvPr id="41" name="Text 39"/>
+          <p:cNvSpPr/>
+          <p:nvPr/>
+        </p:nvSpPr>
+        <p:spPr>
+          <a:xfrm>
+            <a:off x="704088" y="4562856"/>
+            <a:ext cx="3703320" cy="402336"/>
+          </a:xfrm>
+          <a:prstGeom prst="rect">
+            <a:avLst/>
+          </a:prstGeom>
+          <a:noFill/>
+          <a:ln/>
+        </p:spPr>
+        <p:txBody>
+          <a:bodyPr wrap="square" lIns="0" tIns="0" rIns="0" bIns="0" rtlCol="0" anchor="ctr"/>
+          <a:lstStyle/>
+          <a:p>
+            <a:pPr indent="0" marL="0">
+              <a:buNone/>
+            </a:pPr>
+            <a:r>
+              <a:rPr lang="en-US" sz="1150" b="1" dirty="0">
+                <a:solidFill>
+                  <a:srgbClr val="16232E"/>
+                </a:solidFill>
+                <a:latin typeface="Calibri" pitchFamily="34" charset="0"/>
+                <a:ea typeface="Calibri" pitchFamily="34" charset="-122"/>
+                <a:cs typeface="Calibri" pitchFamily="34" charset="-120"/>
+              </a:rPr>
+              <a:t>Filtração de líquido</a:t>
+            </a:r>
+            <a:endParaRPr lang="en-US" sz="1150" dirty="0"/>
+          </a:p>
+        </p:txBody>
+      </p:sp>
+      <p:sp>
+        <p:nvSpPr>
+          <p:cNvPr id="42" name="Shape 40"/>
+          <p:cNvSpPr/>
+          <p:nvPr/>
+        </p:nvSpPr>
+        <p:spPr>
+          <a:xfrm>
+            <a:off x="4608576" y="4636008"/>
+            <a:ext cx="566928" cy="256032"/>
+          </a:xfrm>
+          <a:prstGeom prst="roundRect">
+            <a:avLst>
+              <a:gd name="adj" fmla="val 14286"/>
+            </a:avLst>
+          </a:prstGeom>
+          <a:solidFill>
+            <a:srgbClr val="1C5FA8"/>
+          </a:solidFill>
+          <a:ln/>
+        </p:spPr>
+      </p:sp>
+      <p:sp>
+        <p:nvSpPr>
+          <p:cNvPr id="43" name="Text 41"/>
+          <p:cNvSpPr/>
+          <p:nvPr/>
+        </p:nvSpPr>
+        <p:spPr>
+          <a:xfrm>
+            <a:off x="4608576" y="4608576"/>
+            <a:ext cx="566928" cy="310896"/>
+          </a:xfrm>
+          <a:prstGeom prst="rect">
+            <a:avLst/>
+          </a:prstGeom>
+          <a:noFill/>
+          <a:ln/>
+        </p:spPr>
+        <p:txBody>
+          <a:bodyPr wrap="square" lIns="0" tIns="0" rIns="0" bIns="0" rtlCol="0" anchor="ctr"/>
+          <a:lstStyle/>
+          <a:p>
+            <a:pPr algn="ctr" indent="0" marL="0">
+              <a:buNone/>
+            </a:pPr>
+            <a:r>
+              <a:rPr lang="en-US" sz="1200" b="1" dirty="0">
+                <a:solidFill>
+                  <a:srgbClr val="FFFFFF"/>
+                </a:solidFill>
+                <a:latin typeface="Calibri" pitchFamily="34" charset="0"/>
+                <a:ea typeface="Calibri" pitchFamily="34" charset="-122"/>
+                <a:cs typeface="Calibri" pitchFamily="34" charset="-120"/>
+              </a:rPr>
+              <a:t>2</a:t>
+            </a:r>
+            <a:endParaRPr lang="en-US" sz="1200" dirty="0"/>
+          </a:p>
+        </p:txBody>
+      </p:sp>
+      <p:sp>
+        <p:nvSpPr>
+          <p:cNvPr id="44" name="Text 42"/>
+          <p:cNvSpPr/>
+          <p:nvPr/>
+        </p:nvSpPr>
+        <p:spPr>
+          <a:xfrm>
+            <a:off x="5504688" y="4562856"/>
+            <a:ext cx="6080760" cy="402336"/>
+          </a:xfrm>
+          <a:prstGeom prst="rect">
+            <a:avLst/>
+          </a:prstGeom>
+          <a:noFill/>
+          <a:ln/>
+        </p:spPr>
+        <p:txBody>
+          <a:bodyPr wrap="square" lIns="0" tIns="0" rIns="0" bIns="0" rtlCol="0" anchor="ctr"/>
+          <a:lstStyle/>
+          <a:p>
+            <a:pPr indent="0" marL="0">
+              <a:buNone/>
+            </a:pPr>
+            <a:r>
+              <a:rPr lang="en-US" sz="1150" dirty="0">
+                <a:solidFill>
+                  <a:srgbClr val="55677A"/>
+                </a:solidFill>
+                <a:latin typeface="Calibri" pitchFamily="34" charset="0"/>
+                <a:ea typeface="Calibri" pitchFamily="34" charset="-122"/>
+                <a:cs typeface="Calibri" pitchFamily="34" charset="-120"/>
+              </a:rPr>
+              <a:t>Critério do e-mail do cliente: evitar ter de filtrar líquido</a:t>
+            </a:r>
+            <a:endParaRPr lang="en-US" sz="1150" dirty="0"/>
+          </a:p>
+        </p:txBody>
+      </p:sp>
+      <p:sp>
+        <p:nvSpPr>
+          <p:cNvPr id="45" name="Shape 43"/>
+          <p:cNvSpPr/>
+          <p:nvPr/>
+        </p:nvSpPr>
+        <p:spPr>
+          <a:xfrm>
+            <a:off x="566928" y="4965192"/>
+            <a:ext cx="11064240" cy="402336"/>
+          </a:xfrm>
+          <a:prstGeom prst="rect">
+            <a:avLst/>
+          </a:prstGeom>
+          <a:solidFill>
+            <a:srgbClr val="FFFFFF"/>
+          </a:solidFill>
+          <a:ln w="6350">
+            <a:solidFill>
+              <a:srgbClr val="D7E1EC"/>
+            </a:solidFill>
+            <a:prstDash val="solid"/>
+          </a:ln>
+        </p:spPr>
+      </p:sp>
+      <p:sp>
+        <p:nvSpPr>
+          <p:cNvPr id="46" name="Text 44"/>
+          <p:cNvSpPr/>
+          <p:nvPr/>
+        </p:nvSpPr>
+        <p:spPr>
+          <a:xfrm>
+            <a:off x="704088" y="4965192"/>
+            <a:ext cx="3703320" cy="402336"/>
+          </a:xfrm>
+          <a:prstGeom prst="rect">
+            <a:avLst/>
+          </a:prstGeom>
+          <a:noFill/>
+          <a:ln/>
+        </p:spPr>
+        <p:txBody>
+          <a:bodyPr wrap="square" lIns="0" tIns="0" rIns="0" bIns="0" rtlCol="0" anchor="ctr"/>
+          <a:lstStyle/>
+          <a:p>
+            <a:pPr indent="0" marL="0">
+              <a:buNone/>
+            </a:pPr>
+            <a:r>
+              <a:rPr lang="en-US" sz="1150" b="1" dirty="0">
+                <a:solidFill>
+                  <a:srgbClr val="16232E"/>
+                </a:solidFill>
+                <a:latin typeface="Calibri" pitchFamily="34" charset="0"/>
+                <a:ea typeface="Calibri" pitchFamily="34" charset="-122"/>
+                <a:cs typeface="Calibri" pitchFamily="34" charset="-120"/>
+              </a:rPr>
+              <a:t>Custo de investimento</a:t>
+            </a:r>
+            <a:endParaRPr lang="en-US" sz="1150" dirty="0"/>
+          </a:p>
+        </p:txBody>
+      </p:sp>
+      <p:sp>
+        <p:nvSpPr>
+          <p:cNvPr id="47" name="Shape 45"/>
+          <p:cNvSpPr/>
+          <p:nvPr/>
+        </p:nvSpPr>
+        <p:spPr>
+          <a:xfrm>
+            <a:off x="4608576" y="5038344"/>
+            <a:ext cx="566928" cy="256032"/>
+          </a:xfrm>
+          <a:prstGeom prst="roundRect">
+            <a:avLst>
+              <a:gd name="adj" fmla="val 14286"/>
+            </a:avLst>
+          </a:prstGeom>
+          <a:solidFill>
+            <a:srgbClr val="3E7CA8"/>
+          </a:solidFill>
+          <a:ln/>
+        </p:spPr>
+      </p:sp>
+      <p:sp>
+        <p:nvSpPr>
+          <p:cNvPr id="48" name="Text 46"/>
+          <p:cNvSpPr/>
+          <p:nvPr/>
+        </p:nvSpPr>
+        <p:spPr>
+          <a:xfrm>
+            <a:off x="4608576" y="5010912"/>
+            <a:ext cx="566928" cy="310896"/>
+          </a:xfrm>
+          <a:prstGeom prst="rect">
+            <a:avLst/>
+          </a:prstGeom>
+          <a:noFill/>
+          <a:ln/>
+        </p:spPr>
+        <p:txBody>
+          <a:bodyPr wrap="square" lIns="0" tIns="0" rIns="0" bIns="0" rtlCol="0" anchor="ctr"/>
+          <a:lstStyle/>
+          <a:p>
+            <a:pPr algn="ctr" indent="0" marL="0">
+              <a:buNone/>
+            </a:pPr>
+            <a:r>
+              <a:rPr lang="en-US" sz="1200" b="1" dirty="0">
+                <a:solidFill>
+                  <a:srgbClr val="FFFFFF"/>
+                </a:solidFill>
+                <a:latin typeface="Calibri" pitchFamily="34" charset="0"/>
+                <a:ea typeface="Calibri" pitchFamily="34" charset="-122"/>
+                <a:cs typeface="Calibri" pitchFamily="34" charset="-120"/>
+              </a:rPr>
+              <a:t>1</a:t>
+            </a:r>
+            <a:endParaRPr lang="en-US" sz="1200" dirty="0"/>
+          </a:p>
+        </p:txBody>
+      </p:sp>
+      <p:sp>
+        <p:nvSpPr>
+          <p:cNvPr id="49" name="Text 47"/>
+          <p:cNvSpPr/>
+          <p:nvPr/>
+        </p:nvSpPr>
+        <p:spPr>
+          <a:xfrm>
+            <a:off x="5504688" y="4965192"/>
+            <a:ext cx="6080760" cy="402336"/>
+          </a:xfrm>
+          <a:prstGeom prst="rect">
+            <a:avLst/>
+          </a:prstGeom>
+          <a:noFill/>
+          <a:ln/>
+        </p:spPr>
+        <p:txBody>
+          <a:bodyPr wrap="square" lIns="0" tIns="0" rIns="0" bIns="0" rtlCol="0" anchor="ctr"/>
+          <a:lstStyle/>
+          <a:p>
+            <a:pPr indent="0" marL="0">
+              <a:buNone/>
+            </a:pPr>
+            <a:r>
+              <a:rPr lang="en-US" sz="1150" dirty="0">
+                <a:solidFill>
+                  <a:srgbClr val="55677A"/>
+                </a:solidFill>
+                <a:latin typeface="Calibri" pitchFamily="34" charset="0"/>
+                <a:ea typeface="Calibri" pitchFamily="34" charset="-122"/>
+                <a:cs typeface="Calibri" pitchFamily="34" charset="-120"/>
+              </a:rPr>
+              <a:t>Importa, mas é secundário ao desempenho técnico</a:t>
+            </a:r>
+            <a:endParaRPr lang="en-US" sz="1150" dirty="0"/>
+          </a:p>
+        </p:txBody>
+      </p:sp>
+      <p:sp>
+        <p:nvSpPr>
+          <p:cNvPr id="50" name="Shape 48"/>
+          <p:cNvSpPr/>
+          <p:nvPr/>
+        </p:nvSpPr>
+        <p:spPr>
+          <a:xfrm>
+            <a:off x="566928" y="5367528"/>
+            <a:ext cx="11064240" cy="402336"/>
+          </a:xfrm>
+          <a:prstGeom prst="rect">
+            <a:avLst/>
+          </a:prstGeom>
+          <a:solidFill>
+            <a:srgbClr val="F1F6FB"/>
+          </a:solidFill>
+          <a:ln w="6350">
+            <a:solidFill>
+              <a:srgbClr val="D7E1EC"/>
+            </a:solidFill>
+            <a:prstDash val="solid"/>
+          </a:ln>
+        </p:spPr>
+      </p:sp>
+      <p:sp>
+        <p:nvSpPr>
+          <p:cNvPr id="51" name="Text 49"/>
+          <p:cNvSpPr/>
+          <p:nvPr/>
+        </p:nvSpPr>
+        <p:spPr>
+          <a:xfrm>
+            <a:off x="704088" y="5367528"/>
+            <a:ext cx="3703320" cy="402336"/>
+          </a:xfrm>
+          <a:prstGeom prst="rect">
+            <a:avLst/>
+          </a:prstGeom>
+          <a:noFill/>
+          <a:ln/>
+        </p:spPr>
+        <p:txBody>
+          <a:bodyPr wrap="square" lIns="0" tIns="0" rIns="0" bIns="0" rtlCol="0" anchor="ctr"/>
+          <a:lstStyle/>
+          <a:p>
+            <a:pPr indent="0" marL="0">
+              <a:buNone/>
+            </a:pPr>
+            <a:r>
+              <a:rPr lang="en-US" sz="1150" b="1" dirty="0">
+                <a:solidFill>
+                  <a:srgbClr val="16232E"/>
+                </a:solidFill>
+                <a:latin typeface="Calibri" pitchFamily="34" charset="0"/>
+                <a:ea typeface="Calibri" pitchFamily="34" charset="-122"/>
+                <a:cs typeface="Calibri" pitchFamily="34" charset="-120"/>
+              </a:rPr>
+              <a:t>Manutenção</a:t>
+            </a:r>
+            <a:endParaRPr lang="en-US" sz="1150" dirty="0"/>
+          </a:p>
+        </p:txBody>
+      </p:sp>
+      <p:sp>
+        <p:nvSpPr>
+          <p:cNvPr id="52" name="Shape 50"/>
+          <p:cNvSpPr/>
+          <p:nvPr/>
+        </p:nvSpPr>
+        <p:spPr>
+          <a:xfrm>
+            <a:off x="4608576" y="5440680"/>
+            <a:ext cx="566928" cy="256032"/>
+          </a:xfrm>
+          <a:prstGeom prst="roundRect">
+            <a:avLst>
+              <a:gd name="adj" fmla="val 14286"/>
+            </a:avLst>
+          </a:prstGeom>
+          <a:solidFill>
+            <a:srgbClr val="3E7CA8"/>
+          </a:solidFill>
+          <a:ln/>
+        </p:spPr>
+      </p:sp>
+      <p:sp>
+        <p:nvSpPr>
+          <p:cNvPr id="53" name="Text 51"/>
+          <p:cNvSpPr/>
+          <p:nvPr/>
+        </p:nvSpPr>
+        <p:spPr>
+          <a:xfrm>
+            <a:off x="4608576" y="5413248"/>
+            <a:ext cx="566928" cy="310896"/>
+          </a:xfrm>
+          <a:prstGeom prst="rect">
+            <a:avLst/>
+          </a:prstGeom>
+          <a:noFill/>
+          <a:ln/>
+        </p:spPr>
+        <p:txBody>
+          <a:bodyPr wrap="square" lIns="0" tIns="0" rIns="0" bIns="0" rtlCol="0" anchor="ctr"/>
+          <a:lstStyle/>
+          <a:p>
+            <a:pPr algn="ctr" indent="0" marL="0">
+              <a:buNone/>
+            </a:pPr>
+            <a:r>
+              <a:rPr lang="en-US" sz="1200" b="1" dirty="0">
+                <a:solidFill>
+                  <a:srgbClr val="FFFFFF"/>
+                </a:solidFill>
+                <a:latin typeface="Calibri" pitchFamily="34" charset="0"/>
+                <a:ea typeface="Calibri" pitchFamily="34" charset="-122"/>
+                <a:cs typeface="Calibri" pitchFamily="34" charset="-120"/>
+              </a:rPr>
+              <a:t>1</a:t>
+            </a:r>
+            <a:endParaRPr lang="en-US" sz="1200" dirty="0"/>
+          </a:p>
+        </p:txBody>
+      </p:sp>
+      <p:sp>
+        <p:nvSpPr>
+          <p:cNvPr id="54" name="Text 52"/>
+          <p:cNvSpPr/>
+          <p:nvPr/>
+        </p:nvSpPr>
+        <p:spPr>
+          <a:xfrm>
+            <a:off x="5504688" y="5367528"/>
+            <a:ext cx="6080760" cy="402336"/>
+          </a:xfrm>
+          <a:prstGeom prst="rect">
+            <a:avLst/>
+          </a:prstGeom>
+          <a:noFill/>
+          <a:ln/>
+        </p:spPr>
+        <p:txBody>
+          <a:bodyPr wrap="square" lIns="0" tIns="0" rIns="0" bIns="0" rtlCol="0" anchor="ctr"/>
+          <a:lstStyle/>
+          <a:p>
+            <a:pPr indent="0" marL="0">
+              <a:buNone/>
+            </a:pPr>
+            <a:r>
+              <a:rPr lang="en-US" sz="1150" dirty="0">
+                <a:solidFill>
+                  <a:srgbClr val="55677A"/>
+                </a:solidFill>
+                <a:latin typeface="Calibri" pitchFamily="34" charset="0"/>
+                <a:ea typeface="Calibri" pitchFamily="34" charset="-122"/>
+                <a:cs typeface="Calibri" pitchFamily="34" charset="-120"/>
+              </a:rPr>
+              <a:t>Custo operacional e paradas de limpeza</a:t>
+            </a:r>
+            <a:endParaRPr lang="en-US" sz="1150" dirty="0"/>
+          </a:p>
+        </p:txBody>
+      </p:sp>
+      <p:sp>
+        <p:nvSpPr>
+          <p:cNvPr id="55" name="Shape 53"/>
+          <p:cNvSpPr/>
+          <p:nvPr/>
+        </p:nvSpPr>
+        <p:spPr>
+          <a:xfrm>
+            <a:off x="566928" y="5769864"/>
+            <a:ext cx="11064240" cy="402336"/>
+          </a:xfrm>
+          <a:prstGeom prst="rect">
+            <a:avLst/>
+          </a:prstGeom>
+          <a:solidFill>
+            <a:srgbClr val="FFFFFF"/>
+          </a:solidFill>
+          <a:ln w="6350">
+            <a:solidFill>
+              <a:srgbClr val="D7E1EC"/>
+            </a:solidFill>
+            <a:prstDash val="solid"/>
+          </a:ln>
+        </p:spPr>
+      </p:sp>
+      <p:sp>
+        <p:nvSpPr>
+          <p:cNvPr id="56" name="Text 54"/>
+          <p:cNvSpPr/>
+          <p:nvPr/>
+        </p:nvSpPr>
+        <p:spPr>
+          <a:xfrm>
+            <a:off x="704088" y="5769864"/>
+            <a:ext cx="3703320" cy="402336"/>
+          </a:xfrm>
+          <a:prstGeom prst="rect">
+            <a:avLst/>
+          </a:prstGeom>
+          <a:noFill/>
+          <a:ln/>
+        </p:spPr>
+        <p:txBody>
+          <a:bodyPr wrap="square" lIns="0" tIns="0" rIns="0" bIns="0" rtlCol="0" anchor="ctr"/>
+          <a:lstStyle/>
+          <a:p>
+            <a:pPr indent="0" marL="0">
+              <a:buNone/>
+            </a:pPr>
+            <a:r>
+              <a:rPr lang="en-US" sz="1150" b="1" dirty="0">
+                <a:solidFill>
+                  <a:srgbClr val="16232E"/>
+                </a:solidFill>
+                <a:latin typeface="Calibri" pitchFamily="34" charset="0"/>
+                <a:ea typeface="Calibri" pitchFamily="34" charset="-122"/>
+                <a:cs typeface="Calibri" pitchFamily="34" charset="-120"/>
+              </a:rPr>
+              <a:t>Maturidade tecnológica</a:t>
+            </a:r>
+            <a:endParaRPr lang="en-US" sz="1150" dirty="0"/>
+          </a:p>
+        </p:txBody>
+      </p:sp>
+      <p:sp>
+        <p:nvSpPr>
+          <p:cNvPr id="57" name="Shape 55"/>
+          <p:cNvSpPr/>
+          <p:nvPr/>
+        </p:nvSpPr>
+        <p:spPr>
+          <a:xfrm>
+            <a:off x="4608576" y="5843016"/>
+            <a:ext cx="566928" cy="256032"/>
+          </a:xfrm>
+          <a:prstGeom prst="roundRect">
+            <a:avLst>
+              <a:gd name="adj" fmla="val 14286"/>
+            </a:avLst>
+          </a:prstGeom>
+          <a:solidFill>
+            <a:srgbClr val="3E7CA8"/>
+          </a:solidFill>
+          <a:ln/>
+        </p:spPr>
+      </p:sp>
+      <p:sp>
+        <p:nvSpPr>
+          <p:cNvPr id="58" name="Text 56"/>
+          <p:cNvSpPr/>
+          <p:nvPr/>
+        </p:nvSpPr>
+        <p:spPr>
+          <a:xfrm>
+            <a:off x="4608576" y="5815584"/>
+            <a:ext cx="566928" cy="310896"/>
+          </a:xfrm>
+          <a:prstGeom prst="rect">
+            <a:avLst/>
+          </a:prstGeom>
+          <a:noFill/>
+          <a:ln/>
+        </p:spPr>
+        <p:txBody>
+          <a:bodyPr wrap="square" lIns="0" tIns="0" rIns="0" bIns="0" rtlCol="0" anchor="ctr"/>
+          <a:lstStyle/>
+          <a:p>
+            <a:pPr algn="ctr" indent="0" marL="0">
+              <a:buNone/>
+            </a:pPr>
+            <a:r>
+              <a:rPr lang="en-US" sz="1200" b="1" dirty="0">
+                <a:solidFill>
+                  <a:srgbClr val="FFFFFF"/>
+                </a:solidFill>
+                <a:latin typeface="Calibri" pitchFamily="34" charset="0"/>
+                <a:ea typeface="Calibri" pitchFamily="34" charset="-122"/>
+                <a:cs typeface="Calibri" pitchFamily="34" charset="-120"/>
+              </a:rPr>
+              <a:t>1</a:t>
+            </a:r>
+            <a:endParaRPr lang="en-US" sz="1200" dirty="0"/>
+          </a:p>
+        </p:txBody>
+      </p:sp>
+      <p:sp>
+        <p:nvSpPr>
+          <p:cNvPr id="59" name="Text 57"/>
+          <p:cNvSpPr/>
+          <p:nvPr/>
+        </p:nvSpPr>
+        <p:spPr>
+          <a:xfrm>
+            <a:off x="5504688" y="5769864"/>
+            <a:ext cx="6080760" cy="402336"/>
+          </a:xfrm>
+          <a:prstGeom prst="rect">
+            <a:avLst/>
+          </a:prstGeom>
+          <a:noFill/>
+          <a:ln/>
+        </p:spPr>
+        <p:txBody>
+          <a:bodyPr wrap="square" lIns="0" tIns="0" rIns="0" bIns="0" rtlCol="0" anchor="ctr"/>
+          <a:lstStyle/>
+          <a:p>
+            <a:pPr indent="0" marL="0">
+              <a:buNone/>
+            </a:pPr>
+            <a:r>
+              <a:rPr lang="en-US" sz="1150" dirty="0">
+                <a:solidFill>
+                  <a:srgbClr val="55677A"/>
+                </a:solidFill>
+                <a:latin typeface="Calibri" pitchFamily="34" charset="0"/>
+                <a:ea typeface="Calibri" pitchFamily="34" charset="-122"/>
+                <a:cs typeface="Calibri" pitchFamily="34" charset="-120"/>
+              </a:rPr>
+              <a:t>Risco de adotar tecnologia não comprovada</a:t>
+            </a:r>
+            <a:endParaRPr lang="en-US" sz="1150" dirty="0"/>
+          </a:p>
+        </p:txBody>
+      </p:sp>
+      <p:sp>
+        <p:nvSpPr>
+          <p:cNvPr id="60" name="Text 58"/>
           <p:cNvSpPr/>
           <p:nvPr/>
         </p:nvSpPr>
@@ -3489,7 +5267,7 @@
       </p:sp>
       <p:sp>
         <p:nvSpPr>
-          <p:cNvPr id="9" name="Text 6"/>
+          <p:cNvPr id="61" name="Text 59"/>
           <p:cNvSpPr/>
           <p:nvPr/>
         </p:nvSpPr>
@@ -3591,7 +5369,7 @@
                 <a:ea typeface="Calibri" pitchFamily="34" charset="-122"/>
                 <a:cs typeface="Calibri" pitchFamily="34" charset="-120"/>
               </a:rPr>
-              <a:t>O RESULTADO</a:t>
+              <a:t>O MÉTODO</a:t>
             </a:r>
             <a:endParaRPr lang="en-US" sz="1100" dirty="0"/>
           </a:p>
@@ -3630,7 +5408,7 @@
                 <a:ea typeface="Calibri" pitchFamily="34" charset="-122"/>
                 <a:cs typeface="Calibri" pitchFamily="34" charset="-120"/>
               </a:rPr>
-              <a:t>O Ciclone é a tecnologia recomendada</a:t>
+              <a:t>A matriz de decisão</a:t>
             </a:r>
             <a:endParaRPr lang="en-US" sz="2600" dirty="0"/>
           </a:p>
@@ -3677,7 +5455,7 @@
       </p:sp>
       <p:pic>
         <p:nvPicPr>
-          <p:cNvPr id="5" name="Image 0" descr="ranking.png">    </p:cNvPr>
+          <p:cNvPr id="5" name="Image 0" descr="matriz.png">    </p:cNvPr>
           <p:cNvPicPr>
             <a:picLocks noChangeAspect="1"/>
           </p:cNvPicPr>
@@ -3691,8 +5469,8 @@
         </p:blipFill>
         <p:spPr>
           <a:xfrm>
-            <a:off x="566928" y="1600200"/>
-            <a:ext cx="6583680" cy="3253112"/>
+            <a:off x="566928" y="1463040"/>
+            <a:ext cx="6285653" cy="5120640"/>
           </a:xfrm>
           <a:prstGeom prst="rect">
             <a:avLst/>
@@ -3701,30 +5479,42 @@
       </p:pic>
       <p:sp>
         <p:nvSpPr>
-          <p:cNvPr id="6" name="Shape 3"/>
-          <p:cNvSpPr/>
-          <p:nvPr/>
-        </p:nvSpPr>
-        <p:spPr>
-          <a:xfrm>
-            <a:off x="7452360" y="2011680"/>
-            <a:ext cx="4160520" cy="2377440"/>
-          </a:xfrm>
-          <a:prstGeom prst="roundRect">
-            <a:avLst>
-              <a:gd name="adj" fmla="val 3077"/>
-            </a:avLst>
-          </a:prstGeom>
-          <a:solidFill>
-            <a:srgbClr val="F1F6FB"/>
-          </a:solidFill>
-          <a:ln w="19050">
-            <a:solidFill>
-              <a:srgbClr val="2E8B57"/>
-            </a:solidFill>
-            <a:prstDash val="solid"/>
-          </a:ln>
-        </p:spPr>
+          <p:cNvPr id="6" name="Text 3"/>
+          <p:cNvSpPr/>
+          <p:nvPr/>
+        </p:nvSpPr>
+        <p:spPr>
+          <a:xfrm>
+            <a:off x="7406640" y="1737360"/>
+            <a:ext cx="4206240" cy="320040"/>
+          </a:xfrm>
+          <a:prstGeom prst="rect">
+            <a:avLst/>
+          </a:prstGeom>
+          <a:noFill/>
+          <a:ln/>
+        </p:spPr>
+        <p:txBody>
+          <a:bodyPr wrap="square" lIns="0" tIns="0" rIns="0" bIns="0" rtlCol="0" anchor="ctr"/>
+          <a:lstStyle/>
+          <a:p>
+            <a:pPr indent="0" marL="0">
+              <a:buNone/>
+            </a:pPr>
+            <a:r>
+              <a:rPr lang="en-US" sz="1500" b="1" dirty="0">
+                <a:solidFill>
+                  <a:srgbClr val="3E7CA8"/>
+                </a:solidFill>
+                <a:latin typeface="Calibri" pitchFamily="34" charset="0"/>
+                <a:ea typeface="Calibri" pitchFamily="34" charset="-122"/>
+                <a:cs typeface="Calibri" pitchFamily="34" charset="-120"/>
+              </a:rPr>
+              <a:t>Como funciona</a:t>
+            </a:r>
+            <a:endParaRPr lang="en-US" sz="1500" dirty="0"/>
+          </a:p>
+        </p:txBody>
       </p:sp>
       <p:sp>
         <p:nvSpPr>
@@ -3734,132 +5524,107 @@
         </p:nvSpPr>
         <p:spPr>
           <a:xfrm>
-            <a:off x="7680960" y="2194560"/>
-            <a:ext cx="3657600" cy="274320"/>
-          </a:xfrm>
-          <a:prstGeom prst="rect">
-            <a:avLst/>
-          </a:prstGeom>
-          <a:noFill/>
-          <a:ln/>
-        </p:spPr>
-        <p:txBody>
-          <a:bodyPr wrap="square" lIns="0" tIns="0" rIns="0" bIns="0" rtlCol="0" anchor="ctr"/>
-          <a:lstStyle/>
-          <a:p>
-            <a:pPr indent="0" marL="0">
-              <a:buNone/>
-            </a:pPr>
-            <a:r>
-              <a:rPr lang="en-US" sz="1100" b="1" spc="100" kern="0" dirty="0">
-                <a:solidFill>
-                  <a:srgbClr val="2E8B57"/>
-                </a:solidFill>
-                <a:latin typeface="Calibri" pitchFamily="34" charset="0"/>
-                <a:ea typeface="Calibri" pitchFamily="34" charset="-122"/>
-                <a:cs typeface="Calibri" pitchFamily="34" charset="-120"/>
-              </a:rPr>
-              <a:t>VENCEDOR</a:t>
-            </a:r>
-            <a:endParaRPr lang="en-US" sz="1100" dirty="0"/>
+            <a:off x="7406640" y="2148840"/>
+            <a:ext cx="4251960" cy="3657600"/>
+          </a:xfrm>
+          <a:prstGeom prst="rect">
+            <a:avLst/>
+          </a:prstGeom>
+          <a:noFill/>
+          <a:ln/>
+        </p:spPr>
+        <p:txBody>
+          <a:bodyPr wrap="square" lIns="0" tIns="0" rIns="0" bIns="0" rtlCol="0" anchor="t"/>
+          <a:lstStyle/>
+          <a:p>
+            <a:pPr marL="342900" indent="-342900">
+              <a:spcAft>
+                <a:spcPts val="1000"/>
+              </a:spcAft>
+              <a:buSzPct val="100000"/>
+              <a:buChar char="•"/>
+            </a:pPr>
+            <a:r>
+              <a:rPr lang="en-US" sz="1350" dirty="0">
+                <a:solidFill>
+                  <a:srgbClr val="16232E"/>
+                </a:solidFill>
+                <a:latin typeface="Calibri" pitchFamily="34" charset="0"/>
+                <a:ea typeface="Calibri" pitchFamily="34" charset="-122"/>
+                <a:cs typeface="Calibri" pitchFamily="34" charset="-120"/>
+              </a:rPr>
+              <a:t>10 critérios técnicos, com PESO 1 ou 2 (os mais críticos pesam 2)</a:t>
+            </a:r>
+            <a:endParaRPr lang="en-US" sz="1350" dirty="0"/>
+          </a:p>
+          <a:p>
+            <a:pPr marL="342900" indent="-342900">
+              <a:spcAft>
+                <a:spcPts val="1000"/>
+              </a:spcAft>
+              <a:buSzPct val="100000"/>
+              <a:buChar char="•"/>
+            </a:pPr>
+            <a:r>
+              <a:rPr lang="en-US" sz="1350" dirty="0">
+                <a:solidFill>
+                  <a:srgbClr val="16232E"/>
+                </a:solidFill>
+                <a:latin typeface="Calibri" pitchFamily="34" charset="0"/>
+                <a:ea typeface="Calibri" pitchFamily="34" charset="-122"/>
+                <a:cs typeface="Calibri" pitchFamily="34" charset="-120"/>
+              </a:rPr>
+              <a:t>Cada tecnologia recebe +1 (positivo) · 0 (neutro) · −1 (negativo) por critério</a:t>
+            </a:r>
+            <a:endParaRPr lang="en-US" sz="1350" dirty="0"/>
+          </a:p>
+          <a:p>
+            <a:pPr marL="342900" indent="-342900">
+              <a:spcAft>
+                <a:spcPts val="1000"/>
+              </a:spcAft>
+              <a:buSzPct val="100000"/>
+              <a:buChar char="•"/>
+            </a:pPr>
+            <a:r>
+              <a:rPr lang="en-US" sz="1350" dirty="0">
+                <a:solidFill>
+                  <a:srgbClr val="16232E"/>
+                </a:solidFill>
+                <a:latin typeface="Calibri" pitchFamily="34" charset="0"/>
+                <a:ea typeface="Calibri" pitchFamily="34" charset="-122"/>
+                <a:cs typeface="Calibri" pitchFamily="34" charset="-120"/>
+              </a:rPr>
+              <a:t>Critério do email do cliente incluído: 'evitar filtração de líquido' (peso 2)</a:t>
+            </a:r>
+            <a:endParaRPr lang="en-US" sz="1350" dirty="0"/>
+          </a:p>
+          <a:p>
+            <a:pPr marL="342900" indent="-342900">
+              <a:spcAft>
+                <a:spcPts val="1000"/>
+              </a:spcAft>
+              <a:buSzPct val="100000"/>
+              <a:buChar char="•"/>
+            </a:pPr>
+            <a:r>
+              <a:rPr lang="en-US" sz="1350" dirty="0">
+                <a:solidFill>
+                  <a:srgbClr val="16232E"/>
+                </a:solidFill>
+                <a:latin typeface="Calibri" pitchFamily="34" charset="0"/>
+                <a:ea typeface="Calibri" pitchFamily="34" charset="-122"/>
+                <a:cs typeface="Calibri" pitchFamily="34" charset="-120"/>
+              </a:rPr>
+              <a:t>Soma ponderada → ranking objetivo (máx. +17)</a:t>
+            </a:r>
+            <a:endParaRPr lang="en-US" sz="1350" dirty="0"/>
           </a:p>
         </p:txBody>
       </p:sp>
       <p:sp>
         <p:nvSpPr>
           <p:cNvPr id="8" name="Text 5"/>
-          <p:cNvSpPr/>
-          <p:nvPr/>
-        </p:nvSpPr>
-        <p:spPr>
-          <a:xfrm>
-            <a:off x="7680960" y="2514600"/>
-            <a:ext cx="3657600" cy="640080"/>
-          </a:xfrm>
-          <a:prstGeom prst="rect">
-            <a:avLst/>
-          </a:prstGeom>
-          <a:noFill/>
-          <a:ln/>
-        </p:spPr>
-        <p:txBody>
-          <a:bodyPr wrap="square" lIns="0" tIns="0" rIns="0" bIns="0" rtlCol="0" anchor="ctr"/>
-          <a:lstStyle/>
-          <a:p>
-            <a:pPr indent="0" marL="0">
-              <a:buNone/>
-            </a:pPr>
-            <a:r>
-              <a:rPr lang="en-US" sz="3000" b="1" dirty="0">
-                <a:solidFill>
-                  <a:srgbClr val="2E8B57"/>
-                </a:solidFill>
-                <a:latin typeface="Calibri" pitchFamily="34" charset="0"/>
-                <a:ea typeface="Calibri" pitchFamily="34" charset="-122"/>
-                <a:cs typeface="Calibri" pitchFamily="34" charset="-120"/>
-              </a:rPr>
-              <a:t>CICLONE  </a:t>
-            </a:r>
-            <a:pPr indent="0" marL="0">
-              <a:buNone/>
-            </a:pPr>
-            <a:r>
-              <a:rPr lang="en-US" sz="2200" b="1" dirty="0">
-                <a:solidFill>
-                  <a:srgbClr val="16232E"/>
-                </a:solidFill>
-                <a:latin typeface="Calibri" pitchFamily="34" charset="0"/>
-                <a:ea typeface="Calibri" pitchFamily="34" charset="-122"/>
-                <a:cs typeface="Calibri" pitchFamily="34" charset="-120"/>
-              </a:rPr>
-              <a:t>+11/17</a:t>
-            </a:r>
-            <a:endParaRPr lang="en-US" sz="3000" dirty="0"/>
-          </a:p>
-        </p:txBody>
-      </p:sp>
-      <p:sp>
-        <p:nvSpPr>
-          <p:cNvPr id="9" name="Text 6"/>
-          <p:cNvSpPr/>
-          <p:nvPr/>
-        </p:nvSpPr>
-        <p:spPr>
-          <a:xfrm>
-            <a:off x="7680960" y="3200400"/>
-            <a:ext cx="3703320" cy="1097280"/>
-          </a:xfrm>
-          <a:prstGeom prst="rect">
-            <a:avLst/>
-          </a:prstGeom>
-          <a:noFill/>
-          <a:ln/>
-        </p:spPr>
-        <p:txBody>
-          <a:bodyPr wrap="square" lIns="0" tIns="0" rIns="0" bIns="0" rtlCol="0" anchor="t"/>
-          <a:lstStyle/>
-          <a:p>
-            <a:pPr indent="0" marL="0">
-              <a:buNone/>
-            </a:pPr>
-            <a:r>
-              <a:rPr lang="en-US" sz="1350" dirty="0">
-                <a:solidFill>
-                  <a:srgbClr val="55677A"/>
-                </a:solidFill>
-                <a:latin typeface="Calibri" pitchFamily="34" charset="0"/>
-                <a:ea typeface="Calibri" pitchFamily="34" charset="-122"/>
-                <a:cs typeface="Calibri" pitchFamily="34" charset="-120"/>
-              </a:rPr>
-              <a:t>Vantagem clara sobre o 2º (Filtro Cerâmico, +8) e o 3º (Settler, +7). As vias úmidas (Quench/Scrubber) ficaram em último (+3).</a:t>
-            </a:r>
-            <a:endParaRPr lang="en-US" sz="1350" dirty="0"/>
-          </a:p>
-        </p:txBody>
-      </p:sp>
-      <p:sp>
-        <p:nvSpPr>
-          <p:cNvPr id="10" name="Text 7"/>
           <p:cNvSpPr/>
           <p:nvPr/>
         </p:nvSpPr>
@@ -3912,7 +5677,7 @@
       </p:sp>
       <p:sp>
         <p:nvSpPr>
-          <p:cNvPr id="11" name="Text 8"/>
+          <p:cNvPr id="9" name="Text 6"/>
           <p:cNvSpPr/>
           <p:nvPr/>
         </p:nvSpPr>
@@ -4014,7 +5779,7 @@
                 <a:ea typeface="Calibri" pitchFamily="34" charset="-122"/>
                 <a:cs typeface="Calibri" pitchFamily="34" charset="-120"/>
               </a:rPr>
-              <a:t>POR QUÊ</a:t>
+              <a:t>O RESULTADO</a:t>
             </a:r>
             <a:endParaRPr lang="en-US" sz="1100" dirty="0"/>
           </a:p>
@@ -4053,7 +5818,7 @@
                 <a:ea typeface="Calibri" pitchFamily="34" charset="-122"/>
                 <a:cs typeface="Calibri" pitchFamily="34" charset="-120"/>
               </a:rPr>
-              <a:t>6 razões pelas quais o ciclone venceu</a:t>
+              <a:t>O Ciclone é a tecnologia recomendada</a:t>
             </a:r>
             <a:endParaRPr lang="en-US" sz="2600" dirty="0"/>
           </a:p>
@@ -4098,28 +5863,52 @@
           </a:p>
         </p:txBody>
       </p:sp>
-      <p:sp>
-        <p:nvSpPr>
-          <p:cNvPr id="5" name="Shape 3"/>
-          <p:cNvSpPr/>
-          <p:nvPr/>
-        </p:nvSpPr>
+      <p:pic>
+        <p:nvPicPr>
+          <p:cNvPr id="5" name="Image 0" descr="ranking.png">    </p:cNvPr>
+          <p:cNvPicPr>
+            <a:picLocks noChangeAspect="1"/>
+          </p:cNvPicPr>
+          <p:nvPr/>
+        </p:nvPicPr>
+        <p:blipFill>
+          <a:blip r:embed="rId1"/>
+          <a:stretch>
+            <a:fillRect/>
+          </a:stretch>
+        </p:blipFill>
         <p:spPr>
           <a:xfrm>
             <a:off x="566928" y="1600200"/>
-            <a:ext cx="3566160" cy="1737360"/>
+            <a:ext cx="6583680" cy="3253112"/>
+          </a:xfrm>
+          <a:prstGeom prst="rect">
+            <a:avLst/>
+          </a:prstGeom>
+        </p:spPr>
+      </p:pic>
+      <p:sp>
+        <p:nvSpPr>
+          <p:cNvPr id="6" name="Shape 3"/>
+          <p:cNvSpPr/>
+          <p:nvPr/>
+        </p:nvSpPr>
+        <p:spPr>
+          <a:xfrm>
+            <a:off x="7452360" y="2011680"/>
+            <a:ext cx="4160520" cy="2377440"/>
           </a:xfrm>
           <a:prstGeom prst="roundRect">
             <a:avLst>
-              <a:gd name="adj" fmla="val 3684"/>
+              <a:gd name="adj" fmla="val 3077"/>
             </a:avLst>
           </a:prstGeom>
           <a:solidFill>
             <a:srgbClr val="F1F6FB"/>
           </a:solidFill>
-          <a:ln w="12700">
+          <a:ln w="19050">
             <a:solidFill>
-              <a:srgbClr val="D7E1EC"/>
+              <a:srgbClr val="2E8B57"/>
             </a:solidFill>
             <a:prstDash val="solid"/>
           </a:ln>
@@ -4127,75 +5916,14 @@
       </p:sp>
       <p:sp>
         <p:nvSpPr>
-          <p:cNvPr id="6" name="Shape 4"/>
-          <p:cNvSpPr/>
-          <p:nvPr/>
-        </p:nvSpPr>
-        <p:spPr>
-          <a:xfrm>
-            <a:off x="768096" y="1801368"/>
-            <a:ext cx="384048" cy="384048"/>
-          </a:xfrm>
-          <a:prstGeom prst="roundRect">
-            <a:avLst>
-              <a:gd name="adj" fmla="val 11905"/>
-            </a:avLst>
-          </a:prstGeom>
-          <a:solidFill>
-            <a:srgbClr val="2E8B57"/>
-          </a:solidFill>
-          <a:ln/>
-        </p:spPr>
-      </p:sp>
-      <p:sp>
-        <p:nvSpPr>
-          <p:cNvPr id="7" name="Text 5"/>
-          <p:cNvSpPr/>
-          <p:nvPr/>
-        </p:nvSpPr>
-        <p:spPr>
-          <a:xfrm>
-            <a:off x="768096" y="1783080"/>
-            <a:ext cx="384048" cy="384048"/>
-          </a:xfrm>
-          <a:prstGeom prst="rect">
-            <a:avLst/>
-          </a:prstGeom>
-          <a:noFill/>
-          <a:ln/>
-        </p:spPr>
-        <p:txBody>
-          <a:bodyPr wrap="square" lIns="0" tIns="0" rIns="0" bIns="0" rtlCol="0" anchor="ctr"/>
-          <a:lstStyle/>
-          <a:p>
-            <a:pPr algn="ctr" indent="0" marL="0">
-              <a:buNone/>
-            </a:pPr>
-            <a:r>
-              <a:rPr lang="en-US" sz="1500" b="1" dirty="0">
-                <a:solidFill>
-                  <a:srgbClr val="FFFFFF"/>
-                </a:solidFill>
-                <a:latin typeface="Calibri" pitchFamily="34" charset="0"/>
-                <a:ea typeface="Calibri" pitchFamily="34" charset="-122"/>
-                <a:cs typeface="Calibri" pitchFamily="34" charset="-120"/>
-              </a:rPr>
-              <a:t>✓</a:t>
-            </a:r>
-            <a:endParaRPr lang="en-US" sz="1500" dirty="0"/>
-          </a:p>
-        </p:txBody>
-      </p:sp>
-      <p:sp>
-        <p:nvSpPr>
-          <p:cNvPr id="8" name="Text 6"/>
-          <p:cNvSpPr/>
-          <p:nvPr/>
-        </p:nvSpPr>
-        <p:spPr>
-          <a:xfrm>
-            <a:off x="1280160" y="1783080"/>
-            <a:ext cx="2743200" cy="411480"/>
+          <p:cNvPr id="7" name="Text 4"/>
+          <p:cNvSpPr/>
+          <p:nvPr/>
+        </p:nvSpPr>
+        <p:spPr>
+          <a:xfrm>
+            <a:off x="7680960" y="2194560"/>
+            <a:ext cx="3657600" cy="274320"/>
           </a:xfrm>
           <a:prstGeom prst="rect">
             <a:avLst/>
@@ -4211,7 +5939,60 @@
               <a:buNone/>
             </a:pPr>
             <a:r>
-              <a:rPr lang="en-US" sz="1500" b="1" dirty="0">
+              <a:rPr lang="en-US" sz="1100" b="1" spc="100" kern="0" dirty="0">
+                <a:solidFill>
+                  <a:srgbClr val="2E8B57"/>
+                </a:solidFill>
+                <a:latin typeface="Calibri" pitchFamily="34" charset="0"/>
+                <a:ea typeface="Calibri" pitchFamily="34" charset="-122"/>
+                <a:cs typeface="Calibri" pitchFamily="34" charset="-120"/>
+              </a:rPr>
+              <a:t>VENCEDOR</a:t>
+            </a:r>
+            <a:endParaRPr lang="en-US" sz="1100" dirty="0"/>
+          </a:p>
+        </p:txBody>
+      </p:sp>
+      <p:sp>
+        <p:nvSpPr>
+          <p:cNvPr id="8" name="Text 5"/>
+          <p:cNvSpPr/>
+          <p:nvPr/>
+        </p:nvSpPr>
+        <p:spPr>
+          <a:xfrm>
+            <a:off x="7680960" y="2514600"/>
+            <a:ext cx="3657600" cy="640080"/>
+          </a:xfrm>
+          <a:prstGeom prst="rect">
+            <a:avLst/>
+          </a:prstGeom>
+          <a:noFill/>
+          <a:ln/>
+        </p:spPr>
+        <p:txBody>
+          <a:bodyPr wrap="square" lIns="0" tIns="0" rIns="0" bIns="0" rtlCol="0" anchor="ctr"/>
+          <a:lstStyle/>
+          <a:p>
+            <a:pPr indent="0" marL="0">
+              <a:buNone/>
+            </a:pPr>
+            <a:r>
+              <a:rPr lang="en-US" sz="3000" b="1" dirty="0">
+                <a:solidFill>
+                  <a:srgbClr val="2E8B57"/>
+                </a:solidFill>
+                <a:latin typeface="Calibri" pitchFamily="34" charset="0"/>
+                <a:ea typeface="Calibri" pitchFamily="34" charset="-122"/>
+                <a:cs typeface="Calibri" pitchFamily="34" charset="-120"/>
+              </a:rPr>
+              <a:t>CICLONE  </a:t>
+            </a:r>
+            <a:pPr indent="0" marL="0">
+              <a:buNone/>
+            </a:pPr>
+            <a:r>
+              <a:rPr lang="en-US" sz="2200" b="1" dirty="0">
                 <a:solidFill>
                   <a:srgbClr val="16232E"/>
                 </a:solidFill>
@@ -4219,22 +6000,22 @@
                 <a:ea typeface="Calibri" pitchFamily="34" charset="-122"/>
                 <a:cs typeface="Calibri" pitchFamily="34" charset="-120"/>
               </a:rPr>
-              <a:t>Alta temperatura</a:t>
-            </a:r>
-            <a:endParaRPr lang="en-US" sz="1500" dirty="0"/>
-          </a:p>
-        </p:txBody>
-      </p:sp>
-      <p:sp>
-        <p:nvSpPr>
-          <p:cNvPr id="9" name="Text 7"/>
-          <p:cNvSpPr/>
-          <p:nvPr/>
-        </p:nvSpPr>
-        <p:spPr>
-          <a:xfrm>
-            <a:off x="795528" y="2313432"/>
-            <a:ext cx="3200400" cy="868680"/>
+              <a:t>+11/17</a:t>
+            </a:r>
+            <a:endParaRPr lang="en-US" sz="3000" dirty="0"/>
+          </a:p>
+        </p:txBody>
+      </p:sp>
+      <p:sp>
+        <p:nvSpPr>
+          <p:cNvPr id="9" name="Text 6"/>
+          <p:cNvSpPr/>
+          <p:nvPr/>
+        </p:nvSpPr>
+        <p:spPr>
+          <a:xfrm>
+            <a:off x="7680960" y="3200400"/>
+            <a:ext cx="3703320" cy="1097280"/>
           </a:xfrm>
           <a:prstGeom prst="rect">
             <a:avLst/>
@@ -4250,7 +6031,7 @@
               <a:buNone/>
             </a:pPr>
             <a:r>
-              <a:rPr lang="en-US" sz="1250" dirty="0">
+              <a:rPr lang="en-US" sz="1350" dirty="0">
                 <a:solidFill>
                   <a:srgbClr val="55677A"/>
                 </a:solidFill>
@@ -4258,845 +6039,15 @@
                 <a:ea typeface="Calibri" pitchFamily="34" charset="-122"/>
                 <a:cs typeface="Calibri" pitchFamily="34" charset="-120"/>
               </a:rPr>
-              <a:t>Opera a 450 °C direto (via seca) — sem resfriar o gás</a:t>
-            </a:r>
-            <a:endParaRPr lang="en-US" sz="1250" dirty="0"/>
-          </a:p>
-        </p:txBody>
-      </p:sp>
-      <p:sp>
-        <p:nvSpPr>
-          <p:cNvPr id="10" name="Shape 8"/>
-          <p:cNvSpPr/>
-          <p:nvPr/>
-        </p:nvSpPr>
-        <p:spPr>
-          <a:xfrm>
-            <a:off x="4416552" y="1600200"/>
-            <a:ext cx="3566160" cy="1737360"/>
-          </a:xfrm>
-          <a:prstGeom prst="roundRect">
-            <a:avLst>
-              <a:gd name="adj" fmla="val 3684"/>
-            </a:avLst>
-          </a:prstGeom>
-          <a:solidFill>
-            <a:srgbClr val="F1F6FB"/>
-          </a:solidFill>
-          <a:ln w="12700">
-            <a:solidFill>
-              <a:srgbClr val="D7E1EC"/>
-            </a:solidFill>
-            <a:prstDash val="solid"/>
-          </a:ln>
-        </p:spPr>
-      </p:sp>
-      <p:sp>
-        <p:nvSpPr>
-          <p:cNvPr id="11" name="Shape 9"/>
-          <p:cNvSpPr/>
-          <p:nvPr/>
-        </p:nvSpPr>
-        <p:spPr>
-          <a:xfrm>
-            <a:off x="4617720" y="1801368"/>
-            <a:ext cx="384048" cy="384048"/>
-          </a:xfrm>
-          <a:prstGeom prst="roundRect">
-            <a:avLst>
-              <a:gd name="adj" fmla="val 11905"/>
-            </a:avLst>
-          </a:prstGeom>
-          <a:solidFill>
-            <a:srgbClr val="2E8B57"/>
-          </a:solidFill>
-          <a:ln/>
-        </p:spPr>
-      </p:sp>
-      <p:sp>
-        <p:nvSpPr>
-          <p:cNvPr id="12" name="Text 10"/>
-          <p:cNvSpPr/>
-          <p:nvPr/>
-        </p:nvSpPr>
-        <p:spPr>
-          <a:xfrm>
-            <a:off x="4617720" y="1783080"/>
-            <a:ext cx="384048" cy="384048"/>
-          </a:xfrm>
-          <a:prstGeom prst="rect">
-            <a:avLst/>
-          </a:prstGeom>
-          <a:noFill/>
-          <a:ln/>
-        </p:spPr>
-        <p:txBody>
-          <a:bodyPr wrap="square" lIns="0" tIns="0" rIns="0" bIns="0" rtlCol="0" anchor="ctr"/>
-          <a:lstStyle/>
-          <a:p>
-            <a:pPr algn="ctr" indent="0" marL="0">
-              <a:buNone/>
-            </a:pPr>
-            <a:r>
-              <a:rPr lang="en-US" sz="1500" b="1" dirty="0">
-                <a:solidFill>
-                  <a:srgbClr val="FFFFFF"/>
-                </a:solidFill>
-                <a:latin typeface="Calibri" pitchFamily="34" charset="0"/>
-                <a:ea typeface="Calibri" pitchFamily="34" charset="-122"/>
-                <a:cs typeface="Calibri" pitchFamily="34" charset="-120"/>
-              </a:rPr>
-              <a:t>✓</a:t>
-            </a:r>
-            <a:endParaRPr lang="en-US" sz="1500" dirty="0"/>
-          </a:p>
-        </p:txBody>
-      </p:sp>
-      <p:sp>
-        <p:nvSpPr>
-          <p:cNvPr id="13" name="Text 11"/>
-          <p:cNvSpPr/>
-          <p:nvPr/>
-        </p:nvSpPr>
-        <p:spPr>
-          <a:xfrm>
-            <a:off x="5129784" y="1783080"/>
-            <a:ext cx="2743200" cy="411480"/>
-          </a:xfrm>
-          <a:prstGeom prst="rect">
-            <a:avLst/>
-          </a:prstGeom>
-          <a:noFill/>
-          <a:ln/>
-        </p:spPr>
-        <p:txBody>
-          <a:bodyPr wrap="square" lIns="0" tIns="0" rIns="0" bIns="0" rtlCol="0" anchor="ctr"/>
-          <a:lstStyle/>
-          <a:p>
-            <a:pPr indent="0" marL="0">
-              <a:buNone/>
-            </a:pPr>
-            <a:r>
-              <a:rPr lang="en-US" sz="1500" b="1" dirty="0">
-                <a:solidFill>
-                  <a:srgbClr val="16232E"/>
-                </a:solidFill>
-                <a:latin typeface="Calibri" pitchFamily="34" charset="0"/>
-                <a:ea typeface="Calibri" pitchFamily="34" charset="-122"/>
-                <a:cs typeface="Calibri" pitchFamily="34" charset="-120"/>
-              </a:rPr>
-              <a:t>ΔP baixo</a:t>
-            </a:r>
-            <a:endParaRPr lang="en-US" sz="1500" dirty="0"/>
-          </a:p>
-        </p:txBody>
-      </p:sp>
-      <p:sp>
-        <p:nvSpPr>
-          <p:cNvPr id="14" name="Text 12"/>
-          <p:cNvSpPr/>
-          <p:nvPr/>
-        </p:nvSpPr>
-        <p:spPr>
-          <a:xfrm>
-            <a:off x="4645152" y="2313432"/>
-            <a:ext cx="3200400" cy="868680"/>
-          </a:xfrm>
-          <a:prstGeom prst="rect">
-            <a:avLst/>
-          </a:prstGeom>
-          <a:noFill/>
-          <a:ln/>
-        </p:spPr>
-        <p:txBody>
-          <a:bodyPr wrap="square" lIns="0" tIns="0" rIns="0" bIns="0" rtlCol="0" anchor="t"/>
-          <a:lstStyle/>
-          <a:p>
-            <a:pPr indent="0" marL="0">
-              <a:buNone/>
-            </a:pPr>
-            <a:r>
-              <a:rPr lang="en-US" sz="1250" dirty="0">
-                <a:solidFill>
-                  <a:srgbClr val="55677A"/>
-                </a:solidFill>
-                <a:latin typeface="Calibri" pitchFamily="34" charset="0"/>
-                <a:ea typeface="Calibri" pitchFamily="34" charset="-122"/>
-                <a:cs typeface="Calibri" pitchFamily="34" charset="-120"/>
-              </a:rPr>
-              <a:t>5–25 mbar &lt; 40 mbar do projeto</a:t>
-            </a:r>
-            <a:endParaRPr lang="en-US" sz="1250" dirty="0"/>
-          </a:p>
-        </p:txBody>
-      </p:sp>
-      <p:sp>
-        <p:nvSpPr>
-          <p:cNvPr id="15" name="Shape 13"/>
-          <p:cNvSpPr/>
-          <p:nvPr/>
-        </p:nvSpPr>
-        <p:spPr>
-          <a:xfrm>
-            <a:off x="8266176" y="1600200"/>
-            <a:ext cx="3566160" cy="1737360"/>
-          </a:xfrm>
-          <a:prstGeom prst="roundRect">
-            <a:avLst>
-              <a:gd name="adj" fmla="val 3684"/>
-            </a:avLst>
-          </a:prstGeom>
-          <a:solidFill>
-            <a:srgbClr val="F1F6FB"/>
-          </a:solidFill>
-          <a:ln w="12700">
-            <a:solidFill>
-              <a:srgbClr val="D7E1EC"/>
-            </a:solidFill>
-            <a:prstDash val="solid"/>
-          </a:ln>
-        </p:spPr>
-      </p:sp>
-      <p:sp>
-        <p:nvSpPr>
-          <p:cNvPr id="16" name="Shape 14"/>
-          <p:cNvSpPr/>
-          <p:nvPr/>
-        </p:nvSpPr>
-        <p:spPr>
-          <a:xfrm>
-            <a:off x="8467344" y="1801368"/>
-            <a:ext cx="384048" cy="384048"/>
-          </a:xfrm>
-          <a:prstGeom prst="roundRect">
-            <a:avLst>
-              <a:gd name="adj" fmla="val 11905"/>
-            </a:avLst>
-          </a:prstGeom>
-          <a:solidFill>
-            <a:srgbClr val="2E8B57"/>
-          </a:solidFill>
-          <a:ln/>
-        </p:spPr>
-      </p:sp>
-      <p:sp>
-        <p:nvSpPr>
-          <p:cNvPr id="17" name="Text 15"/>
-          <p:cNvSpPr/>
-          <p:nvPr/>
-        </p:nvSpPr>
-        <p:spPr>
-          <a:xfrm>
-            <a:off x="8467344" y="1783080"/>
-            <a:ext cx="384048" cy="384048"/>
-          </a:xfrm>
-          <a:prstGeom prst="rect">
-            <a:avLst/>
-          </a:prstGeom>
-          <a:noFill/>
-          <a:ln/>
-        </p:spPr>
-        <p:txBody>
-          <a:bodyPr wrap="square" lIns="0" tIns="0" rIns="0" bIns="0" rtlCol="0" anchor="ctr"/>
-          <a:lstStyle/>
-          <a:p>
-            <a:pPr algn="ctr" indent="0" marL="0">
-              <a:buNone/>
-            </a:pPr>
-            <a:r>
-              <a:rPr lang="en-US" sz="1500" b="1" dirty="0">
-                <a:solidFill>
-                  <a:srgbClr val="FFFFFF"/>
-                </a:solidFill>
-                <a:latin typeface="Calibri" pitchFamily="34" charset="0"/>
-                <a:ea typeface="Calibri" pitchFamily="34" charset="-122"/>
-                <a:cs typeface="Calibri" pitchFamily="34" charset="-120"/>
-              </a:rPr>
-              <a:t>✓</a:t>
-            </a:r>
-            <a:endParaRPr lang="en-US" sz="1500" dirty="0"/>
-          </a:p>
-        </p:txBody>
-      </p:sp>
-      <p:sp>
-        <p:nvSpPr>
-          <p:cNvPr id="18" name="Text 16"/>
-          <p:cNvSpPr/>
-          <p:nvPr/>
-        </p:nvSpPr>
-        <p:spPr>
-          <a:xfrm>
-            <a:off x="8979408" y="1783080"/>
-            <a:ext cx="2743200" cy="411480"/>
-          </a:xfrm>
-          <a:prstGeom prst="rect">
-            <a:avLst/>
-          </a:prstGeom>
-          <a:noFill/>
-          <a:ln/>
-        </p:spPr>
-        <p:txBody>
-          <a:bodyPr wrap="square" lIns="0" tIns="0" rIns="0" bIns="0" rtlCol="0" anchor="ctr"/>
-          <a:lstStyle/>
-          <a:p>
-            <a:pPr indent="0" marL="0">
-              <a:buNone/>
-            </a:pPr>
-            <a:r>
-              <a:rPr lang="en-US" sz="1500" b="1" dirty="0">
-                <a:solidFill>
-                  <a:srgbClr val="16232E"/>
-                </a:solidFill>
-                <a:latin typeface="Calibri" pitchFamily="34" charset="0"/>
-                <a:ea typeface="Calibri" pitchFamily="34" charset="-122"/>
-                <a:cs typeface="Calibri" pitchFamily="34" charset="-120"/>
-              </a:rPr>
-              <a:t>Sem partes móveis</a:t>
-            </a:r>
-            <a:endParaRPr lang="en-US" sz="1500" dirty="0"/>
-          </a:p>
-        </p:txBody>
-      </p:sp>
-      <p:sp>
-        <p:nvSpPr>
-          <p:cNvPr id="19" name="Text 17"/>
-          <p:cNvSpPr/>
-          <p:nvPr/>
-        </p:nvSpPr>
-        <p:spPr>
-          <a:xfrm>
-            <a:off x="8494776" y="2313432"/>
-            <a:ext cx="3200400" cy="868680"/>
-          </a:xfrm>
-          <a:prstGeom prst="rect">
-            <a:avLst/>
-          </a:prstGeom>
-          <a:noFill/>
-          <a:ln/>
-        </p:spPr>
-        <p:txBody>
-          <a:bodyPr wrap="square" lIns="0" tIns="0" rIns="0" bIns="0" rtlCol="0" anchor="t"/>
-          <a:lstStyle/>
-          <a:p>
-            <a:pPr indent="0" marL="0">
-              <a:buNone/>
-            </a:pPr>
-            <a:r>
-              <a:rPr lang="en-US" sz="1250" dirty="0">
-                <a:solidFill>
-                  <a:srgbClr val="55677A"/>
-                </a:solidFill>
-                <a:latin typeface="Calibri" pitchFamily="34" charset="0"/>
-                <a:ea typeface="Calibri" pitchFamily="34" charset="-122"/>
-                <a:cs typeface="Calibri" pitchFamily="34" charset="-120"/>
-              </a:rPr>
-              <a:t>Baixo custo e baixa manutenção</a:t>
-            </a:r>
-            <a:endParaRPr lang="en-US" sz="1250" dirty="0"/>
-          </a:p>
-        </p:txBody>
-      </p:sp>
-      <p:sp>
-        <p:nvSpPr>
-          <p:cNvPr id="20" name="Shape 18"/>
-          <p:cNvSpPr/>
-          <p:nvPr/>
-        </p:nvSpPr>
-        <p:spPr>
-          <a:xfrm>
-            <a:off x="566928" y="3566160"/>
-            <a:ext cx="3566160" cy="1737360"/>
-          </a:xfrm>
-          <a:prstGeom prst="roundRect">
-            <a:avLst>
-              <a:gd name="adj" fmla="val 3684"/>
-            </a:avLst>
-          </a:prstGeom>
-          <a:solidFill>
-            <a:srgbClr val="F1F6FB"/>
-          </a:solidFill>
-          <a:ln w="12700">
-            <a:solidFill>
-              <a:srgbClr val="D7E1EC"/>
-            </a:solidFill>
-            <a:prstDash val="solid"/>
-          </a:ln>
-        </p:spPr>
-      </p:sp>
-      <p:sp>
-        <p:nvSpPr>
-          <p:cNvPr id="21" name="Shape 19"/>
-          <p:cNvSpPr/>
-          <p:nvPr/>
-        </p:nvSpPr>
-        <p:spPr>
-          <a:xfrm>
-            <a:off x="768096" y="3767328"/>
-            <a:ext cx="384048" cy="384048"/>
-          </a:xfrm>
-          <a:prstGeom prst="roundRect">
-            <a:avLst>
-              <a:gd name="adj" fmla="val 11905"/>
-            </a:avLst>
-          </a:prstGeom>
-          <a:solidFill>
-            <a:srgbClr val="2E8B57"/>
-          </a:solidFill>
-          <a:ln/>
-        </p:spPr>
-      </p:sp>
-      <p:sp>
-        <p:nvSpPr>
-          <p:cNvPr id="22" name="Text 20"/>
-          <p:cNvSpPr/>
-          <p:nvPr/>
-        </p:nvSpPr>
-        <p:spPr>
-          <a:xfrm>
-            <a:off x="768096" y="3749040"/>
-            <a:ext cx="384048" cy="384048"/>
-          </a:xfrm>
-          <a:prstGeom prst="rect">
-            <a:avLst/>
-          </a:prstGeom>
-          <a:noFill/>
-          <a:ln/>
-        </p:spPr>
-        <p:txBody>
-          <a:bodyPr wrap="square" lIns="0" tIns="0" rIns="0" bIns="0" rtlCol="0" anchor="ctr"/>
-          <a:lstStyle/>
-          <a:p>
-            <a:pPr algn="ctr" indent="0" marL="0">
-              <a:buNone/>
-            </a:pPr>
-            <a:r>
-              <a:rPr lang="en-US" sz="1500" b="1" dirty="0">
-                <a:solidFill>
-                  <a:srgbClr val="FFFFFF"/>
-                </a:solidFill>
-                <a:latin typeface="Calibri" pitchFamily="34" charset="0"/>
-                <a:ea typeface="Calibri" pitchFamily="34" charset="-122"/>
-                <a:cs typeface="Calibri" pitchFamily="34" charset="-120"/>
-              </a:rPr>
-              <a:t>✓</a:t>
-            </a:r>
-            <a:endParaRPr lang="en-US" sz="1500" dirty="0"/>
-          </a:p>
-        </p:txBody>
-      </p:sp>
-      <p:sp>
-        <p:nvSpPr>
-          <p:cNvPr id="23" name="Text 21"/>
-          <p:cNvSpPr/>
-          <p:nvPr/>
-        </p:nvSpPr>
-        <p:spPr>
-          <a:xfrm>
-            <a:off x="1280160" y="3749040"/>
-            <a:ext cx="2743200" cy="411480"/>
-          </a:xfrm>
-          <a:prstGeom prst="rect">
-            <a:avLst/>
-          </a:prstGeom>
-          <a:noFill/>
-          <a:ln/>
-        </p:spPr>
-        <p:txBody>
-          <a:bodyPr wrap="square" lIns="0" tIns="0" rIns="0" bIns="0" rtlCol="0" anchor="ctr"/>
-          <a:lstStyle/>
-          <a:p>
-            <a:pPr indent="0" marL="0">
-              <a:buNone/>
-            </a:pPr>
-            <a:r>
-              <a:rPr lang="en-US" sz="1500" b="1" dirty="0">
-                <a:solidFill>
-                  <a:srgbClr val="16232E"/>
-                </a:solidFill>
-                <a:latin typeface="Calibri" pitchFamily="34" charset="0"/>
-                <a:ea typeface="Calibri" pitchFamily="34" charset="-122"/>
-                <a:cs typeface="Calibri" pitchFamily="34" charset="-120"/>
-              </a:rPr>
-              <a:t>Gás seco e quente</a:t>
-            </a:r>
-            <a:endParaRPr lang="en-US" sz="1500" dirty="0"/>
-          </a:p>
-        </p:txBody>
-      </p:sp>
-      <p:sp>
-        <p:nvSpPr>
-          <p:cNvPr id="24" name="Text 22"/>
-          <p:cNvSpPr/>
-          <p:nvPr/>
-        </p:nvSpPr>
-        <p:spPr>
-          <a:xfrm>
-            <a:off x="795528" y="4279392"/>
-            <a:ext cx="3200400" cy="868680"/>
-          </a:xfrm>
-          <a:prstGeom prst="rect">
-            <a:avLst/>
-          </a:prstGeom>
-          <a:noFill/>
-          <a:ln/>
-        </p:spPr>
-        <p:txBody>
-          <a:bodyPr wrap="square" lIns="0" tIns="0" rIns="0" bIns="0" rtlCol="0" anchor="t"/>
-          <a:lstStyle/>
-          <a:p>
-            <a:pPr indent="0" marL="0">
-              <a:buNone/>
-            </a:pPr>
-            <a:r>
-              <a:rPr lang="en-US" sz="1250" dirty="0">
-                <a:solidFill>
-                  <a:srgbClr val="55677A"/>
-                </a:solidFill>
-                <a:latin typeface="Calibri" pitchFamily="34" charset="0"/>
-                <a:ea typeface="Calibri" pitchFamily="34" charset="-122"/>
-                <a:cs typeface="Calibri" pitchFamily="34" charset="-120"/>
-              </a:rPr>
-              <a:t>Perfeito para o condensador casco-tubo a jusante</a:t>
-            </a:r>
-            <a:endParaRPr lang="en-US" sz="1250" dirty="0"/>
-          </a:p>
-        </p:txBody>
-      </p:sp>
-      <p:sp>
-        <p:nvSpPr>
-          <p:cNvPr id="25" name="Shape 23"/>
-          <p:cNvSpPr/>
-          <p:nvPr/>
-        </p:nvSpPr>
-        <p:spPr>
-          <a:xfrm>
-            <a:off x="4416552" y="3566160"/>
-            <a:ext cx="3566160" cy="1737360"/>
-          </a:xfrm>
-          <a:prstGeom prst="roundRect">
-            <a:avLst>
-              <a:gd name="adj" fmla="val 3684"/>
-            </a:avLst>
-          </a:prstGeom>
-          <a:solidFill>
-            <a:srgbClr val="F1F6FB"/>
-          </a:solidFill>
-          <a:ln w="12700">
-            <a:solidFill>
-              <a:srgbClr val="D7E1EC"/>
-            </a:solidFill>
-            <a:prstDash val="solid"/>
-          </a:ln>
-        </p:spPr>
-      </p:sp>
-      <p:sp>
-        <p:nvSpPr>
-          <p:cNvPr id="26" name="Shape 24"/>
-          <p:cNvSpPr/>
-          <p:nvPr/>
-        </p:nvSpPr>
-        <p:spPr>
-          <a:xfrm>
-            <a:off x="4617720" y="3767328"/>
-            <a:ext cx="384048" cy="384048"/>
-          </a:xfrm>
-          <a:prstGeom prst="roundRect">
-            <a:avLst>
-              <a:gd name="adj" fmla="val 11905"/>
-            </a:avLst>
-          </a:prstGeom>
-          <a:solidFill>
-            <a:srgbClr val="2E8B57"/>
-          </a:solidFill>
-          <a:ln/>
-        </p:spPr>
-      </p:sp>
-      <p:sp>
-        <p:nvSpPr>
-          <p:cNvPr id="27" name="Text 25"/>
-          <p:cNvSpPr/>
-          <p:nvPr/>
-        </p:nvSpPr>
-        <p:spPr>
-          <a:xfrm>
-            <a:off x="4617720" y="3749040"/>
-            <a:ext cx="384048" cy="384048"/>
-          </a:xfrm>
-          <a:prstGeom prst="rect">
-            <a:avLst/>
-          </a:prstGeom>
-          <a:noFill/>
-          <a:ln/>
-        </p:spPr>
-        <p:txBody>
-          <a:bodyPr wrap="square" lIns="0" tIns="0" rIns="0" bIns="0" rtlCol="0" anchor="ctr"/>
-          <a:lstStyle/>
-          <a:p>
-            <a:pPr algn="ctr" indent="0" marL="0">
-              <a:buNone/>
-            </a:pPr>
-            <a:r>
-              <a:rPr lang="en-US" sz="1500" b="1" dirty="0">
-                <a:solidFill>
-                  <a:srgbClr val="FFFFFF"/>
-                </a:solidFill>
-                <a:latin typeface="Calibri" pitchFamily="34" charset="0"/>
-                <a:ea typeface="Calibri" pitchFamily="34" charset="-122"/>
-                <a:cs typeface="Calibri" pitchFamily="34" charset="-120"/>
-              </a:rPr>
-              <a:t>✓</a:t>
-            </a:r>
-            <a:endParaRPr lang="en-US" sz="1500" dirty="0"/>
-          </a:p>
-        </p:txBody>
-      </p:sp>
-      <p:sp>
-        <p:nvSpPr>
-          <p:cNvPr id="28" name="Text 26"/>
-          <p:cNvSpPr/>
-          <p:nvPr/>
-        </p:nvSpPr>
-        <p:spPr>
-          <a:xfrm>
-            <a:off x="5129784" y="3749040"/>
-            <a:ext cx="2743200" cy="411480"/>
-          </a:xfrm>
-          <a:prstGeom prst="rect">
-            <a:avLst/>
-          </a:prstGeom>
-          <a:noFill/>
-          <a:ln/>
-        </p:spPr>
-        <p:txBody>
-          <a:bodyPr wrap="square" lIns="0" tIns="0" rIns="0" bIns="0" rtlCol="0" anchor="ctr"/>
-          <a:lstStyle/>
-          <a:p>
-            <a:pPr indent="0" marL="0">
-              <a:buNone/>
-            </a:pPr>
-            <a:r>
-              <a:rPr lang="en-US" sz="1500" b="1" dirty="0">
-                <a:solidFill>
-                  <a:srgbClr val="16232E"/>
-                </a:solidFill>
-                <a:latin typeface="Calibri" pitchFamily="34" charset="0"/>
-                <a:ea typeface="Calibri" pitchFamily="34" charset="-122"/>
-                <a:cs typeface="Calibri" pitchFamily="34" charset="-120"/>
-              </a:rPr>
-              <a:t>Evita filtração</a:t>
-            </a:r>
-            <a:endParaRPr lang="en-US" sz="1500" dirty="0"/>
-          </a:p>
-        </p:txBody>
-      </p:sp>
-      <p:sp>
-        <p:nvSpPr>
-          <p:cNvPr id="29" name="Text 27"/>
-          <p:cNvSpPr/>
-          <p:nvPr/>
-        </p:nvSpPr>
-        <p:spPr>
-          <a:xfrm>
-            <a:off x="4645152" y="4279392"/>
-            <a:ext cx="3200400" cy="868680"/>
-          </a:xfrm>
-          <a:prstGeom prst="rect">
-            <a:avLst/>
-          </a:prstGeom>
-          <a:noFill/>
-          <a:ln/>
-        </p:spPr>
-        <p:txBody>
-          <a:bodyPr wrap="square" lIns="0" tIns="0" rIns="0" bIns="0" rtlCol="0" anchor="t"/>
-          <a:lstStyle/>
-          <a:p>
-            <a:pPr indent="0" marL="0">
-              <a:buNone/>
-            </a:pPr>
-            <a:r>
-              <a:rPr lang="en-US" sz="1250" dirty="0">
-                <a:solidFill>
-                  <a:srgbClr val="55677A"/>
-                </a:solidFill>
-                <a:latin typeface="Calibri" pitchFamily="34" charset="0"/>
-                <a:ea typeface="Calibri" pitchFamily="34" charset="-122"/>
-                <a:cs typeface="Calibri" pitchFamily="34" charset="-120"/>
-              </a:rPr>
-              <a:t>Não gera líquido a filtrar (critério do cliente)</a:t>
-            </a:r>
-            <a:endParaRPr lang="en-US" sz="1250" dirty="0"/>
-          </a:p>
-        </p:txBody>
-      </p:sp>
-      <p:sp>
-        <p:nvSpPr>
-          <p:cNvPr id="30" name="Shape 28"/>
-          <p:cNvSpPr/>
-          <p:nvPr/>
-        </p:nvSpPr>
-        <p:spPr>
-          <a:xfrm>
-            <a:off x="8266176" y="3566160"/>
-            <a:ext cx="3566160" cy="1737360"/>
-          </a:xfrm>
-          <a:prstGeom prst="roundRect">
-            <a:avLst>
-              <a:gd name="adj" fmla="val 3684"/>
-            </a:avLst>
-          </a:prstGeom>
-          <a:solidFill>
-            <a:srgbClr val="F1F6FB"/>
-          </a:solidFill>
-          <a:ln w="12700">
-            <a:solidFill>
-              <a:srgbClr val="D7E1EC"/>
-            </a:solidFill>
-            <a:prstDash val="solid"/>
-          </a:ln>
-        </p:spPr>
-      </p:sp>
-      <p:sp>
-        <p:nvSpPr>
-          <p:cNvPr id="31" name="Shape 29"/>
-          <p:cNvSpPr/>
-          <p:nvPr/>
-        </p:nvSpPr>
-        <p:spPr>
-          <a:xfrm>
-            <a:off x="8467344" y="3767328"/>
-            <a:ext cx="384048" cy="384048"/>
-          </a:xfrm>
-          <a:prstGeom prst="roundRect">
-            <a:avLst>
-              <a:gd name="adj" fmla="val 11905"/>
-            </a:avLst>
-          </a:prstGeom>
-          <a:solidFill>
-            <a:srgbClr val="2E8B57"/>
-          </a:solidFill>
-          <a:ln/>
-        </p:spPr>
-      </p:sp>
-      <p:sp>
-        <p:nvSpPr>
-          <p:cNvPr id="32" name="Text 30"/>
-          <p:cNvSpPr/>
-          <p:nvPr/>
-        </p:nvSpPr>
-        <p:spPr>
-          <a:xfrm>
-            <a:off x="8467344" y="3749040"/>
-            <a:ext cx="384048" cy="384048"/>
-          </a:xfrm>
-          <a:prstGeom prst="rect">
-            <a:avLst/>
-          </a:prstGeom>
-          <a:noFill/>
-          <a:ln/>
-        </p:spPr>
-        <p:txBody>
-          <a:bodyPr wrap="square" lIns="0" tIns="0" rIns="0" bIns="0" rtlCol="0" anchor="ctr"/>
-          <a:lstStyle/>
-          <a:p>
-            <a:pPr algn="ctr" indent="0" marL="0">
-              <a:buNone/>
-            </a:pPr>
-            <a:r>
-              <a:rPr lang="en-US" sz="1500" b="1" dirty="0">
-                <a:solidFill>
-                  <a:srgbClr val="FFFFFF"/>
-                </a:solidFill>
-                <a:latin typeface="Calibri" pitchFamily="34" charset="0"/>
-                <a:ea typeface="Calibri" pitchFamily="34" charset="-122"/>
-                <a:cs typeface="Calibri" pitchFamily="34" charset="-120"/>
-              </a:rPr>
-              <a:t>✓</a:t>
-            </a:r>
-            <a:endParaRPr lang="en-US" sz="1500" dirty="0"/>
-          </a:p>
-        </p:txBody>
-      </p:sp>
-      <p:sp>
-        <p:nvSpPr>
-          <p:cNvPr id="33" name="Text 31"/>
-          <p:cNvSpPr/>
-          <p:nvPr/>
-        </p:nvSpPr>
-        <p:spPr>
-          <a:xfrm>
-            <a:off x="8979408" y="3749040"/>
-            <a:ext cx="2743200" cy="411480"/>
-          </a:xfrm>
-          <a:prstGeom prst="rect">
-            <a:avLst/>
-          </a:prstGeom>
-          <a:noFill/>
-          <a:ln/>
-        </p:spPr>
-        <p:txBody>
-          <a:bodyPr wrap="square" lIns="0" tIns="0" rIns="0" bIns="0" rtlCol="0" anchor="ctr"/>
-          <a:lstStyle/>
-          <a:p>
-            <a:pPr indent="0" marL="0">
-              <a:buNone/>
-            </a:pPr>
-            <a:r>
-              <a:rPr lang="en-US" sz="1500" b="1" dirty="0">
-                <a:solidFill>
-                  <a:srgbClr val="16232E"/>
-                </a:solidFill>
-                <a:latin typeface="Calibri" pitchFamily="34" charset="0"/>
-                <a:ea typeface="Calibri" pitchFamily="34" charset="-122"/>
-                <a:cs typeface="Calibri" pitchFamily="34" charset="-120"/>
-              </a:rPr>
-              <a:t>Resiste ao HCl</a:t>
-            </a:r>
-            <a:endParaRPr lang="en-US" sz="1500" dirty="0"/>
-          </a:p>
-        </p:txBody>
-      </p:sp>
-      <p:sp>
-        <p:nvSpPr>
-          <p:cNvPr id="34" name="Text 32"/>
-          <p:cNvSpPr/>
-          <p:nvPr/>
-        </p:nvSpPr>
-        <p:spPr>
-          <a:xfrm>
-            <a:off x="8494776" y="4279392"/>
-            <a:ext cx="3200400" cy="868680"/>
-          </a:xfrm>
-          <a:prstGeom prst="rect">
-            <a:avLst/>
-          </a:prstGeom>
-          <a:noFill/>
-          <a:ln/>
-        </p:spPr>
-        <p:txBody>
-          <a:bodyPr wrap="square" lIns="0" tIns="0" rIns="0" bIns="0" rtlCol="0" anchor="t"/>
-          <a:lstStyle/>
-          <a:p>
-            <a:pPr indent="0" marL="0">
-              <a:buNone/>
-            </a:pPr>
-            <a:r>
-              <a:rPr lang="en-US" sz="1250" dirty="0">
-                <a:solidFill>
-                  <a:srgbClr val="55677A"/>
-                </a:solidFill>
-                <a:latin typeface="Calibri" pitchFamily="34" charset="0"/>
-                <a:ea typeface="Calibri" pitchFamily="34" charset="-122"/>
-                <a:cs typeface="Calibri" pitchFamily="34" charset="-120"/>
-              </a:rPr>
-              <a:t>Via seca vence a corrosão que afunda as úmidas</a:t>
-            </a:r>
-            <a:endParaRPr lang="en-US" sz="1250" dirty="0"/>
-          </a:p>
-        </p:txBody>
-      </p:sp>
-      <p:sp>
-        <p:nvSpPr>
-          <p:cNvPr id="35" name="Text 33"/>
+              <a:t>Vantagem clara sobre o 2º (Filtro Cerâmico, +8) e o 3º (Settler, +7). As vias úmidas (Quench/Scrubber) ficaram em último (+3).</a:t>
+            </a:r>
+            <a:endParaRPr lang="en-US" sz="1350" dirty="0"/>
+          </a:p>
+        </p:txBody>
+      </p:sp>
+      <p:sp>
+        <p:nvSpPr>
+          <p:cNvPr id="10" name="Text 7"/>
           <p:cNvSpPr/>
           <p:nvPr/>
         </p:nvSpPr>
@@ -5149,7 +6100,7 @@
       </p:sp>
       <p:sp>
         <p:nvSpPr>
-          <p:cNvPr id="36" name="Text 34"/>
+          <p:cNvPr id="11" name="Text 8"/>
           <p:cNvSpPr/>
           <p:nvPr/>
         </p:nvSpPr>
@@ -5251,7 +6202,7 @@
                 <a:ea typeface="Calibri" pitchFamily="34" charset="-122"/>
                 <a:cs typeface="Calibri" pitchFamily="34" charset="-120"/>
               </a:rPr>
-              <a:t>O TRADE-OFF</a:t>
+              <a:t>POR QUÊ</a:t>
             </a:r>
             <a:endParaRPr lang="en-US" sz="1100" dirty="0"/>
           </a:p>
@@ -5290,7 +6241,7 @@
                 <a:ea typeface="Calibri" pitchFamily="34" charset="-122"/>
                 <a:cs typeface="Calibri" pitchFamily="34" charset="-120"/>
               </a:rPr>
-              <a:t>Por que as outras não passaram</a:t>
+              <a:t>6 razões pelas quais o ciclone venceu</a:t>
             </a:r>
             <a:endParaRPr lang="en-US" sz="2600" dirty="0"/>
           </a:p>
@@ -5343,12 +6294,12 @@
         </p:nvSpPr>
         <p:spPr>
           <a:xfrm>
-            <a:off x="566928" y="1691640"/>
-            <a:ext cx="11064240" cy="1024128"/>
+            <a:off x="566928" y="1600200"/>
+            <a:ext cx="3566160" cy="1737360"/>
           </a:xfrm>
           <a:prstGeom prst="roundRect">
             <a:avLst>
-              <a:gd name="adj" fmla="val 5357"/>
+              <a:gd name="adj" fmla="val 3684"/>
             </a:avLst>
           </a:prstGeom>
           <a:solidFill>
@@ -5364,101 +6315,101 @@
       </p:sp>
       <p:sp>
         <p:nvSpPr>
-          <p:cNvPr id="6" name="Text 4"/>
-          <p:cNvSpPr/>
-          <p:nvPr/>
-        </p:nvSpPr>
-        <p:spPr>
-          <a:xfrm>
-            <a:off x="795528" y="1691640"/>
-            <a:ext cx="2743200" cy="1024128"/>
-          </a:xfrm>
-          <a:prstGeom prst="rect">
-            <a:avLst/>
-          </a:prstGeom>
-          <a:noFill/>
-          <a:ln/>
-        </p:spPr>
-        <p:txBody>
-          <a:bodyPr wrap="square" lIns="0" tIns="0" rIns="0" bIns="0" rtlCol="0" anchor="ctr"/>
-          <a:lstStyle/>
-          <a:p>
-            <a:pPr indent="0" marL="0">
-              <a:buNone/>
-            </a:pPr>
-            <a:r>
-              <a:rPr lang="en-US" sz="1500" b="1" dirty="0">
-                <a:solidFill>
-                  <a:srgbClr val="16232E"/>
-                </a:solidFill>
-                <a:latin typeface="Calibri" pitchFamily="34" charset="0"/>
-                <a:ea typeface="Calibri" pitchFamily="34" charset="-122"/>
-                <a:cs typeface="Calibri" pitchFamily="34" charset="-120"/>
-              </a:rPr>
-              <a:t>Filtro Cerâmico</a:t>
-            </a:r>
-            <a:endParaRPr lang="en-US" sz="1500" dirty="0"/>
-          </a:p>
-        </p:txBody>
-      </p:sp>
-      <p:sp>
-        <p:nvSpPr>
-          <p:cNvPr id="7" name="Shape 5"/>
-          <p:cNvSpPr/>
-          <p:nvPr/>
-        </p:nvSpPr>
-        <p:spPr>
-          <a:xfrm>
-            <a:off x="3584448" y="2002536"/>
-            <a:ext cx="822960" cy="402336"/>
+          <p:cNvPr id="6" name="Shape 4"/>
+          <p:cNvSpPr/>
+          <p:nvPr/>
+        </p:nvSpPr>
+        <p:spPr>
+          <a:xfrm>
+            <a:off x="768096" y="1801368"/>
+            <a:ext cx="384048" cy="384048"/>
           </a:xfrm>
           <a:prstGeom prst="roundRect">
             <a:avLst>
-              <a:gd name="adj" fmla="val 11364"/>
+              <a:gd name="adj" fmla="val 11905"/>
             </a:avLst>
           </a:prstGeom>
           <a:solidFill>
-            <a:srgbClr val="D9822B"/>
+            <a:srgbClr val="2E8B57"/>
           </a:solidFill>
           <a:ln/>
         </p:spPr>
       </p:sp>
       <p:sp>
         <p:nvSpPr>
+          <p:cNvPr id="7" name="Text 5"/>
+          <p:cNvSpPr/>
+          <p:nvPr/>
+        </p:nvSpPr>
+        <p:spPr>
+          <a:xfrm>
+            <a:off x="768096" y="1783080"/>
+            <a:ext cx="384048" cy="384048"/>
+          </a:xfrm>
+          <a:prstGeom prst="rect">
+            <a:avLst/>
+          </a:prstGeom>
+          <a:noFill/>
+          <a:ln/>
+        </p:spPr>
+        <p:txBody>
+          <a:bodyPr wrap="square" lIns="0" tIns="0" rIns="0" bIns="0" rtlCol="0" anchor="ctr"/>
+          <a:lstStyle/>
+          <a:p>
+            <a:pPr algn="ctr" indent="0" marL="0">
+              <a:buNone/>
+            </a:pPr>
+            <a:r>
+              <a:rPr lang="en-US" sz="1500" b="1" dirty="0">
+                <a:solidFill>
+                  <a:srgbClr val="FFFFFF"/>
+                </a:solidFill>
+                <a:latin typeface="Calibri" pitchFamily="34" charset="0"/>
+                <a:ea typeface="Calibri" pitchFamily="34" charset="-122"/>
+                <a:cs typeface="Calibri" pitchFamily="34" charset="-120"/>
+              </a:rPr>
+              <a:t>✓</a:t>
+            </a:r>
+            <a:endParaRPr lang="en-US" sz="1500" dirty="0"/>
+          </a:p>
+        </p:txBody>
+      </p:sp>
+      <p:sp>
+        <p:nvSpPr>
           <p:cNvPr id="8" name="Text 6"/>
           <p:cNvSpPr/>
           <p:nvPr/>
         </p:nvSpPr>
         <p:spPr>
           <a:xfrm>
-            <a:off x="3584448" y="1984248"/>
-            <a:ext cx="822960" cy="420624"/>
-          </a:xfrm>
-          <a:prstGeom prst="rect">
-            <a:avLst/>
-          </a:prstGeom>
-          <a:noFill/>
-          <a:ln/>
-        </p:spPr>
-        <p:txBody>
-          <a:bodyPr wrap="square" lIns="0" tIns="0" rIns="0" bIns="0" rtlCol="0" anchor="ctr"/>
-          <a:lstStyle/>
-          <a:p>
-            <a:pPr algn="ctr" indent="0" marL="0">
-              <a:buNone/>
-            </a:pPr>
-            <a:r>
-              <a:rPr lang="en-US" sz="1400" b="1" dirty="0">
-                <a:solidFill>
-                  <a:srgbClr val="FFFFFF"/>
-                </a:solidFill>
-                <a:latin typeface="Calibri" pitchFamily="34" charset="0"/>
-                <a:ea typeface="Calibri" pitchFamily="34" charset="-122"/>
-                <a:cs typeface="Calibri" pitchFamily="34" charset="-120"/>
-              </a:rPr>
-              <a:t>+8</a:t>
-            </a:r>
-            <a:endParaRPr lang="en-US" sz="1400" dirty="0"/>
+            <a:off x="1280160" y="1783080"/>
+            <a:ext cx="2743200" cy="411480"/>
+          </a:xfrm>
+          <a:prstGeom prst="rect">
+            <a:avLst/>
+          </a:prstGeom>
+          <a:noFill/>
+          <a:ln/>
+        </p:spPr>
+        <p:txBody>
+          <a:bodyPr wrap="square" lIns="0" tIns="0" rIns="0" bIns="0" rtlCol="0" anchor="ctr"/>
+          <a:lstStyle/>
+          <a:p>
+            <a:pPr indent="0" marL="0">
+              <a:buNone/>
+            </a:pPr>
+            <a:r>
+              <a:rPr lang="en-US" sz="1500" b="1" dirty="0">
+                <a:solidFill>
+                  <a:srgbClr val="16232E"/>
+                </a:solidFill>
+                <a:latin typeface="Calibri" pitchFamily="34" charset="0"/>
+                <a:ea typeface="Calibri" pitchFamily="34" charset="-122"/>
+                <a:cs typeface="Calibri" pitchFamily="34" charset="-120"/>
+              </a:rPr>
+              <a:t>Alta temperatura</a:t>
+            </a:r>
+            <a:endParaRPr lang="en-US" sz="1500" dirty="0"/>
           </a:p>
         </p:txBody>
       </p:sp>
@@ -5470,24 +6421,24 @@
         </p:nvSpPr>
         <p:spPr>
           <a:xfrm>
-            <a:off x="4636008" y="1691640"/>
-            <a:ext cx="6858000" cy="1024128"/>
-          </a:xfrm>
-          <a:prstGeom prst="rect">
-            <a:avLst/>
-          </a:prstGeom>
-          <a:noFill/>
-          <a:ln/>
-        </p:spPr>
-        <p:txBody>
-          <a:bodyPr wrap="square" lIns="0" tIns="0" rIns="0" bIns="0" rtlCol="0" anchor="ctr"/>
+            <a:off x="795528" y="2313432"/>
+            <a:ext cx="3200400" cy="868680"/>
+          </a:xfrm>
+          <a:prstGeom prst="rect">
+            <a:avLst/>
+          </a:prstGeom>
+          <a:noFill/>
+          <a:ln/>
+        </p:spPr>
+        <p:txBody>
+          <a:bodyPr wrap="square" lIns="0" tIns="0" rIns="0" bIns="0" rtlCol="0" anchor="t"/>
           <a:lstStyle/>
           <a:p>
             <a:pPr indent="0" marL="0">
               <a:buNone/>
             </a:pPr>
             <a:r>
-              <a:rPr lang="en-US" sz="1300" dirty="0">
+              <a:rPr lang="en-US" sz="1250" dirty="0">
                 <a:solidFill>
                   <a:srgbClr val="55677A"/>
                 </a:solidFill>
@@ -5495,9 +6446,9 @@
                 <a:ea typeface="Calibri" pitchFamily="34" charset="-122"/>
                 <a:cs typeface="Calibri" pitchFamily="34" charset="-120"/>
               </a:rPr>
-              <a:t>Melhor eficiência, MAS regeneração de 6–9 h → inviável em contínuo + custo alto</a:t>
-            </a:r>
-            <a:endParaRPr lang="en-US" sz="1300" dirty="0"/>
+              <a:t>Opera a 450 °C direto (via seca) — sem resfriar o gás</a:t>
+            </a:r>
+            <a:endParaRPr lang="en-US" sz="1250" dirty="0"/>
           </a:p>
         </p:txBody>
       </p:sp>
@@ -5509,12 +6460,12 @@
         </p:nvSpPr>
         <p:spPr>
           <a:xfrm>
-            <a:off x="566928" y="2825496"/>
-            <a:ext cx="11064240" cy="1024128"/>
+            <a:off x="4416552" y="1600200"/>
+            <a:ext cx="3566160" cy="1737360"/>
           </a:xfrm>
           <a:prstGeom prst="roundRect">
             <a:avLst>
-              <a:gd name="adj" fmla="val 5357"/>
+              <a:gd name="adj" fmla="val 3684"/>
             </a:avLst>
           </a:prstGeom>
           <a:solidFill>
@@ -5530,101 +6481,101 @@
       </p:sp>
       <p:sp>
         <p:nvSpPr>
-          <p:cNvPr id="11" name="Text 9"/>
-          <p:cNvSpPr/>
-          <p:nvPr/>
-        </p:nvSpPr>
-        <p:spPr>
-          <a:xfrm>
-            <a:off x="795528" y="2825496"/>
-            <a:ext cx="2743200" cy="1024128"/>
-          </a:xfrm>
-          <a:prstGeom prst="rect">
-            <a:avLst/>
-          </a:prstGeom>
-          <a:noFill/>
-          <a:ln/>
-        </p:spPr>
-        <p:txBody>
-          <a:bodyPr wrap="square" lIns="0" tIns="0" rIns="0" bIns="0" rtlCol="0" anchor="ctr"/>
-          <a:lstStyle/>
-          <a:p>
-            <a:pPr indent="0" marL="0">
-              <a:buNone/>
-            </a:pPr>
-            <a:r>
-              <a:rPr lang="en-US" sz="1500" b="1" dirty="0">
-                <a:solidFill>
-                  <a:srgbClr val="16232E"/>
-                </a:solidFill>
-                <a:latin typeface="Calibri" pitchFamily="34" charset="0"/>
-                <a:ea typeface="Calibri" pitchFamily="34" charset="-122"/>
-                <a:cs typeface="Calibri" pitchFamily="34" charset="-120"/>
-              </a:rPr>
-              <a:t>Settler Gravit.</a:t>
-            </a:r>
-            <a:endParaRPr lang="en-US" sz="1500" dirty="0"/>
-          </a:p>
-        </p:txBody>
-      </p:sp>
-      <p:sp>
-        <p:nvSpPr>
-          <p:cNvPr id="12" name="Shape 10"/>
-          <p:cNvSpPr/>
-          <p:nvPr/>
-        </p:nvSpPr>
-        <p:spPr>
-          <a:xfrm>
-            <a:off x="3584448" y="3136392"/>
-            <a:ext cx="822960" cy="402336"/>
+          <p:cNvPr id="11" name="Shape 9"/>
+          <p:cNvSpPr/>
+          <p:nvPr/>
+        </p:nvSpPr>
+        <p:spPr>
+          <a:xfrm>
+            <a:off x="4617720" y="1801368"/>
+            <a:ext cx="384048" cy="384048"/>
           </a:xfrm>
           <a:prstGeom prst="roundRect">
             <a:avLst>
-              <a:gd name="adj" fmla="val 11364"/>
+              <a:gd name="adj" fmla="val 11905"/>
             </a:avLst>
           </a:prstGeom>
           <a:solidFill>
-            <a:srgbClr val="D9822B"/>
+            <a:srgbClr val="2E8B57"/>
           </a:solidFill>
           <a:ln/>
         </p:spPr>
       </p:sp>
       <p:sp>
         <p:nvSpPr>
+          <p:cNvPr id="12" name="Text 10"/>
+          <p:cNvSpPr/>
+          <p:nvPr/>
+        </p:nvSpPr>
+        <p:spPr>
+          <a:xfrm>
+            <a:off x="4617720" y="1783080"/>
+            <a:ext cx="384048" cy="384048"/>
+          </a:xfrm>
+          <a:prstGeom prst="rect">
+            <a:avLst/>
+          </a:prstGeom>
+          <a:noFill/>
+          <a:ln/>
+        </p:spPr>
+        <p:txBody>
+          <a:bodyPr wrap="square" lIns="0" tIns="0" rIns="0" bIns="0" rtlCol="0" anchor="ctr"/>
+          <a:lstStyle/>
+          <a:p>
+            <a:pPr algn="ctr" indent="0" marL="0">
+              <a:buNone/>
+            </a:pPr>
+            <a:r>
+              <a:rPr lang="en-US" sz="1500" b="1" dirty="0">
+                <a:solidFill>
+                  <a:srgbClr val="FFFFFF"/>
+                </a:solidFill>
+                <a:latin typeface="Calibri" pitchFamily="34" charset="0"/>
+                <a:ea typeface="Calibri" pitchFamily="34" charset="-122"/>
+                <a:cs typeface="Calibri" pitchFamily="34" charset="-120"/>
+              </a:rPr>
+              <a:t>✓</a:t>
+            </a:r>
+            <a:endParaRPr lang="en-US" sz="1500" dirty="0"/>
+          </a:p>
+        </p:txBody>
+      </p:sp>
+      <p:sp>
+        <p:nvSpPr>
           <p:cNvPr id="13" name="Text 11"/>
           <p:cNvSpPr/>
           <p:nvPr/>
         </p:nvSpPr>
         <p:spPr>
           <a:xfrm>
-            <a:off x="3584448" y="3118104"/>
-            <a:ext cx="822960" cy="420624"/>
-          </a:xfrm>
-          <a:prstGeom prst="rect">
-            <a:avLst/>
-          </a:prstGeom>
-          <a:noFill/>
-          <a:ln/>
-        </p:spPr>
-        <p:txBody>
-          <a:bodyPr wrap="square" lIns="0" tIns="0" rIns="0" bIns="0" rtlCol="0" anchor="ctr"/>
-          <a:lstStyle/>
-          <a:p>
-            <a:pPr algn="ctr" indent="0" marL="0">
-              <a:buNone/>
-            </a:pPr>
-            <a:r>
-              <a:rPr lang="en-US" sz="1400" b="1" dirty="0">
-                <a:solidFill>
-                  <a:srgbClr val="FFFFFF"/>
-                </a:solidFill>
-                <a:latin typeface="Calibri" pitchFamily="34" charset="0"/>
-                <a:ea typeface="Calibri" pitchFamily="34" charset="-122"/>
-                <a:cs typeface="Calibri" pitchFamily="34" charset="-120"/>
-              </a:rPr>
-              <a:t>+7</a:t>
-            </a:r>
-            <a:endParaRPr lang="en-US" sz="1400" dirty="0"/>
+            <a:off x="5129784" y="1783080"/>
+            <a:ext cx="2743200" cy="411480"/>
+          </a:xfrm>
+          <a:prstGeom prst="rect">
+            <a:avLst/>
+          </a:prstGeom>
+          <a:noFill/>
+          <a:ln/>
+        </p:spPr>
+        <p:txBody>
+          <a:bodyPr wrap="square" lIns="0" tIns="0" rIns="0" bIns="0" rtlCol="0" anchor="ctr"/>
+          <a:lstStyle/>
+          <a:p>
+            <a:pPr indent="0" marL="0">
+              <a:buNone/>
+            </a:pPr>
+            <a:r>
+              <a:rPr lang="en-US" sz="1500" b="1" dirty="0">
+                <a:solidFill>
+                  <a:srgbClr val="16232E"/>
+                </a:solidFill>
+                <a:latin typeface="Calibri" pitchFamily="34" charset="0"/>
+                <a:ea typeface="Calibri" pitchFamily="34" charset="-122"/>
+                <a:cs typeface="Calibri" pitchFamily="34" charset="-120"/>
+              </a:rPr>
+              <a:t>ΔP baixo</a:t>
+            </a:r>
+            <a:endParaRPr lang="en-US" sz="1500" dirty="0"/>
           </a:p>
         </p:txBody>
       </p:sp>
@@ -5636,24 +6587,24 @@
         </p:nvSpPr>
         <p:spPr>
           <a:xfrm>
-            <a:off x="4636008" y="2825496"/>
-            <a:ext cx="6858000" cy="1024128"/>
-          </a:xfrm>
-          <a:prstGeom prst="rect">
-            <a:avLst/>
-          </a:prstGeom>
-          <a:noFill/>
-          <a:ln/>
-        </p:spPr>
-        <p:txBody>
-          <a:bodyPr wrap="square" lIns="0" tIns="0" rIns="0" bIns="0" rtlCol="0" anchor="ctr"/>
+            <a:off x="4645152" y="2313432"/>
+            <a:ext cx="3200400" cy="868680"/>
+          </a:xfrm>
+          <a:prstGeom prst="rect">
+            <a:avLst/>
+          </a:prstGeom>
+          <a:noFill/>
+          <a:ln/>
+        </p:spPr>
+        <p:txBody>
+          <a:bodyPr wrap="square" lIns="0" tIns="0" rIns="0" bIns="0" rtlCol="0" anchor="t"/>
           <a:lstStyle/>
           <a:p>
             <a:pPr indent="0" marL="0">
               <a:buNone/>
             </a:pPr>
             <a:r>
-              <a:rPr lang="en-US" sz="1300" dirty="0">
+              <a:rPr lang="en-US" sz="1250" dirty="0">
                 <a:solidFill>
                   <a:srgbClr val="55677A"/>
                 </a:solidFill>
@@ -5661,9 +6612,9 @@
                 <a:ea typeface="Calibri" pitchFamily="34" charset="-122"/>
                 <a:cs typeface="Calibri" pitchFamily="34" charset="-120"/>
               </a:rPr>
-              <a:t>Barato e simples, MAS não captura os finos (&lt;200 µm escapam)</a:t>
-            </a:r>
-            <a:endParaRPr lang="en-US" sz="1300" dirty="0"/>
+              <a:t>5–25 mbar &lt; 40 mbar do projeto</a:t>
+            </a:r>
+            <a:endParaRPr lang="en-US" sz="1250" dirty="0"/>
           </a:p>
         </p:txBody>
       </p:sp>
@@ -5675,12 +6626,12 @@
         </p:nvSpPr>
         <p:spPr>
           <a:xfrm>
-            <a:off x="566928" y="3959352"/>
-            <a:ext cx="11064240" cy="1024128"/>
+            <a:off x="8266176" y="1600200"/>
+            <a:ext cx="3566160" cy="1737360"/>
           </a:xfrm>
           <a:prstGeom prst="roundRect">
             <a:avLst>
-              <a:gd name="adj" fmla="val 5357"/>
+              <a:gd name="adj" fmla="val 3684"/>
             </a:avLst>
           </a:prstGeom>
           <a:solidFill>
@@ -5696,101 +6647,101 @@
       </p:sp>
       <p:sp>
         <p:nvSpPr>
-          <p:cNvPr id="16" name="Text 14"/>
-          <p:cNvSpPr/>
-          <p:nvPr/>
-        </p:nvSpPr>
-        <p:spPr>
-          <a:xfrm>
-            <a:off x="795528" y="3959352"/>
-            <a:ext cx="2743200" cy="1024128"/>
-          </a:xfrm>
-          <a:prstGeom prst="rect">
-            <a:avLst/>
-          </a:prstGeom>
-          <a:noFill/>
-          <a:ln/>
-        </p:spPr>
-        <p:txBody>
-          <a:bodyPr wrap="square" lIns="0" tIns="0" rIns="0" bIns="0" rtlCol="0" anchor="ctr"/>
-          <a:lstStyle/>
-          <a:p>
-            <a:pPr indent="0" marL="0">
-              <a:buNone/>
-            </a:pPr>
-            <a:r>
-              <a:rPr lang="en-US" sz="1500" b="1" dirty="0">
-                <a:solidFill>
-                  <a:srgbClr val="16232E"/>
-                </a:solidFill>
-                <a:latin typeface="Calibri" pitchFamily="34" charset="0"/>
-                <a:ea typeface="Calibri" pitchFamily="34" charset="-122"/>
-                <a:cs typeface="Calibri" pitchFamily="34" charset="-120"/>
-              </a:rPr>
-              <a:t>ESP</a:t>
-            </a:r>
-            <a:endParaRPr lang="en-US" sz="1500" dirty="0"/>
-          </a:p>
-        </p:txBody>
-      </p:sp>
-      <p:sp>
-        <p:nvSpPr>
-          <p:cNvPr id="17" name="Shape 15"/>
-          <p:cNvSpPr/>
-          <p:nvPr/>
-        </p:nvSpPr>
-        <p:spPr>
-          <a:xfrm>
-            <a:off x="3584448" y="4270248"/>
-            <a:ext cx="822960" cy="402336"/>
+          <p:cNvPr id="16" name="Shape 14"/>
+          <p:cNvSpPr/>
+          <p:nvPr/>
+        </p:nvSpPr>
+        <p:spPr>
+          <a:xfrm>
+            <a:off x="8467344" y="1801368"/>
+            <a:ext cx="384048" cy="384048"/>
           </a:xfrm>
           <a:prstGeom prst="roundRect">
             <a:avLst>
-              <a:gd name="adj" fmla="val 11364"/>
+              <a:gd name="adj" fmla="val 11905"/>
             </a:avLst>
           </a:prstGeom>
           <a:solidFill>
-            <a:srgbClr val="C0504D"/>
+            <a:srgbClr val="2E8B57"/>
           </a:solidFill>
           <a:ln/>
         </p:spPr>
       </p:sp>
       <p:sp>
         <p:nvSpPr>
+          <p:cNvPr id="17" name="Text 15"/>
+          <p:cNvSpPr/>
+          <p:nvPr/>
+        </p:nvSpPr>
+        <p:spPr>
+          <a:xfrm>
+            <a:off x="8467344" y="1783080"/>
+            <a:ext cx="384048" cy="384048"/>
+          </a:xfrm>
+          <a:prstGeom prst="rect">
+            <a:avLst/>
+          </a:prstGeom>
+          <a:noFill/>
+          <a:ln/>
+        </p:spPr>
+        <p:txBody>
+          <a:bodyPr wrap="square" lIns="0" tIns="0" rIns="0" bIns="0" rtlCol="0" anchor="ctr"/>
+          <a:lstStyle/>
+          <a:p>
+            <a:pPr algn="ctr" indent="0" marL="0">
+              <a:buNone/>
+            </a:pPr>
+            <a:r>
+              <a:rPr lang="en-US" sz="1500" b="1" dirty="0">
+                <a:solidFill>
+                  <a:srgbClr val="FFFFFF"/>
+                </a:solidFill>
+                <a:latin typeface="Calibri" pitchFamily="34" charset="0"/>
+                <a:ea typeface="Calibri" pitchFamily="34" charset="-122"/>
+                <a:cs typeface="Calibri" pitchFamily="34" charset="-120"/>
+              </a:rPr>
+              <a:t>✓</a:t>
+            </a:r>
+            <a:endParaRPr lang="en-US" sz="1500" dirty="0"/>
+          </a:p>
+        </p:txBody>
+      </p:sp>
+      <p:sp>
+        <p:nvSpPr>
           <p:cNvPr id="18" name="Text 16"/>
           <p:cNvSpPr/>
           <p:nvPr/>
         </p:nvSpPr>
         <p:spPr>
           <a:xfrm>
-            <a:off x="3584448" y="4251960"/>
-            <a:ext cx="822960" cy="420624"/>
-          </a:xfrm>
-          <a:prstGeom prst="rect">
-            <a:avLst/>
-          </a:prstGeom>
-          <a:noFill/>
-          <a:ln/>
-        </p:spPr>
-        <p:txBody>
-          <a:bodyPr wrap="square" lIns="0" tIns="0" rIns="0" bIns="0" rtlCol="0" anchor="ctr"/>
-          <a:lstStyle/>
-          <a:p>
-            <a:pPr algn="ctr" indent="0" marL="0">
-              <a:buNone/>
-            </a:pPr>
-            <a:r>
-              <a:rPr lang="en-US" sz="1400" b="1" dirty="0">
-                <a:solidFill>
-                  <a:srgbClr val="FFFFFF"/>
-                </a:solidFill>
-                <a:latin typeface="Calibri" pitchFamily="34" charset="0"/>
-                <a:ea typeface="Calibri" pitchFamily="34" charset="-122"/>
-                <a:cs typeface="Calibri" pitchFamily="34" charset="-120"/>
-              </a:rPr>
-              <a:t>+5</a:t>
-            </a:r>
-            <a:endParaRPr lang="en-US" sz="1400" dirty="0"/>
+            <a:off x="8979408" y="1783080"/>
+            <a:ext cx="2743200" cy="411480"/>
+          </a:xfrm>
+          <a:prstGeom prst="rect">
+            <a:avLst/>
+          </a:prstGeom>
+          <a:noFill/>
+          <a:ln/>
+        </p:spPr>
+        <p:txBody>
+          <a:bodyPr wrap="square" lIns="0" tIns="0" rIns="0" bIns="0" rtlCol="0" anchor="ctr"/>
+          <a:lstStyle/>
+          <a:p>
+            <a:pPr indent="0" marL="0">
+              <a:buNone/>
+            </a:pPr>
+            <a:r>
+              <a:rPr lang="en-US" sz="1500" b="1" dirty="0">
+                <a:solidFill>
+                  <a:srgbClr val="16232E"/>
+                </a:solidFill>
+                <a:latin typeface="Calibri" pitchFamily="34" charset="0"/>
+                <a:ea typeface="Calibri" pitchFamily="34" charset="-122"/>
+                <a:cs typeface="Calibri" pitchFamily="34" charset="-120"/>
+              </a:rPr>
+              <a:t>Sem partes móveis</a:t>
+            </a:r>
+            <a:endParaRPr lang="en-US" sz="1500" dirty="0"/>
           </a:p>
         </p:txBody>
       </p:sp>
@@ -5802,24 +6753,24 @@
         </p:nvSpPr>
         <p:spPr>
           <a:xfrm>
-            <a:off x="4636008" y="3959352"/>
-            <a:ext cx="6858000" cy="1024128"/>
-          </a:xfrm>
-          <a:prstGeom prst="rect">
-            <a:avLst/>
-          </a:prstGeom>
-          <a:noFill/>
-          <a:ln/>
-        </p:spPr>
-        <p:txBody>
-          <a:bodyPr wrap="square" lIns="0" tIns="0" rIns="0" bIns="0" rtlCol="0" anchor="ctr"/>
+            <a:off x="8494776" y="2313432"/>
+            <a:ext cx="3200400" cy="868680"/>
+          </a:xfrm>
+          <a:prstGeom prst="rect">
+            <a:avLst/>
+          </a:prstGeom>
+          <a:noFill/>
+          <a:ln/>
+        </p:spPr>
+        <p:txBody>
+          <a:bodyPr wrap="square" lIns="0" tIns="0" rIns="0" bIns="0" rtlCol="0" anchor="t"/>
           <a:lstStyle/>
           <a:p>
             <a:pPr indent="0" marL="0">
               <a:buNone/>
             </a:pPr>
             <a:r>
-              <a:rPr lang="en-US" sz="1300" dirty="0">
+              <a:rPr lang="en-US" sz="1250" dirty="0">
                 <a:solidFill>
                   <a:srgbClr val="55677A"/>
                 </a:solidFill>
@@ -5827,9 +6778,9 @@
                 <a:ea typeface="Calibri" pitchFamily="34" charset="-122"/>
                 <a:cs typeface="Calibri" pitchFamily="34" charset="-120"/>
               </a:rPr>
-              <a:t>Degrada acima de 400 °C — eficiência cai e consumo sobe</a:t>
-            </a:r>
-            <a:endParaRPr lang="en-US" sz="1300" dirty="0"/>
+              <a:t>Baixo custo e baixa manutenção</a:t>
+            </a:r>
+            <a:endParaRPr lang="en-US" sz="1250" dirty="0"/>
           </a:p>
         </p:txBody>
       </p:sp>
@@ -5841,12 +6792,12 @@
         </p:nvSpPr>
         <p:spPr>
           <a:xfrm>
-            <a:off x="566928" y="5093208"/>
-            <a:ext cx="11064240" cy="1024128"/>
+            <a:off x="566928" y="3566160"/>
+            <a:ext cx="3566160" cy="1737360"/>
           </a:xfrm>
           <a:prstGeom prst="roundRect">
             <a:avLst>
-              <a:gd name="adj" fmla="val 5357"/>
+              <a:gd name="adj" fmla="val 3684"/>
             </a:avLst>
           </a:prstGeom>
           <a:solidFill>
@@ -5862,75 +6813,202 @@
       </p:sp>
       <p:sp>
         <p:nvSpPr>
-          <p:cNvPr id="21" name="Text 19"/>
-          <p:cNvSpPr/>
-          <p:nvPr/>
-        </p:nvSpPr>
-        <p:spPr>
-          <a:xfrm>
-            <a:off x="795528" y="5093208"/>
-            <a:ext cx="2743200" cy="1024128"/>
-          </a:xfrm>
-          <a:prstGeom prst="rect">
-            <a:avLst/>
-          </a:prstGeom>
-          <a:noFill/>
-          <a:ln/>
-        </p:spPr>
-        <p:txBody>
-          <a:bodyPr wrap="square" lIns="0" tIns="0" rIns="0" bIns="0" rtlCol="0" anchor="ctr"/>
-          <a:lstStyle/>
-          <a:p>
-            <a:pPr indent="0" marL="0">
-              <a:buNone/>
-            </a:pPr>
-            <a:r>
-              <a:rPr lang="en-US" sz="1500" b="1" dirty="0">
-                <a:solidFill>
-                  <a:srgbClr val="16232E"/>
-                </a:solidFill>
-                <a:latin typeface="Calibri" pitchFamily="34" charset="0"/>
-                <a:ea typeface="Calibri" pitchFamily="34" charset="-122"/>
-                <a:cs typeface="Calibri" pitchFamily="34" charset="-120"/>
-              </a:rPr>
-              <a:t>Quench / Scrubber</a:t>
-            </a:r>
-            <a:endParaRPr lang="en-US" sz="1500" dirty="0"/>
-          </a:p>
-        </p:txBody>
-      </p:sp>
-      <p:sp>
-        <p:nvSpPr>
-          <p:cNvPr id="22" name="Shape 20"/>
-          <p:cNvSpPr/>
-          <p:nvPr/>
-        </p:nvSpPr>
-        <p:spPr>
-          <a:xfrm>
-            <a:off x="3584448" y="5404104"/>
-            <a:ext cx="822960" cy="402336"/>
+          <p:cNvPr id="21" name="Shape 19"/>
+          <p:cNvSpPr/>
+          <p:nvPr/>
+        </p:nvSpPr>
+        <p:spPr>
+          <a:xfrm>
+            <a:off x="768096" y="3767328"/>
+            <a:ext cx="384048" cy="384048"/>
           </a:xfrm>
           <a:prstGeom prst="roundRect">
             <a:avLst>
-              <a:gd name="adj" fmla="val 11364"/>
+              <a:gd name="adj" fmla="val 11905"/>
             </a:avLst>
           </a:prstGeom>
           <a:solidFill>
-            <a:srgbClr val="C0504D"/>
+            <a:srgbClr val="2E8B57"/>
           </a:solidFill>
           <a:ln/>
         </p:spPr>
       </p:sp>
       <p:sp>
         <p:nvSpPr>
+          <p:cNvPr id="22" name="Text 20"/>
+          <p:cNvSpPr/>
+          <p:nvPr/>
+        </p:nvSpPr>
+        <p:spPr>
+          <a:xfrm>
+            <a:off x="768096" y="3749040"/>
+            <a:ext cx="384048" cy="384048"/>
+          </a:xfrm>
+          <a:prstGeom prst="rect">
+            <a:avLst/>
+          </a:prstGeom>
+          <a:noFill/>
+          <a:ln/>
+        </p:spPr>
+        <p:txBody>
+          <a:bodyPr wrap="square" lIns="0" tIns="0" rIns="0" bIns="0" rtlCol="0" anchor="ctr"/>
+          <a:lstStyle/>
+          <a:p>
+            <a:pPr algn="ctr" indent="0" marL="0">
+              <a:buNone/>
+            </a:pPr>
+            <a:r>
+              <a:rPr lang="en-US" sz="1500" b="1" dirty="0">
+                <a:solidFill>
+                  <a:srgbClr val="FFFFFF"/>
+                </a:solidFill>
+                <a:latin typeface="Calibri" pitchFamily="34" charset="0"/>
+                <a:ea typeface="Calibri" pitchFamily="34" charset="-122"/>
+                <a:cs typeface="Calibri" pitchFamily="34" charset="-120"/>
+              </a:rPr>
+              <a:t>✓</a:t>
+            </a:r>
+            <a:endParaRPr lang="en-US" sz="1500" dirty="0"/>
+          </a:p>
+        </p:txBody>
+      </p:sp>
+      <p:sp>
+        <p:nvSpPr>
           <p:cNvPr id="23" name="Text 21"/>
           <p:cNvSpPr/>
           <p:nvPr/>
         </p:nvSpPr>
         <p:spPr>
           <a:xfrm>
-            <a:off x="3584448" y="5385816"/>
-            <a:ext cx="822960" cy="420624"/>
+            <a:off x="1280160" y="3749040"/>
+            <a:ext cx="2743200" cy="411480"/>
+          </a:xfrm>
+          <a:prstGeom prst="rect">
+            <a:avLst/>
+          </a:prstGeom>
+          <a:noFill/>
+          <a:ln/>
+        </p:spPr>
+        <p:txBody>
+          <a:bodyPr wrap="square" lIns="0" tIns="0" rIns="0" bIns="0" rtlCol="0" anchor="ctr"/>
+          <a:lstStyle/>
+          <a:p>
+            <a:pPr indent="0" marL="0">
+              <a:buNone/>
+            </a:pPr>
+            <a:r>
+              <a:rPr lang="en-US" sz="1500" b="1" dirty="0">
+                <a:solidFill>
+                  <a:srgbClr val="16232E"/>
+                </a:solidFill>
+                <a:latin typeface="Calibri" pitchFamily="34" charset="0"/>
+                <a:ea typeface="Calibri" pitchFamily="34" charset="-122"/>
+                <a:cs typeface="Calibri" pitchFamily="34" charset="-120"/>
+              </a:rPr>
+              <a:t>Gás seco e quente</a:t>
+            </a:r>
+            <a:endParaRPr lang="en-US" sz="1500" dirty="0"/>
+          </a:p>
+        </p:txBody>
+      </p:sp>
+      <p:sp>
+        <p:nvSpPr>
+          <p:cNvPr id="24" name="Text 22"/>
+          <p:cNvSpPr/>
+          <p:nvPr/>
+        </p:nvSpPr>
+        <p:spPr>
+          <a:xfrm>
+            <a:off x="795528" y="4279392"/>
+            <a:ext cx="3200400" cy="868680"/>
+          </a:xfrm>
+          <a:prstGeom prst="rect">
+            <a:avLst/>
+          </a:prstGeom>
+          <a:noFill/>
+          <a:ln/>
+        </p:spPr>
+        <p:txBody>
+          <a:bodyPr wrap="square" lIns="0" tIns="0" rIns="0" bIns="0" rtlCol="0" anchor="t"/>
+          <a:lstStyle/>
+          <a:p>
+            <a:pPr indent="0" marL="0">
+              <a:buNone/>
+            </a:pPr>
+            <a:r>
+              <a:rPr lang="en-US" sz="1250" dirty="0">
+                <a:solidFill>
+                  <a:srgbClr val="55677A"/>
+                </a:solidFill>
+                <a:latin typeface="Calibri" pitchFamily="34" charset="0"/>
+                <a:ea typeface="Calibri" pitchFamily="34" charset="-122"/>
+                <a:cs typeface="Calibri" pitchFamily="34" charset="-120"/>
+              </a:rPr>
+              <a:t>Perfeito para o condensador casco-tubo a jusante</a:t>
+            </a:r>
+            <a:endParaRPr lang="en-US" sz="1250" dirty="0"/>
+          </a:p>
+        </p:txBody>
+      </p:sp>
+      <p:sp>
+        <p:nvSpPr>
+          <p:cNvPr id="25" name="Shape 23"/>
+          <p:cNvSpPr/>
+          <p:nvPr/>
+        </p:nvSpPr>
+        <p:spPr>
+          <a:xfrm>
+            <a:off x="4416552" y="3566160"/>
+            <a:ext cx="3566160" cy="1737360"/>
+          </a:xfrm>
+          <a:prstGeom prst="roundRect">
+            <a:avLst>
+              <a:gd name="adj" fmla="val 3684"/>
+            </a:avLst>
+          </a:prstGeom>
+          <a:solidFill>
+            <a:srgbClr val="F1F6FB"/>
+          </a:solidFill>
+          <a:ln w="12700">
+            <a:solidFill>
+              <a:srgbClr val="D7E1EC"/>
+            </a:solidFill>
+            <a:prstDash val="solid"/>
+          </a:ln>
+        </p:spPr>
+      </p:sp>
+      <p:sp>
+        <p:nvSpPr>
+          <p:cNvPr id="26" name="Shape 24"/>
+          <p:cNvSpPr/>
+          <p:nvPr/>
+        </p:nvSpPr>
+        <p:spPr>
+          <a:xfrm>
+            <a:off x="4617720" y="3767328"/>
+            <a:ext cx="384048" cy="384048"/>
+          </a:xfrm>
+          <a:prstGeom prst="roundRect">
+            <a:avLst>
+              <a:gd name="adj" fmla="val 11905"/>
+            </a:avLst>
+          </a:prstGeom>
+          <a:solidFill>
+            <a:srgbClr val="2E8B57"/>
+          </a:solidFill>
+          <a:ln/>
+        </p:spPr>
+      </p:sp>
+      <p:sp>
+        <p:nvSpPr>
+          <p:cNvPr id="27" name="Text 25"/>
+          <p:cNvSpPr/>
+          <p:nvPr/>
+        </p:nvSpPr>
+        <p:spPr>
+          <a:xfrm>
+            <a:off x="4617720" y="3749040"/>
+            <a:ext cx="384048" cy="384048"/>
           </a:xfrm>
           <a:prstGeom prst="rect">
             <a:avLst/>
@@ -5946,7 +7024,7 @@
               <a:buNone/>
             </a:pPr>
             <a:r>
-              <a:rPr lang="en-US" sz="1400" b="1" dirty="0">
+              <a:rPr lang="en-US" sz="1500" b="1" dirty="0">
                 <a:solidFill>
                   <a:srgbClr val="FFFFFF"/>
                 </a:solidFill>
@@ -5954,22 +7032,22 @@
                 <a:ea typeface="Calibri" pitchFamily="34" charset="-122"/>
                 <a:cs typeface="Calibri" pitchFamily="34" charset="-120"/>
               </a:rPr>
-              <a:t>+3</a:t>
-            </a:r>
-            <a:endParaRPr lang="en-US" sz="1400" dirty="0"/>
-          </a:p>
-        </p:txBody>
-      </p:sp>
-      <p:sp>
-        <p:nvSpPr>
-          <p:cNvPr id="24" name="Text 22"/>
-          <p:cNvSpPr/>
-          <p:nvPr/>
-        </p:nvSpPr>
-        <p:spPr>
-          <a:xfrm>
-            <a:off x="4636008" y="5093208"/>
-            <a:ext cx="6858000" cy="1024128"/>
+              <a:t>✓</a:t>
+            </a:r>
+            <a:endParaRPr lang="en-US" sz="1500" dirty="0"/>
+          </a:p>
+        </p:txBody>
+      </p:sp>
+      <p:sp>
+        <p:nvSpPr>
+          <p:cNvPr id="28" name="Text 26"/>
+          <p:cNvSpPr/>
+          <p:nvPr/>
+        </p:nvSpPr>
+        <p:spPr>
+          <a:xfrm>
+            <a:off x="5129784" y="3749040"/>
+            <a:ext cx="2743200" cy="411480"/>
           </a:xfrm>
           <a:prstGeom prst="rect">
             <a:avLst/>
@@ -5985,7 +7063,46 @@
               <a:buNone/>
             </a:pPr>
             <a:r>
-              <a:rPr lang="en-US" sz="1300" dirty="0">
+              <a:rPr lang="en-US" sz="1500" b="1" dirty="0">
+                <a:solidFill>
+                  <a:srgbClr val="16232E"/>
+                </a:solidFill>
+                <a:latin typeface="Calibri" pitchFamily="34" charset="0"/>
+                <a:ea typeface="Calibri" pitchFamily="34" charset="-122"/>
+                <a:cs typeface="Calibri" pitchFamily="34" charset="-120"/>
+              </a:rPr>
+              <a:t>Evita filtração</a:t>
+            </a:r>
+            <a:endParaRPr lang="en-US" sz="1500" dirty="0"/>
+          </a:p>
+        </p:txBody>
+      </p:sp>
+      <p:sp>
+        <p:nvSpPr>
+          <p:cNvPr id="29" name="Text 27"/>
+          <p:cNvSpPr/>
+          <p:nvPr/>
+        </p:nvSpPr>
+        <p:spPr>
+          <a:xfrm>
+            <a:off x="4645152" y="4279392"/>
+            <a:ext cx="3200400" cy="868680"/>
+          </a:xfrm>
+          <a:prstGeom prst="rect">
+            <a:avLst/>
+          </a:prstGeom>
+          <a:noFill/>
+          <a:ln/>
+        </p:spPr>
+        <p:txBody>
+          <a:bodyPr wrap="square" lIns="0" tIns="0" rIns="0" bIns="0" rtlCol="0" anchor="t"/>
+          <a:lstStyle/>
+          <a:p>
+            <a:pPr indent="0" marL="0">
+              <a:buNone/>
+            </a:pPr>
+            <a:r>
+              <a:rPr lang="en-US" sz="1250" dirty="0">
                 <a:solidFill>
                   <a:srgbClr val="55677A"/>
                 </a:solidFill>
@@ -5993,15 +7110,181 @@
                 <a:ea typeface="Calibri" pitchFamily="34" charset="-122"/>
                 <a:cs typeface="Calibri" pitchFamily="34" charset="-120"/>
               </a:rPr>
-              <a:t>Via úmida: exige filtrar/tratar o líquido, resfria o gás (incompatível com o downstream) e o HCl vira ácido</a:t>
-            </a:r>
-            <a:endParaRPr lang="en-US" sz="1300" dirty="0"/>
-          </a:p>
-        </p:txBody>
-      </p:sp>
-      <p:sp>
-        <p:nvSpPr>
-          <p:cNvPr id="25" name="Text 23"/>
+              <a:t>Não gera líquido a filtrar (critério do cliente)</a:t>
+            </a:r>
+            <a:endParaRPr lang="en-US" sz="1250" dirty="0"/>
+          </a:p>
+        </p:txBody>
+      </p:sp>
+      <p:sp>
+        <p:nvSpPr>
+          <p:cNvPr id="30" name="Shape 28"/>
+          <p:cNvSpPr/>
+          <p:nvPr/>
+        </p:nvSpPr>
+        <p:spPr>
+          <a:xfrm>
+            <a:off x="8266176" y="3566160"/>
+            <a:ext cx="3566160" cy="1737360"/>
+          </a:xfrm>
+          <a:prstGeom prst="roundRect">
+            <a:avLst>
+              <a:gd name="adj" fmla="val 3684"/>
+            </a:avLst>
+          </a:prstGeom>
+          <a:solidFill>
+            <a:srgbClr val="F1F6FB"/>
+          </a:solidFill>
+          <a:ln w="12700">
+            <a:solidFill>
+              <a:srgbClr val="D7E1EC"/>
+            </a:solidFill>
+            <a:prstDash val="solid"/>
+          </a:ln>
+        </p:spPr>
+      </p:sp>
+      <p:sp>
+        <p:nvSpPr>
+          <p:cNvPr id="31" name="Shape 29"/>
+          <p:cNvSpPr/>
+          <p:nvPr/>
+        </p:nvSpPr>
+        <p:spPr>
+          <a:xfrm>
+            <a:off x="8467344" y="3767328"/>
+            <a:ext cx="384048" cy="384048"/>
+          </a:xfrm>
+          <a:prstGeom prst="roundRect">
+            <a:avLst>
+              <a:gd name="adj" fmla="val 11905"/>
+            </a:avLst>
+          </a:prstGeom>
+          <a:solidFill>
+            <a:srgbClr val="2E8B57"/>
+          </a:solidFill>
+          <a:ln/>
+        </p:spPr>
+      </p:sp>
+      <p:sp>
+        <p:nvSpPr>
+          <p:cNvPr id="32" name="Text 30"/>
+          <p:cNvSpPr/>
+          <p:nvPr/>
+        </p:nvSpPr>
+        <p:spPr>
+          <a:xfrm>
+            <a:off x="8467344" y="3749040"/>
+            <a:ext cx="384048" cy="384048"/>
+          </a:xfrm>
+          <a:prstGeom prst="rect">
+            <a:avLst/>
+          </a:prstGeom>
+          <a:noFill/>
+          <a:ln/>
+        </p:spPr>
+        <p:txBody>
+          <a:bodyPr wrap="square" lIns="0" tIns="0" rIns="0" bIns="0" rtlCol="0" anchor="ctr"/>
+          <a:lstStyle/>
+          <a:p>
+            <a:pPr algn="ctr" indent="0" marL="0">
+              <a:buNone/>
+            </a:pPr>
+            <a:r>
+              <a:rPr lang="en-US" sz="1500" b="1" dirty="0">
+                <a:solidFill>
+                  <a:srgbClr val="FFFFFF"/>
+                </a:solidFill>
+                <a:latin typeface="Calibri" pitchFamily="34" charset="0"/>
+                <a:ea typeface="Calibri" pitchFamily="34" charset="-122"/>
+                <a:cs typeface="Calibri" pitchFamily="34" charset="-120"/>
+              </a:rPr>
+              <a:t>✓</a:t>
+            </a:r>
+            <a:endParaRPr lang="en-US" sz="1500" dirty="0"/>
+          </a:p>
+        </p:txBody>
+      </p:sp>
+      <p:sp>
+        <p:nvSpPr>
+          <p:cNvPr id="33" name="Text 31"/>
+          <p:cNvSpPr/>
+          <p:nvPr/>
+        </p:nvSpPr>
+        <p:spPr>
+          <a:xfrm>
+            <a:off x="8979408" y="3749040"/>
+            <a:ext cx="2743200" cy="411480"/>
+          </a:xfrm>
+          <a:prstGeom prst="rect">
+            <a:avLst/>
+          </a:prstGeom>
+          <a:noFill/>
+          <a:ln/>
+        </p:spPr>
+        <p:txBody>
+          <a:bodyPr wrap="square" lIns="0" tIns="0" rIns="0" bIns="0" rtlCol="0" anchor="ctr"/>
+          <a:lstStyle/>
+          <a:p>
+            <a:pPr indent="0" marL="0">
+              <a:buNone/>
+            </a:pPr>
+            <a:r>
+              <a:rPr lang="en-US" sz="1500" b="1" dirty="0">
+                <a:solidFill>
+                  <a:srgbClr val="16232E"/>
+                </a:solidFill>
+                <a:latin typeface="Calibri" pitchFamily="34" charset="0"/>
+                <a:ea typeface="Calibri" pitchFamily="34" charset="-122"/>
+                <a:cs typeface="Calibri" pitchFamily="34" charset="-120"/>
+              </a:rPr>
+              <a:t>Resiste ao HCl</a:t>
+            </a:r>
+            <a:endParaRPr lang="en-US" sz="1500" dirty="0"/>
+          </a:p>
+        </p:txBody>
+      </p:sp>
+      <p:sp>
+        <p:nvSpPr>
+          <p:cNvPr id="34" name="Text 32"/>
+          <p:cNvSpPr/>
+          <p:nvPr/>
+        </p:nvSpPr>
+        <p:spPr>
+          <a:xfrm>
+            <a:off x="8494776" y="4279392"/>
+            <a:ext cx="3200400" cy="868680"/>
+          </a:xfrm>
+          <a:prstGeom prst="rect">
+            <a:avLst/>
+          </a:prstGeom>
+          <a:noFill/>
+          <a:ln/>
+        </p:spPr>
+        <p:txBody>
+          <a:bodyPr wrap="square" lIns="0" tIns="0" rIns="0" bIns="0" rtlCol="0" anchor="t"/>
+          <a:lstStyle/>
+          <a:p>
+            <a:pPr indent="0" marL="0">
+              <a:buNone/>
+            </a:pPr>
+            <a:r>
+              <a:rPr lang="en-US" sz="1250" dirty="0">
+                <a:solidFill>
+                  <a:srgbClr val="55677A"/>
+                </a:solidFill>
+                <a:latin typeface="Calibri" pitchFamily="34" charset="0"/>
+                <a:ea typeface="Calibri" pitchFamily="34" charset="-122"/>
+                <a:cs typeface="Calibri" pitchFamily="34" charset="-120"/>
+              </a:rPr>
+              <a:t>Via seca vence a corrosão que afunda as úmidas</a:t>
+            </a:r>
+            <a:endParaRPr lang="en-US" sz="1250" dirty="0"/>
+          </a:p>
+        </p:txBody>
+      </p:sp>
+      <p:sp>
+        <p:nvSpPr>
+          <p:cNvPr id="35" name="Text 33"/>
           <p:cNvSpPr/>
           <p:nvPr/>
         </p:nvSpPr>
@@ -6054,7 +7337,7 @@
       </p:sp>
       <p:sp>
         <p:nvSpPr>
-          <p:cNvPr id="26" name="Text 24"/>
+          <p:cNvPr id="36" name="Text 34"/>
           <p:cNvSpPr/>
           <p:nvPr/>
         </p:nvSpPr>
@@ -6102,6 +7385,911 @@
 <file path=ppt/slides/slide8.xml><?xml version="1.0" encoding="utf-8"?>
 <p:sld xmlns:a="http://schemas.openxmlformats.org/drawingml/2006/main" xmlns:r="http://schemas.openxmlformats.org/officeDocument/2006/relationships" xmlns:p="http://schemas.openxmlformats.org/presentationml/2006/main">
   <p:cSld name="Slide 8">
+    <p:bg>
+      <p:bgPr>
+        <a:solidFill>
+          <a:srgbClr val="FFFFFF"/>
+        </a:solidFill>
+      </p:bgPr>
+    </p:bg>
+    <p:spTree>
+      <p:nvGrpSpPr>
+        <p:cNvPr id="1" name=""/>
+        <p:cNvGrpSpPr/>
+        <p:nvPr/>
+      </p:nvGrpSpPr>
+      <p:grpSpPr>
+        <a:xfrm>
+          <a:off x="0" y="0"/>
+          <a:ext cx="0" cy="0"/>
+          <a:chOff x="0" y="0"/>
+          <a:chExt cx="0" cy="0"/>
+        </a:xfrm>
+      </p:grpSpPr>
+      <p:sp>
+        <p:nvSpPr>
+          <p:cNvPr id="2" name="Text 0"/>
+          <p:cNvSpPr/>
+          <p:nvPr/>
+        </p:nvSpPr>
+        <p:spPr>
+          <a:xfrm>
+            <a:off x="566928" y="384048"/>
+            <a:ext cx="8229600" cy="274320"/>
+          </a:xfrm>
+          <a:prstGeom prst="rect">
+            <a:avLst/>
+          </a:prstGeom>
+          <a:noFill/>
+          <a:ln/>
+        </p:spPr>
+        <p:txBody>
+          <a:bodyPr wrap="square" lIns="0" tIns="0" rIns="0" bIns="0" rtlCol="0" anchor="ctr"/>
+          <a:lstStyle/>
+          <a:p>
+            <a:pPr indent="0" marL="0">
+              <a:buNone/>
+            </a:pPr>
+            <a:r>
+              <a:rPr lang="en-US" sz="1100" b="1" spc="200" kern="0" dirty="0">
+                <a:solidFill>
+                  <a:srgbClr val="3E7CA8"/>
+                </a:solidFill>
+                <a:latin typeface="Calibri" pitchFamily="34" charset="0"/>
+                <a:ea typeface="Calibri" pitchFamily="34" charset="-122"/>
+                <a:cs typeface="Calibri" pitchFamily="34" charset="-120"/>
+              </a:rPr>
+              <a:t>O TRADE-OFF</a:t>
+            </a:r>
+            <a:endParaRPr lang="en-US" sz="1100" dirty="0"/>
+          </a:p>
+        </p:txBody>
+      </p:sp>
+      <p:sp>
+        <p:nvSpPr>
+          <p:cNvPr id="3" name="Text 1"/>
+          <p:cNvSpPr/>
+          <p:nvPr/>
+        </p:nvSpPr>
+        <p:spPr>
+          <a:xfrm>
+            <a:off x="566928" y="658368"/>
+            <a:ext cx="10058400" cy="640080"/>
+          </a:xfrm>
+          <a:prstGeom prst="rect">
+            <a:avLst/>
+          </a:prstGeom>
+          <a:noFill/>
+          <a:ln/>
+        </p:spPr>
+        <p:txBody>
+          <a:bodyPr wrap="square" lIns="0" tIns="0" rIns="0" bIns="0" rtlCol="0" anchor="t"/>
+          <a:lstStyle/>
+          <a:p>
+            <a:pPr indent="0" marL="0">
+              <a:buNone/>
+            </a:pPr>
+            <a:r>
+              <a:rPr lang="en-US" sz="2600" b="1" dirty="0">
+                <a:solidFill>
+                  <a:srgbClr val="16232E"/>
+                </a:solidFill>
+                <a:latin typeface="Calibri" pitchFamily="34" charset="0"/>
+                <a:ea typeface="Calibri" pitchFamily="34" charset="-122"/>
+                <a:cs typeface="Calibri" pitchFamily="34" charset="-120"/>
+              </a:rPr>
+              <a:t>Por que as outras não passaram</a:t>
+            </a:r>
+            <a:endParaRPr lang="en-US" sz="2600" dirty="0"/>
+          </a:p>
+        </p:txBody>
+      </p:sp>
+      <p:sp>
+        <p:nvSpPr>
+          <p:cNvPr id="4" name="Text 2"/>
+          <p:cNvSpPr/>
+          <p:nvPr/>
+        </p:nvSpPr>
+        <p:spPr>
+          <a:xfrm>
+            <a:off x="9430207" y="384048"/>
+            <a:ext cx="2194560" cy="274320"/>
+          </a:xfrm>
+          <a:prstGeom prst="rect">
+            <a:avLst/>
+          </a:prstGeom>
+          <a:noFill/>
+          <a:ln/>
+        </p:spPr>
+        <p:txBody>
+          <a:bodyPr wrap="square" lIns="0" tIns="0" rIns="0" bIns="0" rtlCol="0" anchor="ctr"/>
+          <a:lstStyle/>
+          <a:p>
+            <a:pPr algn="r" indent="0" marL="0">
+              <a:buNone/>
+            </a:pPr>
+            <a:r>
+              <a:rPr lang="en-US" sz="1200" b="1" spc="100" kern="0" dirty="0">
+                <a:solidFill>
+                  <a:srgbClr val="1C5FA8"/>
+                </a:solidFill>
+                <a:latin typeface="Calibri" pitchFamily="34" charset="0"/>
+                <a:ea typeface="Calibri" pitchFamily="34" charset="-122"/>
+                <a:cs typeface="Calibri" pitchFamily="34" charset="-120"/>
+              </a:rPr>
+              <a:t>CAEXPERTS</a:t>
+            </a:r>
+            <a:endParaRPr lang="en-US" sz="1200" dirty="0"/>
+          </a:p>
+        </p:txBody>
+      </p:sp>
+      <p:sp>
+        <p:nvSpPr>
+          <p:cNvPr id="5" name="Shape 3"/>
+          <p:cNvSpPr/>
+          <p:nvPr/>
+        </p:nvSpPr>
+        <p:spPr>
+          <a:xfrm>
+            <a:off x="566928" y="1691640"/>
+            <a:ext cx="11064240" cy="1024128"/>
+          </a:xfrm>
+          <a:prstGeom prst="roundRect">
+            <a:avLst>
+              <a:gd name="adj" fmla="val 5357"/>
+            </a:avLst>
+          </a:prstGeom>
+          <a:solidFill>
+            <a:srgbClr val="F1F6FB"/>
+          </a:solidFill>
+          <a:ln w="12700">
+            <a:solidFill>
+              <a:srgbClr val="D7E1EC"/>
+            </a:solidFill>
+            <a:prstDash val="solid"/>
+          </a:ln>
+        </p:spPr>
+      </p:sp>
+      <p:sp>
+        <p:nvSpPr>
+          <p:cNvPr id="6" name="Text 4"/>
+          <p:cNvSpPr/>
+          <p:nvPr/>
+        </p:nvSpPr>
+        <p:spPr>
+          <a:xfrm>
+            <a:off x="795528" y="1691640"/>
+            <a:ext cx="2743200" cy="1024128"/>
+          </a:xfrm>
+          <a:prstGeom prst="rect">
+            <a:avLst/>
+          </a:prstGeom>
+          <a:noFill/>
+          <a:ln/>
+        </p:spPr>
+        <p:txBody>
+          <a:bodyPr wrap="square" lIns="0" tIns="0" rIns="0" bIns="0" rtlCol="0" anchor="ctr"/>
+          <a:lstStyle/>
+          <a:p>
+            <a:pPr indent="0" marL="0">
+              <a:buNone/>
+            </a:pPr>
+            <a:r>
+              <a:rPr lang="en-US" sz="1500" b="1" dirty="0">
+                <a:solidFill>
+                  <a:srgbClr val="16232E"/>
+                </a:solidFill>
+                <a:latin typeface="Calibri" pitchFamily="34" charset="0"/>
+                <a:ea typeface="Calibri" pitchFamily="34" charset="-122"/>
+                <a:cs typeface="Calibri" pitchFamily="34" charset="-120"/>
+              </a:rPr>
+              <a:t>Filtro Cerâmico</a:t>
+            </a:r>
+            <a:endParaRPr lang="en-US" sz="1500" dirty="0"/>
+          </a:p>
+        </p:txBody>
+      </p:sp>
+      <p:sp>
+        <p:nvSpPr>
+          <p:cNvPr id="7" name="Shape 5"/>
+          <p:cNvSpPr/>
+          <p:nvPr/>
+        </p:nvSpPr>
+        <p:spPr>
+          <a:xfrm>
+            <a:off x="3584448" y="2002536"/>
+            <a:ext cx="822960" cy="402336"/>
+          </a:xfrm>
+          <a:prstGeom prst="roundRect">
+            <a:avLst>
+              <a:gd name="adj" fmla="val 11364"/>
+            </a:avLst>
+          </a:prstGeom>
+          <a:solidFill>
+            <a:srgbClr val="D9822B"/>
+          </a:solidFill>
+          <a:ln/>
+        </p:spPr>
+      </p:sp>
+      <p:sp>
+        <p:nvSpPr>
+          <p:cNvPr id="8" name="Text 6"/>
+          <p:cNvSpPr/>
+          <p:nvPr/>
+        </p:nvSpPr>
+        <p:spPr>
+          <a:xfrm>
+            <a:off x="3584448" y="1984248"/>
+            <a:ext cx="822960" cy="420624"/>
+          </a:xfrm>
+          <a:prstGeom prst="rect">
+            <a:avLst/>
+          </a:prstGeom>
+          <a:noFill/>
+          <a:ln/>
+        </p:spPr>
+        <p:txBody>
+          <a:bodyPr wrap="square" lIns="0" tIns="0" rIns="0" bIns="0" rtlCol="0" anchor="ctr"/>
+          <a:lstStyle/>
+          <a:p>
+            <a:pPr algn="ctr" indent="0" marL="0">
+              <a:buNone/>
+            </a:pPr>
+            <a:r>
+              <a:rPr lang="en-US" sz="1400" b="1" dirty="0">
+                <a:solidFill>
+                  <a:srgbClr val="FFFFFF"/>
+                </a:solidFill>
+                <a:latin typeface="Calibri" pitchFamily="34" charset="0"/>
+                <a:ea typeface="Calibri" pitchFamily="34" charset="-122"/>
+                <a:cs typeface="Calibri" pitchFamily="34" charset="-120"/>
+              </a:rPr>
+              <a:t>+8</a:t>
+            </a:r>
+            <a:endParaRPr lang="en-US" sz="1400" dirty="0"/>
+          </a:p>
+        </p:txBody>
+      </p:sp>
+      <p:sp>
+        <p:nvSpPr>
+          <p:cNvPr id="9" name="Text 7"/>
+          <p:cNvSpPr/>
+          <p:nvPr/>
+        </p:nvSpPr>
+        <p:spPr>
+          <a:xfrm>
+            <a:off x="4636008" y="1691640"/>
+            <a:ext cx="6858000" cy="1024128"/>
+          </a:xfrm>
+          <a:prstGeom prst="rect">
+            <a:avLst/>
+          </a:prstGeom>
+          <a:noFill/>
+          <a:ln/>
+        </p:spPr>
+        <p:txBody>
+          <a:bodyPr wrap="square" lIns="0" tIns="0" rIns="0" bIns="0" rtlCol="0" anchor="ctr"/>
+          <a:lstStyle/>
+          <a:p>
+            <a:pPr indent="0" marL="0">
+              <a:buNone/>
+            </a:pPr>
+            <a:r>
+              <a:rPr lang="en-US" sz="1300" dirty="0">
+                <a:solidFill>
+                  <a:srgbClr val="55677A"/>
+                </a:solidFill>
+                <a:latin typeface="Calibri" pitchFamily="34" charset="0"/>
+                <a:ea typeface="Calibri" pitchFamily="34" charset="-122"/>
+                <a:cs typeface="Calibri" pitchFamily="34" charset="-120"/>
+              </a:rPr>
+              <a:t>Melhor eficiência, MAS regeneração de 6–9 h → inviável em contínuo + custo alto</a:t>
+            </a:r>
+            <a:endParaRPr lang="en-US" sz="1300" dirty="0"/>
+          </a:p>
+        </p:txBody>
+      </p:sp>
+      <p:sp>
+        <p:nvSpPr>
+          <p:cNvPr id="10" name="Shape 8"/>
+          <p:cNvSpPr/>
+          <p:nvPr/>
+        </p:nvSpPr>
+        <p:spPr>
+          <a:xfrm>
+            <a:off x="566928" y="2825496"/>
+            <a:ext cx="11064240" cy="1024128"/>
+          </a:xfrm>
+          <a:prstGeom prst="roundRect">
+            <a:avLst>
+              <a:gd name="adj" fmla="val 5357"/>
+            </a:avLst>
+          </a:prstGeom>
+          <a:solidFill>
+            <a:srgbClr val="F1F6FB"/>
+          </a:solidFill>
+          <a:ln w="12700">
+            <a:solidFill>
+              <a:srgbClr val="D7E1EC"/>
+            </a:solidFill>
+            <a:prstDash val="solid"/>
+          </a:ln>
+        </p:spPr>
+      </p:sp>
+      <p:sp>
+        <p:nvSpPr>
+          <p:cNvPr id="11" name="Text 9"/>
+          <p:cNvSpPr/>
+          <p:nvPr/>
+        </p:nvSpPr>
+        <p:spPr>
+          <a:xfrm>
+            <a:off x="795528" y="2825496"/>
+            <a:ext cx="2743200" cy="1024128"/>
+          </a:xfrm>
+          <a:prstGeom prst="rect">
+            <a:avLst/>
+          </a:prstGeom>
+          <a:noFill/>
+          <a:ln/>
+        </p:spPr>
+        <p:txBody>
+          <a:bodyPr wrap="square" lIns="0" tIns="0" rIns="0" bIns="0" rtlCol="0" anchor="ctr"/>
+          <a:lstStyle/>
+          <a:p>
+            <a:pPr indent="0" marL="0">
+              <a:buNone/>
+            </a:pPr>
+            <a:r>
+              <a:rPr lang="en-US" sz="1500" b="1" dirty="0">
+                <a:solidFill>
+                  <a:srgbClr val="16232E"/>
+                </a:solidFill>
+                <a:latin typeface="Calibri" pitchFamily="34" charset="0"/>
+                <a:ea typeface="Calibri" pitchFamily="34" charset="-122"/>
+                <a:cs typeface="Calibri" pitchFamily="34" charset="-120"/>
+              </a:rPr>
+              <a:t>Settler Gravit.</a:t>
+            </a:r>
+            <a:endParaRPr lang="en-US" sz="1500" dirty="0"/>
+          </a:p>
+        </p:txBody>
+      </p:sp>
+      <p:sp>
+        <p:nvSpPr>
+          <p:cNvPr id="12" name="Shape 10"/>
+          <p:cNvSpPr/>
+          <p:nvPr/>
+        </p:nvSpPr>
+        <p:spPr>
+          <a:xfrm>
+            <a:off x="3584448" y="3136392"/>
+            <a:ext cx="822960" cy="402336"/>
+          </a:xfrm>
+          <a:prstGeom prst="roundRect">
+            <a:avLst>
+              <a:gd name="adj" fmla="val 11364"/>
+            </a:avLst>
+          </a:prstGeom>
+          <a:solidFill>
+            <a:srgbClr val="D9822B"/>
+          </a:solidFill>
+          <a:ln/>
+        </p:spPr>
+      </p:sp>
+      <p:sp>
+        <p:nvSpPr>
+          <p:cNvPr id="13" name="Text 11"/>
+          <p:cNvSpPr/>
+          <p:nvPr/>
+        </p:nvSpPr>
+        <p:spPr>
+          <a:xfrm>
+            <a:off x="3584448" y="3118104"/>
+            <a:ext cx="822960" cy="420624"/>
+          </a:xfrm>
+          <a:prstGeom prst="rect">
+            <a:avLst/>
+          </a:prstGeom>
+          <a:noFill/>
+          <a:ln/>
+        </p:spPr>
+        <p:txBody>
+          <a:bodyPr wrap="square" lIns="0" tIns="0" rIns="0" bIns="0" rtlCol="0" anchor="ctr"/>
+          <a:lstStyle/>
+          <a:p>
+            <a:pPr algn="ctr" indent="0" marL="0">
+              <a:buNone/>
+            </a:pPr>
+            <a:r>
+              <a:rPr lang="en-US" sz="1400" b="1" dirty="0">
+                <a:solidFill>
+                  <a:srgbClr val="FFFFFF"/>
+                </a:solidFill>
+                <a:latin typeface="Calibri" pitchFamily="34" charset="0"/>
+                <a:ea typeface="Calibri" pitchFamily="34" charset="-122"/>
+                <a:cs typeface="Calibri" pitchFamily="34" charset="-120"/>
+              </a:rPr>
+              <a:t>+7</a:t>
+            </a:r>
+            <a:endParaRPr lang="en-US" sz="1400" dirty="0"/>
+          </a:p>
+        </p:txBody>
+      </p:sp>
+      <p:sp>
+        <p:nvSpPr>
+          <p:cNvPr id="14" name="Text 12"/>
+          <p:cNvSpPr/>
+          <p:nvPr/>
+        </p:nvSpPr>
+        <p:spPr>
+          <a:xfrm>
+            <a:off x="4636008" y="2825496"/>
+            <a:ext cx="6858000" cy="1024128"/>
+          </a:xfrm>
+          <a:prstGeom prst="rect">
+            <a:avLst/>
+          </a:prstGeom>
+          <a:noFill/>
+          <a:ln/>
+        </p:spPr>
+        <p:txBody>
+          <a:bodyPr wrap="square" lIns="0" tIns="0" rIns="0" bIns="0" rtlCol="0" anchor="ctr"/>
+          <a:lstStyle/>
+          <a:p>
+            <a:pPr indent="0" marL="0">
+              <a:buNone/>
+            </a:pPr>
+            <a:r>
+              <a:rPr lang="en-US" sz="1300" dirty="0">
+                <a:solidFill>
+                  <a:srgbClr val="55677A"/>
+                </a:solidFill>
+                <a:latin typeface="Calibri" pitchFamily="34" charset="0"/>
+                <a:ea typeface="Calibri" pitchFamily="34" charset="-122"/>
+                <a:cs typeface="Calibri" pitchFamily="34" charset="-120"/>
+              </a:rPr>
+              <a:t>Barato e simples, MAS não captura os finos (&lt;200 µm escapam)</a:t>
+            </a:r>
+            <a:endParaRPr lang="en-US" sz="1300" dirty="0"/>
+          </a:p>
+        </p:txBody>
+      </p:sp>
+      <p:sp>
+        <p:nvSpPr>
+          <p:cNvPr id="15" name="Shape 13"/>
+          <p:cNvSpPr/>
+          <p:nvPr/>
+        </p:nvSpPr>
+        <p:spPr>
+          <a:xfrm>
+            <a:off x="566928" y="3959352"/>
+            <a:ext cx="11064240" cy="1024128"/>
+          </a:xfrm>
+          <a:prstGeom prst="roundRect">
+            <a:avLst>
+              <a:gd name="adj" fmla="val 5357"/>
+            </a:avLst>
+          </a:prstGeom>
+          <a:solidFill>
+            <a:srgbClr val="F1F6FB"/>
+          </a:solidFill>
+          <a:ln w="12700">
+            <a:solidFill>
+              <a:srgbClr val="D7E1EC"/>
+            </a:solidFill>
+            <a:prstDash val="solid"/>
+          </a:ln>
+        </p:spPr>
+      </p:sp>
+      <p:sp>
+        <p:nvSpPr>
+          <p:cNvPr id="16" name="Text 14"/>
+          <p:cNvSpPr/>
+          <p:nvPr/>
+        </p:nvSpPr>
+        <p:spPr>
+          <a:xfrm>
+            <a:off x="795528" y="3959352"/>
+            <a:ext cx="2743200" cy="1024128"/>
+          </a:xfrm>
+          <a:prstGeom prst="rect">
+            <a:avLst/>
+          </a:prstGeom>
+          <a:noFill/>
+          <a:ln/>
+        </p:spPr>
+        <p:txBody>
+          <a:bodyPr wrap="square" lIns="0" tIns="0" rIns="0" bIns="0" rtlCol="0" anchor="ctr"/>
+          <a:lstStyle/>
+          <a:p>
+            <a:pPr indent="0" marL="0">
+              <a:buNone/>
+            </a:pPr>
+            <a:r>
+              <a:rPr lang="en-US" sz="1500" b="1" dirty="0">
+                <a:solidFill>
+                  <a:srgbClr val="16232E"/>
+                </a:solidFill>
+                <a:latin typeface="Calibri" pitchFamily="34" charset="0"/>
+                <a:ea typeface="Calibri" pitchFamily="34" charset="-122"/>
+                <a:cs typeface="Calibri" pitchFamily="34" charset="-120"/>
+              </a:rPr>
+              <a:t>ESP</a:t>
+            </a:r>
+            <a:endParaRPr lang="en-US" sz="1500" dirty="0"/>
+          </a:p>
+        </p:txBody>
+      </p:sp>
+      <p:sp>
+        <p:nvSpPr>
+          <p:cNvPr id="17" name="Shape 15"/>
+          <p:cNvSpPr/>
+          <p:nvPr/>
+        </p:nvSpPr>
+        <p:spPr>
+          <a:xfrm>
+            <a:off x="3584448" y="4270248"/>
+            <a:ext cx="822960" cy="402336"/>
+          </a:xfrm>
+          <a:prstGeom prst="roundRect">
+            <a:avLst>
+              <a:gd name="adj" fmla="val 11364"/>
+            </a:avLst>
+          </a:prstGeom>
+          <a:solidFill>
+            <a:srgbClr val="C0504D"/>
+          </a:solidFill>
+          <a:ln/>
+        </p:spPr>
+      </p:sp>
+      <p:sp>
+        <p:nvSpPr>
+          <p:cNvPr id="18" name="Text 16"/>
+          <p:cNvSpPr/>
+          <p:nvPr/>
+        </p:nvSpPr>
+        <p:spPr>
+          <a:xfrm>
+            <a:off x="3584448" y="4251960"/>
+            <a:ext cx="822960" cy="420624"/>
+          </a:xfrm>
+          <a:prstGeom prst="rect">
+            <a:avLst/>
+          </a:prstGeom>
+          <a:noFill/>
+          <a:ln/>
+        </p:spPr>
+        <p:txBody>
+          <a:bodyPr wrap="square" lIns="0" tIns="0" rIns="0" bIns="0" rtlCol="0" anchor="ctr"/>
+          <a:lstStyle/>
+          <a:p>
+            <a:pPr algn="ctr" indent="0" marL="0">
+              <a:buNone/>
+            </a:pPr>
+            <a:r>
+              <a:rPr lang="en-US" sz="1400" b="1" dirty="0">
+                <a:solidFill>
+                  <a:srgbClr val="FFFFFF"/>
+                </a:solidFill>
+                <a:latin typeface="Calibri" pitchFamily="34" charset="0"/>
+                <a:ea typeface="Calibri" pitchFamily="34" charset="-122"/>
+                <a:cs typeface="Calibri" pitchFamily="34" charset="-120"/>
+              </a:rPr>
+              <a:t>+5</a:t>
+            </a:r>
+            <a:endParaRPr lang="en-US" sz="1400" dirty="0"/>
+          </a:p>
+        </p:txBody>
+      </p:sp>
+      <p:sp>
+        <p:nvSpPr>
+          <p:cNvPr id="19" name="Text 17"/>
+          <p:cNvSpPr/>
+          <p:nvPr/>
+        </p:nvSpPr>
+        <p:spPr>
+          <a:xfrm>
+            <a:off x="4636008" y="3959352"/>
+            <a:ext cx="6858000" cy="1024128"/>
+          </a:xfrm>
+          <a:prstGeom prst="rect">
+            <a:avLst/>
+          </a:prstGeom>
+          <a:noFill/>
+          <a:ln/>
+        </p:spPr>
+        <p:txBody>
+          <a:bodyPr wrap="square" lIns="0" tIns="0" rIns="0" bIns="0" rtlCol="0" anchor="ctr"/>
+          <a:lstStyle/>
+          <a:p>
+            <a:pPr indent="0" marL="0">
+              <a:buNone/>
+            </a:pPr>
+            <a:r>
+              <a:rPr lang="en-US" sz="1300" dirty="0">
+                <a:solidFill>
+                  <a:srgbClr val="55677A"/>
+                </a:solidFill>
+                <a:latin typeface="Calibri" pitchFamily="34" charset="0"/>
+                <a:ea typeface="Calibri" pitchFamily="34" charset="-122"/>
+                <a:cs typeface="Calibri" pitchFamily="34" charset="-120"/>
+              </a:rPr>
+              <a:t>Degrada acima de 400 °C — eficiência cai e consumo sobe</a:t>
+            </a:r>
+            <a:endParaRPr lang="en-US" sz="1300" dirty="0"/>
+          </a:p>
+        </p:txBody>
+      </p:sp>
+      <p:sp>
+        <p:nvSpPr>
+          <p:cNvPr id="20" name="Shape 18"/>
+          <p:cNvSpPr/>
+          <p:nvPr/>
+        </p:nvSpPr>
+        <p:spPr>
+          <a:xfrm>
+            <a:off x="566928" y="5093208"/>
+            <a:ext cx="11064240" cy="1024128"/>
+          </a:xfrm>
+          <a:prstGeom prst="roundRect">
+            <a:avLst>
+              <a:gd name="adj" fmla="val 5357"/>
+            </a:avLst>
+          </a:prstGeom>
+          <a:solidFill>
+            <a:srgbClr val="F1F6FB"/>
+          </a:solidFill>
+          <a:ln w="12700">
+            <a:solidFill>
+              <a:srgbClr val="D7E1EC"/>
+            </a:solidFill>
+            <a:prstDash val="solid"/>
+          </a:ln>
+        </p:spPr>
+      </p:sp>
+      <p:sp>
+        <p:nvSpPr>
+          <p:cNvPr id="21" name="Text 19"/>
+          <p:cNvSpPr/>
+          <p:nvPr/>
+        </p:nvSpPr>
+        <p:spPr>
+          <a:xfrm>
+            <a:off x="795528" y="5093208"/>
+            <a:ext cx="2743200" cy="1024128"/>
+          </a:xfrm>
+          <a:prstGeom prst="rect">
+            <a:avLst/>
+          </a:prstGeom>
+          <a:noFill/>
+          <a:ln/>
+        </p:spPr>
+        <p:txBody>
+          <a:bodyPr wrap="square" lIns="0" tIns="0" rIns="0" bIns="0" rtlCol="0" anchor="ctr"/>
+          <a:lstStyle/>
+          <a:p>
+            <a:pPr indent="0" marL="0">
+              <a:buNone/>
+            </a:pPr>
+            <a:r>
+              <a:rPr lang="en-US" sz="1500" b="1" dirty="0">
+                <a:solidFill>
+                  <a:srgbClr val="16232E"/>
+                </a:solidFill>
+                <a:latin typeface="Calibri" pitchFamily="34" charset="0"/>
+                <a:ea typeface="Calibri" pitchFamily="34" charset="-122"/>
+                <a:cs typeface="Calibri" pitchFamily="34" charset="-120"/>
+              </a:rPr>
+              <a:t>Quench / Scrubber</a:t>
+            </a:r>
+            <a:endParaRPr lang="en-US" sz="1500" dirty="0"/>
+          </a:p>
+        </p:txBody>
+      </p:sp>
+      <p:sp>
+        <p:nvSpPr>
+          <p:cNvPr id="22" name="Shape 20"/>
+          <p:cNvSpPr/>
+          <p:nvPr/>
+        </p:nvSpPr>
+        <p:spPr>
+          <a:xfrm>
+            <a:off x="3584448" y="5404104"/>
+            <a:ext cx="822960" cy="402336"/>
+          </a:xfrm>
+          <a:prstGeom prst="roundRect">
+            <a:avLst>
+              <a:gd name="adj" fmla="val 11364"/>
+            </a:avLst>
+          </a:prstGeom>
+          <a:solidFill>
+            <a:srgbClr val="C0504D"/>
+          </a:solidFill>
+          <a:ln/>
+        </p:spPr>
+      </p:sp>
+      <p:sp>
+        <p:nvSpPr>
+          <p:cNvPr id="23" name="Text 21"/>
+          <p:cNvSpPr/>
+          <p:nvPr/>
+        </p:nvSpPr>
+        <p:spPr>
+          <a:xfrm>
+            <a:off x="3584448" y="5385816"/>
+            <a:ext cx="822960" cy="420624"/>
+          </a:xfrm>
+          <a:prstGeom prst="rect">
+            <a:avLst/>
+          </a:prstGeom>
+          <a:noFill/>
+          <a:ln/>
+        </p:spPr>
+        <p:txBody>
+          <a:bodyPr wrap="square" lIns="0" tIns="0" rIns="0" bIns="0" rtlCol="0" anchor="ctr"/>
+          <a:lstStyle/>
+          <a:p>
+            <a:pPr algn="ctr" indent="0" marL="0">
+              <a:buNone/>
+            </a:pPr>
+            <a:r>
+              <a:rPr lang="en-US" sz="1400" b="1" dirty="0">
+                <a:solidFill>
+                  <a:srgbClr val="FFFFFF"/>
+                </a:solidFill>
+                <a:latin typeface="Calibri" pitchFamily="34" charset="0"/>
+                <a:ea typeface="Calibri" pitchFamily="34" charset="-122"/>
+                <a:cs typeface="Calibri" pitchFamily="34" charset="-120"/>
+              </a:rPr>
+              <a:t>+3</a:t>
+            </a:r>
+            <a:endParaRPr lang="en-US" sz="1400" dirty="0"/>
+          </a:p>
+        </p:txBody>
+      </p:sp>
+      <p:sp>
+        <p:nvSpPr>
+          <p:cNvPr id="24" name="Text 22"/>
+          <p:cNvSpPr/>
+          <p:nvPr/>
+        </p:nvSpPr>
+        <p:spPr>
+          <a:xfrm>
+            <a:off x="4636008" y="5093208"/>
+            <a:ext cx="6858000" cy="1024128"/>
+          </a:xfrm>
+          <a:prstGeom prst="rect">
+            <a:avLst/>
+          </a:prstGeom>
+          <a:noFill/>
+          <a:ln/>
+        </p:spPr>
+        <p:txBody>
+          <a:bodyPr wrap="square" lIns="0" tIns="0" rIns="0" bIns="0" rtlCol="0" anchor="ctr"/>
+          <a:lstStyle/>
+          <a:p>
+            <a:pPr indent="0" marL="0">
+              <a:buNone/>
+            </a:pPr>
+            <a:r>
+              <a:rPr lang="en-US" sz="1300" dirty="0">
+                <a:solidFill>
+                  <a:srgbClr val="55677A"/>
+                </a:solidFill>
+                <a:latin typeface="Calibri" pitchFamily="34" charset="0"/>
+                <a:ea typeface="Calibri" pitchFamily="34" charset="-122"/>
+                <a:cs typeface="Calibri" pitchFamily="34" charset="-120"/>
+              </a:rPr>
+              <a:t>Via úmida: exige filtrar/tratar o líquido, resfria o gás (incompatível com o downstream) e o HCl vira ácido</a:t>
+            </a:r>
+            <a:endParaRPr lang="en-US" sz="1300" dirty="0"/>
+          </a:p>
+        </p:txBody>
+      </p:sp>
+      <p:sp>
+        <p:nvSpPr>
+          <p:cNvPr id="25" name="Text 23"/>
+          <p:cNvSpPr/>
+          <p:nvPr/>
+        </p:nvSpPr>
+        <p:spPr>
+          <a:xfrm>
+            <a:off x="566928" y="6455664"/>
+            <a:ext cx="8229600" cy="274320"/>
+          </a:xfrm>
+          <a:prstGeom prst="rect">
+            <a:avLst/>
+          </a:prstGeom>
+          <a:noFill/>
+          <a:ln/>
+        </p:spPr>
+        <p:txBody>
+          <a:bodyPr wrap="square" lIns="0" tIns="0" rIns="0" bIns="0" rtlCol="0" anchor="ctr"/>
+          <a:lstStyle/>
+          <a:p>
+            <a:pPr algn="l" indent="0" marL="0">
+              <a:buNone/>
+            </a:pPr>
+            <a:r>
+              <a:rPr lang="en-US" sz="900" b="1" dirty="0">
+                <a:solidFill>
+                  <a:srgbClr val="1C5FA8"/>
+                </a:solidFill>
+                <a:latin typeface="Calibri" pitchFamily="34" charset="0"/>
+                <a:ea typeface="Calibri" pitchFamily="34" charset="-122"/>
+                <a:cs typeface="Calibri" pitchFamily="34" charset="-120"/>
+              </a:rPr>
+              <a:t>CAEXPERTS</a:t>
+            </a:r>
+            <a:pPr algn="l" indent="0" marL="0">
+              <a:buNone/>
+            </a:pPr>
+            <a:r>
+              <a:rPr lang="en-US" sz="900" dirty="0">
+                <a:solidFill>
+                  <a:srgbClr val="55677A"/>
+                </a:solidFill>
+                <a:latin typeface="Calibri" pitchFamily="34" charset="0"/>
+                <a:ea typeface="Calibri" pitchFamily="34" charset="-122"/>
+                <a:cs typeface="Calibri" pitchFamily="34" charset="-120"/>
+              </a:rPr>
+              <a:t>  ·  Separacao Gas-Solido  ·  Valgroup</a:t>
+            </a:r>
+            <a:endParaRPr lang="en-US" sz="900" dirty="0"/>
+          </a:p>
+        </p:txBody>
+      </p:sp>
+      <p:sp>
+        <p:nvSpPr>
+          <p:cNvPr id="26" name="Text 24"/>
+          <p:cNvSpPr/>
+          <p:nvPr/>
+        </p:nvSpPr>
+        <p:spPr>
+          <a:xfrm>
+            <a:off x="11167567" y="6455664"/>
+            <a:ext cx="457200" cy="274320"/>
+          </a:xfrm>
+          <a:prstGeom prst="rect">
+            <a:avLst/>
+          </a:prstGeom>
+          <a:noFill/>
+          <a:ln/>
+        </p:spPr>
+        <p:txBody>
+          <a:bodyPr wrap="square" lIns="0" tIns="0" rIns="0" bIns="0" rtlCol="0" anchor="ctr"/>
+          <a:lstStyle/>
+          <a:p>
+            <a:pPr algn="r" indent="0" marL="0">
+              <a:buNone/>
+            </a:pPr>
+            <a:r>
+              <a:rPr lang="en-US" sz="900" dirty="0">
+                <a:solidFill>
+                  <a:srgbClr val="55677A"/>
+                </a:solidFill>
+                <a:latin typeface="Calibri" pitchFamily="34" charset="0"/>
+                <a:ea typeface="Calibri" pitchFamily="34" charset="-122"/>
+                <a:cs typeface="Calibri" pitchFamily="34" charset="-120"/>
+              </a:rPr>
+              <a:t>8</a:t>
+            </a:r>
+            <a:endParaRPr lang="en-US" sz="900" dirty="0"/>
+          </a:p>
+        </p:txBody>
+      </p:sp>
+    </p:spTree>
+  </p:cSld>
+  <p:clrMapOvr>
+    <a:masterClrMapping/>
+  </p:clrMapOvr>
+</p:sld>
+</file>
+
+<file path=ppt/slides/slide9.xml><?xml version="1.0" encoding="utf-8"?>
+<p:sld xmlns:a="http://schemas.openxmlformats.org/drawingml/2006/main" xmlns:r="http://schemas.openxmlformats.org/officeDocument/2006/relationships" xmlns:p="http://schemas.openxmlformats.org/presentationml/2006/main">
+  <p:cSld name="Slide 9">
     <p:bg>
       <p:bgPr>
         <a:solidFill>
